--- a/lessons/lesson05_research_grade_ml/theory/slides/Lecture5 - Research-Grade Machine Learning.pptx
+++ b/lessons/lesson05_research_grade_ml/theory/slides/Lecture5 - Research-Grade Machine Learning.pptx
@@ -4,6 +4,9 @@
   <p:sldMasterIdLst>
     <p:sldMasterId id="2147483648" r:id="rId1"/>
   </p:sldMasterIdLst>
+  <p:notesMasterIdLst>
+    <p:notesMasterId r:id="rId27"/>
+  </p:notesMasterIdLst>
   <p:sldIdLst>
     <p:sldId id="256" r:id="rId2"/>
     <p:sldId id="257" r:id="rId3"/>
@@ -31,9 +34,6 @@
     <p:sldId id="279" r:id="rId25"/>
     <p:sldId id="280" r:id="rId26"/>
   </p:sldIdLst>
-  <p:notesMasterIdLst>
-    <p:notesMasterId r:id="rId27"/>
-  </p:notesMasterIdLst>
   <p:sldSz cx="12192000" cy="6858000"/>
   <p:notesSz cx="6858000" cy="12192000"/>
   <p:defaultTextStyle>
@@ -128,13 +128,20 @@
       </a:defRPr>
     </a:lvl9pPr>
   </p:defaultTextStyle>
+  <p:extLst>
+    <p:ext uri="{EFAFB233-063F-42B5-8137-9DF3F51BA10A}">
+      <p15:sldGuideLst xmlns:p15="http://schemas.microsoft.com/office/powerpoint/2012/main"/>
+    </p:ext>
+  </p:extLst>
 </p:presentation>
 </file>
 
 <file path=ppt/charts/chart1.xml><?xml version="1.0" encoding="utf-8"?>
-<c:chartSpace xmlns:c="http://schemas.openxmlformats.org/drawingml/2006/chart" xmlns:a="http://schemas.openxmlformats.org/drawingml/2006/main" xmlns:r="http://schemas.openxmlformats.org/officeDocument/2006/relationships">
+<c:chartSpace xmlns:c="http://schemas.openxmlformats.org/drawingml/2006/chart" xmlns:a="http://schemas.openxmlformats.org/drawingml/2006/main" xmlns:r="http://schemas.openxmlformats.org/officeDocument/2006/relationships" xmlns:c16r2="http://schemas.microsoft.com/office/drawing/2015/06/chart">
   <c:date1904 val="0"/>
+  <c:lang val="en-GB"/>
   <c:roundedCorners val="1"/>
+  <c:style val="2"/>
   <c:chart>
     <c:autoTitleDeleted val="1"/>
     <c:plotArea>
@@ -166,18 +173,26 @@
           <c:invertIfNegative val="0"/>
           <c:dLbls>
             <c:numFmt formatCode="0.00" sourceLinked="0"/>
+            <c:spPr>
+              <a:noFill/>
+              <a:ln>
+                <a:noFill/>
+              </a:ln>
+              <a:effectLst/>
+            </c:spPr>
             <c:txPr>
               <a:bodyPr/>
               <a:lstStyle/>
               <a:p>
                 <a:pPr>
-                  <a:defRPr b="1" i="0" strike="noStrike" sz="1200" u="none">
+                  <a:defRPr sz="1200" b="1" i="0" u="none" strike="noStrike">
                     <a:solidFill>
                       <a:srgbClr val="12262B"/>
                     </a:solidFill>
                     <a:latin typeface="Arial"/>
                   </a:defRPr>
                 </a:pPr>
+                <a:endParaRPr lang="en-IT"/>
               </a:p>
             </c:txPr>
             <c:showLegendKey val="0"/>
@@ -187,22 +202,25 @@
             <c:showPercent val="0"/>
             <c:showBubbleSize val="0"/>
             <c:showLeaderLines val="0"/>
+            <c:extLst>
+              <c:ext xmlns:c15="http://schemas.microsoft.com/office/drawing/2012/chart" uri="{CE6537A1-D6FC-4f65-9D91-7224C49458BB}">
+                <c15:showLeaderLines val="0"/>
+              </c:ext>
+            </c:extLst>
           </c:dLbls>
           <c:cat>
-            <c:multiLvlStrRef>
+            <c:strRef>
               <c:f>Sheet1!$A$2:$A$3</c:f>
-              <c:multiLvlStrCache>
+              <c:strCache>
                 <c:ptCount val="2"/>
-                <c:lvl>
-                  <c:pt idx="0">
-                    <c:v>internal</c:v>
-                  </c:pt>
-                  <c:pt idx="1">
-                    <c:v>external</c:v>
-                  </c:pt>
-                </c:lvl>
-              </c:multiLvlStrCache>
-            </c:multiLvlStrRef>
+                <c:pt idx="0">
+                  <c:v>internal</c:v>
+                </c:pt>
+                <c:pt idx="1">
+                  <c:v>external</c:v>
+                </c:pt>
+              </c:strCache>
+            </c:strRef>
           </c:cat>
           <c:val>
             <c:numRef>
@@ -219,36 +237,23 @@
               </c:numCache>
             </c:numRef>
           </c:val>
+          <c:extLst>
+            <c:ext xmlns:c16="http://schemas.microsoft.com/office/drawing/2014/chart" uri="{C3380CC4-5D6E-409C-BE32-E72D297353CC}">
+              <c16:uniqueId val="{00000000-084A-E04E-B167-6791F7CBEFAE}"/>
+            </c:ext>
+          </c:extLst>
         </c:ser>
         <c:dLbls>
-          <c:numFmt formatCode="0.00" sourceLinked="0"/>
-          <c:txPr>
-            <a:bodyPr/>
-            <a:lstStyle/>
-            <a:p>
-              <a:pPr>
-                <a:defRPr b="1" i="0" strike="noStrike" sz="1200" u="none">
-                  <a:solidFill>
-                    <a:srgbClr val="12262B"/>
-                  </a:solidFill>
-                  <a:latin typeface="Arial"/>
-                </a:defRPr>
-              </a:pPr>
-            </a:p>
-          </c:txPr>
           <c:showLegendKey val="0"/>
           <c:showVal val="1"/>
           <c:showCatName val="0"/>
           <c:showSerName val="0"/>
           <c:showPercent val="0"/>
           <c:showBubbleSize val="0"/>
-          <c:showLeaderLines val="0"/>
         </c:dLbls>
         <c:gapWidth val="150"/>
-        <c:overlap val="0"/>
         <c:axId val="2094734554"/>
         <c:axId val="2094734552"/>
-        <c:axId val="2094734556"/>
       </c:barChart>
       <c:catAx>
         <c:axId val="2094734554"/>
@@ -282,13 +287,14 @@
                 <a:latin typeface="Arial"/>
               </a:defRPr>
             </a:pPr>
-            <a:endParaRPr lang="en-US"/>
+            <a:endParaRPr lang="en-IT"/>
           </a:p>
         </c:txPr>
         <c:crossAx val="2094734552"/>
         <c:crosses val="autoZero"/>
         <c:auto val="1"/>
         <c:lblAlgn val="ctr"/>
+        <c:lblOffset val="100"/>
         <c:noMultiLvlLbl val="1"/>
       </c:catAx>
       <c:valAx>
@@ -304,30 +310,6 @@
         <c:majorTickMark val="out"/>
         <c:minorTickMark val="none"/>
         <c:tickLblPos val="nextTo"/>
-        <c:spPr>
-          <a:ln w="12700" cap="flat">
-            <a:solidFill>
-              <a:srgbClr val="888888"/>
-            </a:solidFill>
-            <a:prstDash val="solid"/>
-            <a:round/>
-          </a:ln>
-        </c:spPr>
-        <c:txPr>
-          <a:bodyPr/>
-          <a:lstStyle/>
-          <a:p>
-            <a:pPr>
-              <a:defRPr sz="1200" b="0" i="0" u="none" strike="noStrike">
-                <a:solidFill>
-                  <a:srgbClr val="000000"/>
-                </a:solidFill>
-                <a:latin typeface="Arial"/>
-              </a:defRPr>
-            </a:pPr>
-            <a:endParaRPr lang="en-US"/>
-          </a:p>
-        </c:txPr>
         <c:crossAx val="2094734554"/>
         <c:crosses val="autoZero"/>
         <c:crossBetween val="between"/>
@@ -342,6 +324,7 @@
     </c:plotArea>
     <c:plotVisOnly val="1"/>
     <c:dispBlanksAs val="span"/>
+    <c:showDLblsOverMax val="1"/>
   </c:chart>
   <c:spPr>
     <a:noFill/>
@@ -378,234 +361,10 @@
           <a:chExt cx="0" cy="0"/>
         </a:xfrm>
       </p:grpSpPr>
-      <p:sp>
-        <p:nvSpPr>
-          <p:cNvPr id="2" name="Header Placeholder 1"/>
-          <p:cNvSpPr>
-            <a:spLocks noGrp="1"/>
-          </p:cNvSpPr>
-          <p:nvPr>
-            <p:ph type="hdr" sz="quarter"/>
-          </p:nvPr>
-        </p:nvSpPr>
-        <p:spPr>
-          <a:xfrm>
-            <a:off x="0" y="0"/>
-            <a:ext cx="2971800" cy="458788"/>
-          </a:xfrm>
-          <a:prstGeom prst="rect">
-            <a:avLst/>
-          </a:prstGeom>
-        </p:spPr>
-        <p:txBody>
-          <a:bodyPr vert="horz" lIns="91440" tIns="45720" rIns="91440" bIns="45720" rtlCol="0"/>
-          <a:lstStyle>
-            <a:lvl1pPr algn="l">
-              <a:defRPr sz="1200"/>
-            </a:lvl1pPr>
-          </a:lstStyle>
-          <a:p>
-            <a:endParaRPr lang="en-US"/>
-          </a:p>
-        </p:txBody>
-      </p:sp>
-      <p:sp>
-        <p:nvSpPr>
-          <p:cNvPr id="3" name="Date Placeholder 2"/>
-          <p:cNvSpPr>
-            <a:spLocks noGrp="1"/>
-          </p:cNvSpPr>
-          <p:nvPr>
-            <p:ph type="dt" idx="1"/>
-          </p:nvPr>
-        </p:nvSpPr>
-        <p:spPr>
-          <a:xfrm>
-            <a:off x="3884613" y="0"/>
-            <a:ext cx="2971800" cy="458788"/>
-          </a:xfrm>
-          <a:prstGeom prst="rect">
-            <a:avLst/>
-          </a:prstGeom>
-        </p:spPr>
-        <p:txBody>
-          <a:bodyPr vert="horz" lIns="91440" tIns="45720" rIns="91440" bIns="45720" rtlCol="0"/>
-          <a:lstStyle>
-            <a:lvl1pPr algn="r">
-              <a:defRPr sz="1200"/>
-            </a:lvl1pPr>
-          </a:lstStyle>
-          <a:p>
-            <a:fld id="{5282F153-3F37-0F45-9E97-73ACFA13230C}" type="datetimeFigureOut">
-              <a:rPr lang="en-US"/>
-              <a:t>7/23/19</a:t>
-            </a:fld>
-            <a:endParaRPr lang="en-US"/>
-          </a:p>
-        </p:txBody>
-      </p:sp>
-      <p:sp>
-        <p:nvSpPr>
-          <p:cNvPr id="4" name="Slide Image Placeholder 3"/>
-          <p:cNvSpPr>
-            <a:spLocks noGrp="1" noRot="1" noChangeAspect="1"/>
-          </p:cNvSpPr>
-          <p:nvPr>
-            <p:ph type="sldImg" idx="2"/>
-          </p:nvPr>
-        </p:nvSpPr>
-        <p:spPr>
-          <a:xfrm>
-            <a:off x="685800" y="1143000"/>
-            <a:ext cx="5486400" cy="3086100"/>
-          </a:xfrm>
-          <a:prstGeom prst="rect">
-            <a:avLst/>
-          </a:prstGeom>
-          <a:noFill/>
-          <a:ln w="12700">
-            <a:solidFill>
-              <a:prstClr val="black"/>
-            </a:solidFill>
-          </a:ln>
-        </p:spPr>
-        <p:txBody>
-          <a:bodyPr vert="horz" lIns="91440" tIns="45720" rIns="91440" bIns="45720" rtlCol="0" anchor="ctr"/>
-          <a:lstStyle/>
-          <a:p>
-            <a:endParaRPr lang="en-US"/>
-          </a:p>
-        </p:txBody>
-      </p:sp>
-      <p:sp>
-        <p:nvSpPr>
-          <p:cNvPr id="5" name="Notes Placeholder 4"/>
-          <p:cNvSpPr>
-            <a:spLocks noGrp="1"/>
-          </p:cNvSpPr>
-          <p:nvPr>
-            <p:ph type="body" sz="quarter" idx="3"/>
-          </p:nvPr>
-        </p:nvSpPr>
-        <p:spPr>
-          <a:xfrm>
-            <a:off x="685800" y="4400550"/>
-            <a:ext cx="5486400" cy="3600450"/>
-          </a:xfrm>
-          <a:prstGeom prst="rect">
-            <a:avLst/>
-          </a:prstGeom>
-        </p:spPr>
-        <p:txBody>
-          <a:bodyPr vert="horz" lIns="91440" tIns="45720" rIns="91440" bIns="45720" rtlCol="0"/>
-          <a:lstStyle/>
-          <a:p>
-            <a:pPr lvl="0"/>
-            <a:r>
-              <a:rPr lang="en-US"/>
-              <a:t>Click to edit Master text styles</a:t>
-            </a:r>
-          </a:p>
-          <a:p>
-            <a:pPr lvl="1"/>
-            <a:r>
-              <a:rPr lang="en-US"/>
-              <a:t>Second level</a:t>
-            </a:r>
-          </a:p>
-          <a:p>
-            <a:pPr lvl="2"/>
-            <a:r>
-              <a:rPr lang="en-US"/>
-              <a:t>Third level</a:t>
-            </a:r>
-          </a:p>
-          <a:p>
-            <a:pPr lvl="3"/>
-            <a:r>
-              <a:rPr lang="en-US"/>
-              <a:t>Fourth level</a:t>
-            </a:r>
-          </a:p>
-          <a:p>
-            <a:pPr lvl="4"/>
-            <a:r>
-              <a:rPr lang="en-US"/>
-              <a:t>Fifth level</a:t>
-            </a:r>
-          </a:p>
-        </p:txBody>
-      </p:sp>
-      <p:sp>
-        <p:nvSpPr>
-          <p:cNvPr id="6" name="Footer Placeholder 5"/>
-          <p:cNvSpPr>
-            <a:spLocks noGrp="1"/>
-          </p:cNvSpPr>
-          <p:nvPr>
-            <p:ph type="ftr" sz="quarter" idx="4"/>
-          </p:nvPr>
-        </p:nvSpPr>
-        <p:spPr>
-          <a:xfrm>
-            <a:off x="0" y="8685213"/>
-            <a:ext cx="2971800" cy="458787"/>
-          </a:xfrm>
-          <a:prstGeom prst="rect">
-            <a:avLst/>
-          </a:prstGeom>
-        </p:spPr>
-        <p:txBody>
-          <a:bodyPr vert="horz" lIns="91440" tIns="45720" rIns="91440" bIns="45720" rtlCol="0" anchor="b"/>
-          <a:lstStyle>
-            <a:lvl1pPr algn="l">
-              <a:defRPr sz="1200"/>
-            </a:lvl1pPr>
-          </a:lstStyle>
-          <a:p>
-            <a:endParaRPr lang="en-US"/>
-          </a:p>
-        </p:txBody>
-      </p:sp>
-      <p:sp>
-        <p:nvSpPr>
-          <p:cNvPr id="7" name="Slide Number Placeholder 6"/>
-          <p:cNvSpPr>
-            <a:spLocks noGrp="1"/>
-          </p:cNvSpPr>
-          <p:nvPr>
-            <p:ph type="sldNum" sz="quarter" idx="5"/>
-          </p:nvPr>
-        </p:nvSpPr>
-        <p:spPr>
-          <a:xfrm>
-            <a:off x="3884613" y="8685213"/>
-            <a:ext cx="2971800" cy="458787"/>
-          </a:xfrm>
-          <a:prstGeom prst="rect">
-            <a:avLst/>
-          </a:prstGeom>
-        </p:spPr>
-        <p:txBody>
-          <a:bodyPr vert="horz" lIns="91440" tIns="45720" rIns="91440" bIns="45720" rtlCol="0" anchor="b"/>
-          <a:lstStyle>
-            <a:lvl1pPr algn="r">
-              <a:defRPr sz="1200"/>
-            </a:lvl1pPr>
-          </a:lstStyle>
-          <a:p>
-            <a:fld id="{CE5E9CC1-C706-0F49-92D6-E571CC5EEA8F}" type="slidenum">
-              <a:rPr lang="en-US"/>
-              <a:t>‹#›</a:t>
-            </a:fld>
-            <a:endParaRPr lang="en-US"/>
-          </a:p>
-        </p:txBody>
-      </p:sp>
     </p:spTree>
     <p:extLst>
       <p:ext uri="{BB962C8B-B14F-4D97-AF65-F5344CB8AC3E}">
-        <p14:creationId xmlns:p14="http://schemas.microsoft.com/office/powerpoint/2010/main" val="1024086991"/>
+        <p14:creationId xmlns:p14="http://schemas.microsoft.com/office/powerpoint/2010/main" val="1823312221"/>
       </p:ext>
     </p:extLst>
   </p:cSld>
@@ -753,7 +512,6 @@
               <a:rPr lang="en-US" dirty="0"/>
               <a:t>1 min. The shift in perspective: for four lectures you were the builder; today you become the judge. The skill that separates a publishable biomarker from the thousands that fail is demonstrating trust, not a cleverer algorithm.</a:t>
             </a:r>
-            <a:endParaRPr lang="en-US" dirty="0"/>
           </a:p>
         </p:txBody>
       </p:sp>
@@ -841,7 +599,6 @@
               <a:rPr lang="en-US" dirty="0"/>
               <a:t>5 min. Covariate: feature distributions differ (new platform, younger cohort). Label: outcome frequency differs (screening cohort, fewer recurrences). Concept: the feature-&gt;outcome relationship itself changes (new standard of care) -- can invalidate the biomarker entirely.</a:t>
             </a:r>
-            <a:endParaRPr lang="en-US" dirty="0"/>
           </a:p>
         </p:txBody>
       </p:sp>
@@ -929,7 +686,6 @@
               <a:rPr lang="en-US" dirty="0"/>
               <a:t>5 min. All course long we simplified time-to-event recurrence into a binary label -- a deliberate teaching choice. Real outcomes are time-to-event with censoring. Survival models (Cox, conceptually) use the time axis. The validation discipline still applies; the outcome is just richer and more honest.</a:t>
             </a:r>
-            <a:endParaRPr lang="en-US" dirty="0"/>
           </a:p>
         </p:txBody>
       </p:sp>
@@ -1017,7 +773,6 @@
               <a:rPr lang="en-US" dirty="0"/>
               <a:t>4 min. Computational: can someone rerun your analysis and get your numbers? Scientific (replication): can someone reproduce your finding in new data? Different bars -- passing the first does not guarantee the second. Most published work falls short of even the first.</a:t>
             </a:r>
-            <a:endParaRPr lang="en-US" dirty="0"/>
           </a:p>
         </p:txBody>
       </p:sp>
@@ -1105,7 +860,6 @@
               <a:rPr lang="en-US" dirty="0"/>
               <a:t>4 min. Seeds; encapsulated pipelines (refit inside CV); version &amp; environment capture; documentation; open science (code, data where possible, model/spec). Callback (L4): reproducibility is self-defense -- it catches your own leakage before a reviewer.</a:t>
             </a:r>
-            <a:endParaRPr lang="en-US" dirty="0"/>
           </a:p>
         </p:txBody>
       </p:sp>
@@ -1193,7 +947,6 @@
               <a:rPr lang="en-US" dirty="0"/>
               <a:t>5 min. A biomarker can be highly significant and clinically useless. Significance: 'an association exists.' Utility: 'does it change a decision and help a patient?' A tiny HR with a vanishing p-value (large n) may move no decision. Ask: actionability, effect size, added value.</a:t>
             </a:r>
-            <a:endParaRPr lang="en-US" dirty="0"/>
           </a:p>
         </p:txBody>
       </p:sp>
@@ -1281,7 +1034,6 @@
               <a:rPr lang="en-US" dirty="0"/>
               <a:t>4 min. Actionability (changes management). Incremental value (beats grade/stage/nodal/Ki-67). Net benefit at a usable threshold. A biomarker that doesn't beat tumour grade and isn't actionable won't -- and shouldn't -- be adopted.</a:t>
             </a:r>
-            <a:endParaRPr lang="en-US" dirty="0"/>
           </a:p>
         </p:txBody>
       </p:sp>
@@ -1369,7 +1121,6 @@
               <a:rPr lang="en-US" dirty="0"/>
               <a:t>4 min. Exploratory: generate hypotheses, screen many options -- optimistic by nature. Confirmatory: pre-specify model &amp; endpoint, test ONCE on untouched data. Most published biomarker ML is exploratory dressed as confirmatory -- the core sin. Fix: pre-registration / locked plan + a test set touched once.</a:t>
             </a:r>
-            <a:endParaRPr lang="en-US" dirty="0"/>
           </a:p>
         </p:txBody>
       </p:sp>
@@ -1457,7 +1208,6 @@
               <a:rPr lang="en-US" dirty="0"/>
               <a:t>3 min. Reviewers aren't hunting for brilliance -- they check whether the CLAIM is supported by the EVIDENCE. Most rejections are a short list of recurring, avoidable problems. The same list is your pre-submission self-review.</a:t>
             </a:r>
-            <a:endParaRPr lang="en-US" dirty="0"/>
           </a:p>
         </p:txBody>
       </p:sp>
@@ -1545,7 +1295,6 @@
               <a:rPr lang="en-US" dirty="0"/>
               <a:t>5 min. Each is an EVIDENCE failure, not an algorithm failure -- the course thesis again. Criticism -&gt; why it matters -&gt; how to avoid.</a:t>
             </a:r>
-            <a:endParaRPr lang="en-US" dirty="0"/>
           </a:p>
         </p:txBody>
       </p:sp>
@@ -1633,7 +1382,6 @@
               <a:rPr lang="en-US" dirty="0"/>
               <a:t>4 min. Run this on any transcriptomic ML paper. Task &amp; n? Validation appropriate (external?)? Leakage avoided (order of operations)? Reproducible (code/data/seeds)? Conclusions justified? Full version is the reviewer checklist handout.</a:t>
             </a:r>
-            <a:endParaRPr lang="en-US" dirty="0"/>
           </a:p>
         </p:txBody>
       </p:sp>
@@ -1721,7 +1469,6 @@
               <a:rPr lang="en-US" dirty="0"/>
               <a:t>2 min. Trustworthy problem (L1), model (L2), features (L3), improvement &amp; honest validation (L4). You can build and evaluate a model. The hardest thing left: judging whether it is trustworthy and publication-ready. Today: everything that can go wrong, and how to catch it. You move to the reviewer's chair.</a:t>
             </a:r>
-            <a:endParaRPr lang="en-US" dirty="0"/>
           </a:p>
         </p:txBody>
       </p:sp>
@@ -1809,7 +1556,6 @@
               <a:rPr lang="en-US" dirty="0"/>
               <a:t>4 min. Brief, non-technical. Deep learning (powerful with big data; in pn shares/amplifies pitfalls). Foundation models (validation rules unchanged). Multi-omics integration. Spatial omics. Precision oncology. Banner: the validation rules don't change.</a:t>
             </a:r>
-            <a:endParaRPr lang="en-US" dirty="0"/>
           </a:p>
         </p:txBody>
       </p:sp>
@@ -1897,7 +1643,6 @@
               <a:rPr lang="en-US" dirty="0"/>
               <a:t>3 min. New methods raise the performance ceiling; they don't lower the evidence bar. Bigger models in small cohorts can fail HARDER and more confidently. Everything transfers: honest validation, leakage discipline, reproducibility, clinical utility. Skepticism is the durable skill.</a:t>
             </a:r>
-            <a:endParaRPr lang="en-US" dirty="0"/>
           </a:p>
         </p:txBody>
       </p:sp>
@@ -1985,7 +1730,6 @@
               <a:rPr lang="en-US" dirty="0"/>
               <a:t>4 min. Question -&gt; Data -&gt; Baseline -&gt; Features -&gt; Model selection -&gt; Validation -&gt; Interpretation -&gt; Publication. Each stage had a lecture and a failure mode. Trustworthiness is built in at every stage, not bolted on. This pipeline IS the course.</a:t>
             </a:r>
-            <a:endParaRPr lang="en-US" dirty="0"/>
           </a:p>
         </p:txBody>
       </p:sp>
@@ -2073,7 +1817,6 @@
               <a:rPr lang="en-US" dirty="0"/>
               <a:t>2 min. Deliver the thesis with full weight. Corollaries: failures occur after development; validation &gt; optimization; reproducibility is essential; skepticism is healthy. The empowering close: you can now build, evaluate, AND review.</a:t>
             </a:r>
-            <a:endParaRPr lang="en-US" dirty="0"/>
           </a:p>
         </p:txBody>
       </p:sp>
@@ -2161,7 +1904,6 @@
               <a:rPr lang="en-US" dirty="0"/>
               <a:t>3 min. Tick objectives. Capstone: receive a FLAWED biomarker analysis, diagnose its flaws (leakage, no external validation, bad preprocessing, overfitting, unsupported interpretation), build a corrected workflow, compare honestly, and WRITE A REVIEWER REPORT with a publish/revise/reject recommendation. You leave able to build, evaluate, review, and design.</a:t>
             </a:r>
-            <a:endParaRPr lang="en-US" dirty="0"/>
           </a:p>
         </p:txBody>
       </p:sp>
@@ -2249,7 +1991,6 @@
               <a:rPr lang="en-US" dirty="0"/>
               <a:t>2 min. Close the course. Name the through-line; leave the durable charge. The judgment built here outlasts any algorithm. Thank them.</a:t>
             </a:r>
-            <a:endParaRPr lang="en-US" dirty="0"/>
           </a:p>
         </p:txBody>
       </p:sp>
@@ -2337,7 +2078,6 @@
               <a:rPr lang="en-US" dirty="0"/>
               <a:t>2 min. Flag the lecture-defining ones: external validation &amp; generalization, exploratory vs confirmatory, and significance vs clinical utility. The deliverable: by the end you can sit in the reviewer's chair.</a:t>
             </a:r>
-            <a:endParaRPr lang="en-US" dirty="0"/>
           </a:p>
         </p:txBody>
       </p:sp>
@@ -2425,7 +2165,6 @@
               <a:rPr lang="en-US" dirty="0"/>
               <a:t>4 min. Provocative open: thousands of signatures published, a tiny fraction used clinically. Why? Usually not bad biology -- the EVIDENCE was never trustworthy. The failures are predictable, and almost all happen AFTER model development.</a:t>
             </a:r>
-            <a:endParaRPr lang="en-US" dirty="0"/>
           </a:p>
         </p:txBody>
       </p:sp>
@@ -2513,7 +2252,6 @@
               <a:rPr lang="en-US" dirty="0"/>
               <a:t>4 min. Each is a callback and a forward-link. None is about a bad algorithm -- they are evidence failures. Overfitting (L2), small cohorts/pn (L1), dataset bias/batch (L4), no external validation (today), publication bias (the field, not the paper).</a:t>
             </a:r>
-            <a:endParaRPr lang="en-US" dirty="0"/>
           </a:p>
         </p:txBody>
       </p:sp>
@@ -2601,7 +2339,6 @@
               <a:rPr lang="en-US" dirty="0"/>
               <a:t>4 min. Re-anchor the ladder: split -&gt; CV -&gt; nested CV. Each answers 'how well does this pipeline do on data LIKE THIS?' Done right it controls overfitting and tuning optimism. But every rung stays inside the original cohort.</a:t>
             </a:r>
-            <a:endParaRPr lang="en-US" dirty="0"/>
           </a:p>
         </p:txBody>
       </p:sp>
@@ -2689,7 +2426,6 @@
               <a:rPr lang="en-US" dirty="0"/>
               <a:t>5 min. Validate on a DIFFERENT cohort -- hospital, study, population, platform. Closest thing to truth before a trial; tests generalization, not memorization. METABRIC (Illumina) -&gt; GSE6532 (Affymetrix). A model that holds across cohorts has earned a claim.</a:t>
             </a:r>
-            <a:endParaRPr lang="en-US" dirty="0"/>
           </a:p>
         </p:txBody>
       </p:sp>
@@ -2777,7 +2513,6 @@
               <a:rPr lang="en-US" dirty="0"/>
               <a:t>4 min. It exposes what internal hides: batch, cohort quirks, leakage that survived CV. Performance almost always drops -- report how much. 'Validated' should mean externally validated. Beware re-tuning until a signature 'passes' -- that's a second training set.</a:t>
             </a:r>
-            <a:endParaRPr lang="en-US" dirty="0"/>
           </a:p>
         </p:txBody>
       </p:sp>
@@ -2865,7 +2600,6 @@
               <a:rPr lang="en-US" dirty="0"/>
               <a:t>5 min. Models assume the deployment world looks like the training world -- often it doesn't. Distribution shift: the data distribution changes between development and deployment. Sources: population, treatment, platform, lab. The external drop isn't bad luck -- it's a real change in the data.</a:t>
             </a:r>
-            <a:endParaRPr lang="en-US" dirty="0"/>
           </a:p>
         </p:txBody>
       </p:sp>
@@ -2938,6 +2672,11 @@
 <file path=ppt/slideMasters/slideMaster1.xml><?xml version="1.0" encoding="utf-8"?>
 <p:sldMaster xmlns:a="http://schemas.openxmlformats.org/drawingml/2006/main" xmlns:r="http://schemas.openxmlformats.org/officeDocument/2006/relationships" xmlns:p="http://schemas.openxmlformats.org/presentationml/2006/main">
   <p:cSld>
+    <p:bg>
+      <p:bgRef idx="1001">
+        <a:schemeClr val="bg1"/>
+      </p:bgRef>
+    </p:bg>
     <p:spTree>
       <p:nvGrpSpPr>
         <p:cNvPr id="1" name=""/>
@@ -3220,6 +2959,7 @@
         <a:solidFill>
           <a:srgbClr val="0B3B40"/>
         </a:solidFill>
+        <a:effectLst/>
       </p:bgPr>
     </p:bg>
     <p:spTree>
@@ -3281,7 +3021,7 @@
           <a:bodyPr wrap="square" lIns="0" tIns="0" rIns="0" bIns="0" rtlCol="0" anchor="ctr"/>
           <a:lstStyle/>
           <a:p>
-            <a:pPr algn="ctr" indent="0" marL="0">
+            <a:pPr marL="0" indent="0" algn="ctr">
               <a:buNone/>
             </a:pPr>
             <a:r>
@@ -3344,7 +3084,7 @@
           <a:bodyPr wrap="square" lIns="0" tIns="0" rIns="0" bIns="0" rtlCol="0" anchor="ctr"/>
           <a:lstStyle/>
           <a:p>
-            <a:pPr algn="ctr" indent="0" marL="0">
+            <a:pPr marL="0" indent="0" algn="ctr">
               <a:buNone/>
             </a:pPr>
             <a:r>
@@ -3407,7 +3147,7 @@
           <a:bodyPr wrap="square" lIns="0" tIns="0" rIns="0" bIns="0" rtlCol="0" anchor="ctr"/>
           <a:lstStyle/>
           <a:p>
-            <a:pPr algn="ctr" indent="0" marL="0">
+            <a:pPr marL="0" indent="0" algn="ctr">
               <a:buNone/>
             </a:pPr>
             <a:r>
@@ -3470,7 +3210,7 @@
           <a:bodyPr wrap="square" lIns="0" tIns="0" rIns="0" bIns="0" rtlCol="0" anchor="ctr"/>
           <a:lstStyle/>
           <a:p>
-            <a:pPr algn="ctr" indent="0" marL="0">
+            <a:pPr marL="0" indent="0" algn="ctr">
               <a:buNone/>
             </a:pPr>
             <a:r>
@@ -3509,11 +3249,11 @@
           <a:bodyPr wrap="square" lIns="0" tIns="0" rIns="0" bIns="0" rtlCol="0" anchor="ctr"/>
           <a:lstStyle/>
           <a:p>
-            <a:pPr indent="0" marL="0">
-              <a:buNone/>
-            </a:pPr>
-            <a:r>
-              <a:rPr lang="en-US" sz="1500" b="1" spc="300" kern="0" dirty="0">
+            <a:pPr marL="0" indent="0">
+              <a:buNone/>
+            </a:pPr>
+            <a:r>
+              <a:rPr lang="en-US" sz="1500" b="1" kern="0" spc="300" dirty="0">
                 <a:solidFill>
                   <a:srgbClr val="14A6B0"/>
                 </a:solidFill>
@@ -3548,7 +3288,7 @@
           <a:bodyPr wrap="square" lIns="0" tIns="0" rIns="0" bIns="0" rtlCol="0" anchor="ctr"/>
           <a:lstStyle/>
           <a:p>
-            <a:pPr indent="0" marL="0">
+            <a:pPr marL="0" indent="0">
               <a:lnSpc>
                 <a:spcPct val="102000"/>
               </a:lnSpc>
@@ -3568,7 +3308,7 @@
             <a:endParaRPr lang="en-US" sz="3700" dirty="0"/>
           </a:p>
           <a:p>
-            <a:pPr indent="0" marL="0">
+            <a:pPr marL="0" indent="0">
               <a:lnSpc>
                 <a:spcPct val="102000"/>
               </a:lnSpc>
@@ -3610,7 +3350,7 @@
           <a:bodyPr wrap="square" lIns="0" tIns="0" rIns="0" bIns="0" rtlCol="0" anchor="ctr"/>
           <a:lstStyle/>
           <a:p>
-            <a:pPr indent="0" marL="0">
+            <a:pPr marL="0" indent="0">
               <a:buNone/>
             </a:pPr>
             <a:r>
@@ -3649,7 +3389,7 @@
           <a:bodyPr wrap="square" lIns="0" tIns="0" rIns="0" bIns="0" rtlCol="0" anchor="ctr"/>
           <a:lstStyle/>
           <a:p>
-            <a:pPr indent="0" marL="0">
+            <a:pPr marL="0" indent="0">
               <a:buNone/>
             </a:pPr>
             <a:r>
@@ -3688,7 +3428,7 @@
           <a:bodyPr wrap="square" lIns="0" tIns="0" rIns="0" bIns="0" rtlCol="0" anchor="ctr"/>
           <a:lstStyle/>
           <a:p>
-            <a:pPr indent="0" marL="0">
+            <a:pPr marL="0" indent="0">
               <a:buNone/>
             </a:pPr>
             <a:r>
@@ -3727,7 +3467,7 @@
           <a:bodyPr wrap="square" lIns="0" tIns="0" rIns="0" bIns="0" rtlCol="0" anchor="ctr"/>
           <a:lstStyle/>
           <a:p>
-            <a:pPr indent="0" marL="0">
+            <a:pPr marL="0" indent="0">
               <a:buNone/>
             </a:pPr>
             <a:r>
@@ -3739,7 +3479,7 @@
                 <a:ea typeface="Calibri" pitchFamily="34" charset="-122"/>
                 <a:cs typeface="Calibri" pitchFamily="34" charset="-120"/>
               </a:rPr>
-              <a:t>Instructor name · Affiliation · 2026</a:t>
+              <a:t>Y. Zhan · IEO/UNIMI · 2026</a:t>
             </a:r>
             <a:endParaRPr lang="en-US" sz="1200" dirty="0"/>
           </a:p>
@@ -3761,6 +3501,7 @@
         <a:solidFill>
           <a:srgbClr val="FFFFFF"/>
         </a:solidFill>
+        <a:effectLst/>
       </p:bgPr>
     </p:bg>
     <p:spTree>
@@ -3798,11 +3539,11 @@
           <a:bodyPr wrap="square" lIns="0" tIns="0" rIns="0" bIns="0" rtlCol="0" anchor="ctr"/>
           <a:lstStyle/>
           <a:p>
-            <a:pPr indent="0" marL="0">
-              <a:buNone/>
-            </a:pPr>
-            <a:r>
-              <a:rPr lang="en-US" sz="1200" b="1" spc="200" kern="0" dirty="0">
+            <a:pPr marL="0" indent="0">
+              <a:buNone/>
+            </a:pPr>
+            <a:r>
+              <a:rPr lang="en-US" sz="1200" b="1" kern="0" spc="200" dirty="0">
                 <a:solidFill>
                   <a:srgbClr val="0E7C86"/>
                 </a:solidFill>
@@ -3837,7 +3578,7 @@
           <a:bodyPr wrap="square" lIns="0" tIns="0" rIns="0" bIns="0" rtlCol="0" anchor="t"/>
           <a:lstStyle/>
           <a:p>
-            <a:pPr indent="0" marL="0">
+            <a:pPr marL="0" indent="0">
               <a:buNone/>
             </a:pPr>
             <a:r>
@@ -3876,7 +3617,7 @@
           <a:bodyPr wrap="square" lIns="0" tIns="0" rIns="0" bIns="0" rtlCol="0" anchor="ctr"/>
           <a:lstStyle/>
           <a:p>
-            <a:pPr indent="0" marL="0">
+            <a:pPr marL="0" indent="0">
               <a:buNone/>
             </a:pPr>
             <a:r>
@@ -3915,7 +3656,7 @@
           <a:bodyPr wrap="square" lIns="0" tIns="0" rIns="0" bIns="0" rtlCol="0" anchor="ctr"/>
           <a:lstStyle/>
           <a:p>
-            <a:pPr algn="r" indent="0" marL="0">
+            <a:pPr marL="0" indent="0" algn="r">
               <a:buNone/>
             </a:pPr>
             <a:r>
@@ -3954,7 +3695,7 @@
           </a:solidFill>
           <a:ln/>
           <a:effectLst>
-            <a:outerShdw sx="100000" sy="100000" kx="0" ky="0" algn="bl" rotWithShape="0" blurRad="88900" dist="38100" dir="5400000">
+            <a:outerShdw blurRad="88900" dist="38100" dir="5400000" algn="bl" rotWithShape="0">
               <a:srgbClr val="000000">
                 <a:alpha val="12000"/>
               </a:srgbClr>
@@ -4003,7 +3744,7 @@
           <a:bodyPr wrap="square" lIns="0" tIns="0" rIns="0" bIns="0" rtlCol="0" anchor="ctr"/>
           <a:lstStyle/>
           <a:p>
-            <a:pPr algn="ctr" indent="0" marL="0">
+            <a:pPr marL="0" indent="0" algn="ctr">
               <a:buNone/>
             </a:pPr>
             <a:r>
@@ -4042,7 +3783,7 @@
           <a:bodyPr wrap="square" lIns="0" tIns="0" rIns="0" bIns="0" rtlCol="0" anchor="ctr"/>
           <a:lstStyle/>
           <a:p>
-            <a:pPr algn="ctr" indent="0" marL="0">
+            <a:pPr marL="0" indent="0" algn="ctr">
               <a:buNone/>
             </a:pPr>
             <a:r>
@@ -4104,7 +3845,7 @@
           <a:bodyPr wrap="square" lIns="0" tIns="0" rIns="0" bIns="0" rtlCol="0" anchor="ctr"/>
           <a:lstStyle/>
           <a:p>
-            <a:pPr algn="ctr" indent="0" marL="0">
+            <a:pPr marL="0" indent="0" algn="ctr">
               <a:buNone/>
             </a:pPr>
             <a:r>
@@ -4143,7 +3884,7 @@
           <a:bodyPr wrap="square" lIns="0" tIns="0" rIns="0" bIns="0" rtlCol="0" anchor="t"/>
           <a:lstStyle/>
           <a:p>
-            <a:pPr algn="ctr" indent="0" marL="0">
+            <a:pPr marL="0" indent="0" algn="ctr">
               <a:buNone/>
             </a:pPr>
             <a:r>
@@ -4182,7 +3923,7 @@
           </a:solidFill>
           <a:ln/>
           <a:effectLst>
-            <a:outerShdw sx="100000" sy="100000" kx="0" ky="0" algn="bl" rotWithShape="0" blurRad="88900" dist="38100" dir="5400000">
+            <a:outerShdw blurRad="88900" dist="38100" dir="5400000" algn="bl" rotWithShape="0">
               <a:srgbClr val="000000">
                 <a:alpha val="12000"/>
               </a:srgbClr>
@@ -4231,7 +3972,7 @@
           <a:bodyPr wrap="square" lIns="0" tIns="0" rIns="0" bIns="0" rtlCol="0" anchor="ctr"/>
           <a:lstStyle/>
           <a:p>
-            <a:pPr algn="ctr" indent="0" marL="0">
+            <a:pPr marL="0" indent="0" algn="ctr">
               <a:buNone/>
             </a:pPr>
             <a:r>
@@ -4270,7 +4011,7 @@
           <a:bodyPr wrap="square" lIns="0" tIns="0" rIns="0" bIns="0" rtlCol="0" anchor="ctr"/>
           <a:lstStyle/>
           <a:p>
-            <a:pPr algn="ctr" indent="0" marL="0">
+            <a:pPr marL="0" indent="0" algn="ctr">
               <a:buNone/>
             </a:pPr>
             <a:r>
@@ -4332,7 +4073,7 @@
           <a:bodyPr wrap="square" lIns="0" tIns="0" rIns="0" bIns="0" rtlCol="0" anchor="ctr"/>
           <a:lstStyle/>
           <a:p>
-            <a:pPr algn="ctr" indent="0" marL="0">
+            <a:pPr marL="0" indent="0" algn="ctr">
               <a:buNone/>
             </a:pPr>
             <a:r>
@@ -4371,7 +4112,7 @@
           <a:bodyPr wrap="square" lIns="0" tIns="0" rIns="0" bIns="0" rtlCol="0" anchor="t"/>
           <a:lstStyle/>
           <a:p>
-            <a:pPr algn="ctr" indent="0" marL="0">
+            <a:pPr marL="0" indent="0" algn="ctr">
               <a:buNone/>
             </a:pPr>
             <a:r>
@@ -4410,7 +4151,7 @@
           </a:solidFill>
           <a:ln/>
           <a:effectLst>
-            <a:outerShdw sx="100000" sy="100000" kx="0" ky="0" algn="bl" rotWithShape="0" blurRad="88900" dist="38100" dir="5400000">
+            <a:outerShdw blurRad="88900" dist="38100" dir="5400000" algn="bl" rotWithShape="0">
               <a:srgbClr val="000000">
                 <a:alpha val="12000"/>
               </a:srgbClr>
@@ -4459,7 +4200,7 @@
           <a:bodyPr wrap="square" lIns="0" tIns="0" rIns="0" bIns="0" rtlCol="0" anchor="ctr"/>
           <a:lstStyle/>
           <a:p>
-            <a:pPr algn="ctr" indent="0" marL="0">
+            <a:pPr marL="0" indent="0" algn="ctr">
               <a:buNone/>
             </a:pPr>
             <a:r>
@@ -4498,7 +4239,7 @@
           <a:bodyPr wrap="square" lIns="0" tIns="0" rIns="0" bIns="0" rtlCol="0" anchor="ctr"/>
           <a:lstStyle/>
           <a:p>
-            <a:pPr algn="ctr" indent="0" marL="0">
+            <a:pPr marL="0" indent="0" algn="ctr">
               <a:buNone/>
             </a:pPr>
             <a:r>
@@ -4560,7 +4301,7 @@
           <a:bodyPr wrap="square" lIns="0" tIns="0" rIns="0" bIns="0" rtlCol="0" anchor="ctr"/>
           <a:lstStyle/>
           <a:p>
-            <a:pPr algn="ctr" indent="0" marL="0">
+            <a:pPr marL="0" indent="0" algn="ctr">
               <a:buNone/>
             </a:pPr>
             <a:r>
@@ -4599,7 +4340,7 @@
           <a:bodyPr wrap="square" lIns="0" tIns="0" rIns="0" bIns="0" rtlCol="0" anchor="t"/>
           <a:lstStyle/>
           <a:p>
-            <a:pPr algn="ctr" indent="0" marL="0">
+            <a:pPr marL="0" indent="0" algn="ctr">
               <a:buNone/>
             </a:pPr>
             <a:r>
@@ -4638,7 +4379,7 @@
           <a:bodyPr wrap="square" lIns="0" tIns="0" rIns="0" bIns="0" rtlCol="0" anchor="ctr"/>
           <a:lstStyle/>
           <a:p>
-            <a:pPr algn="ctr" indent="0" marL="0">
+            <a:pPr marL="0" indent="0" algn="ctr">
               <a:buNone/>
             </a:pPr>
             <a:r>
@@ -4672,6 +4413,7 @@
         <a:solidFill>
           <a:srgbClr val="FFFFFF"/>
         </a:solidFill>
+        <a:effectLst/>
       </p:bgPr>
     </p:bg>
     <p:spTree>
@@ -4709,11 +4451,11 @@
           <a:bodyPr wrap="square" lIns="0" tIns="0" rIns="0" bIns="0" rtlCol="0" anchor="ctr"/>
           <a:lstStyle/>
           <a:p>
-            <a:pPr indent="0" marL="0">
-              <a:buNone/>
-            </a:pPr>
-            <a:r>
-              <a:rPr lang="en-US" sz="1200" b="1" spc="200" kern="0" dirty="0">
+            <a:pPr marL="0" indent="0">
+              <a:buNone/>
+            </a:pPr>
+            <a:r>
+              <a:rPr lang="en-US" sz="1200" b="1" kern="0" spc="200" dirty="0">
                 <a:solidFill>
                   <a:srgbClr val="0E7C86"/>
                 </a:solidFill>
@@ -4748,7 +4490,7 @@
           <a:bodyPr wrap="square" lIns="0" tIns="0" rIns="0" bIns="0" rtlCol="0" anchor="t"/>
           <a:lstStyle/>
           <a:p>
-            <a:pPr indent="0" marL="0">
+            <a:pPr marL="0" indent="0">
               <a:buNone/>
             </a:pPr>
             <a:r>
@@ -4787,7 +4529,7 @@
           <a:bodyPr wrap="square" lIns="0" tIns="0" rIns="0" bIns="0" rtlCol="0" anchor="ctr"/>
           <a:lstStyle/>
           <a:p>
-            <a:pPr indent="0" marL="0">
+            <a:pPr marL="0" indent="0">
               <a:buNone/>
             </a:pPr>
             <a:r>
@@ -4826,7 +4568,7 @@
           <a:bodyPr wrap="square" lIns="0" tIns="0" rIns="0" bIns="0" rtlCol="0" anchor="ctr"/>
           <a:lstStyle/>
           <a:p>
-            <a:pPr algn="r" indent="0" marL="0">
+            <a:pPr marL="0" indent="0" algn="r">
               <a:buNone/>
             </a:pPr>
             <a:r>
@@ -4996,7 +4738,7 @@
           <a:bodyPr wrap="square" lIns="0" tIns="0" rIns="0" bIns="0" rtlCol="0" anchor="ctr"/>
           <a:lstStyle/>
           <a:p>
-            <a:pPr algn="ctr" indent="0" marL="0">
+            <a:pPr marL="0" indent="0" algn="ctr">
               <a:buNone/>
             </a:pPr>
             <a:r>
@@ -5679,7 +5421,7 @@
           <a:bodyPr wrap="square" lIns="0" tIns="0" rIns="0" bIns="0" rtlCol="0" anchor="ctr"/>
           <a:lstStyle/>
           <a:p>
-            <a:pPr algn="ctr" indent="0" marL="0">
+            <a:pPr marL="0" indent="0" algn="ctr">
               <a:buNone/>
             </a:pPr>
             <a:r>
@@ -5718,7 +5460,7 @@
           <a:bodyPr wrap="square" lIns="0" tIns="0" rIns="0" bIns="0" rtlCol="0" anchor="ctr"/>
           <a:lstStyle/>
           <a:p>
-            <a:pPr indent="0" marL="0">
+            <a:pPr marL="0" indent="0">
               <a:buNone/>
             </a:pPr>
             <a:r>
@@ -5757,7 +5499,7 @@
           <a:bodyPr wrap="square" lIns="0" tIns="0" rIns="0" bIns="0" rtlCol="0" anchor="ctr"/>
           <a:lstStyle/>
           <a:p>
-            <a:pPr indent="0" marL="0">
+            <a:pPr marL="0" indent="0">
               <a:buNone/>
             </a:pPr>
             <a:r>
@@ -5796,7 +5538,7 @@
           <a:bodyPr wrap="square" lIns="0" tIns="0" rIns="0" bIns="0" rtlCol="0" anchor="ctr"/>
           <a:lstStyle/>
           <a:p>
-            <a:pPr indent="0" marL="0">
+            <a:pPr marL="0" indent="0">
               <a:buNone/>
             </a:pPr>
             <a:r>
@@ -5835,7 +5577,7 @@
           <a:bodyPr wrap="square" lIns="0" tIns="0" rIns="0" bIns="0" rtlCol="0" anchor="ctr"/>
           <a:lstStyle/>
           <a:p>
-            <a:pPr algn="ctr" indent="0" marL="0">
+            <a:pPr marL="0" indent="0" algn="ctr">
               <a:buNone/>
             </a:pPr>
             <a:r>
@@ -5869,6 +5611,7 @@
         <a:solidFill>
           <a:srgbClr val="FFFFFF"/>
         </a:solidFill>
+        <a:effectLst/>
       </p:bgPr>
     </p:bg>
     <p:spTree>
@@ -5906,11 +5649,11 @@
           <a:bodyPr wrap="square" lIns="0" tIns="0" rIns="0" bIns="0" rtlCol="0" anchor="ctr"/>
           <a:lstStyle/>
           <a:p>
-            <a:pPr indent="0" marL="0">
-              <a:buNone/>
-            </a:pPr>
-            <a:r>
-              <a:rPr lang="en-US" sz="1200" b="1" spc="200" kern="0" dirty="0">
+            <a:pPr marL="0" indent="0">
+              <a:buNone/>
+            </a:pPr>
+            <a:r>
+              <a:rPr lang="en-US" sz="1200" b="1" kern="0" spc="200" dirty="0">
                 <a:solidFill>
                   <a:srgbClr val="0E7C86"/>
                 </a:solidFill>
@@ -5945,7 +5688,7 @@
           <a:bodyPr wrap="square" lIns="0" tIns="0" rIns="0" bIns="0" rtlCol="0" anchor="t"/>
           <a:lstStyle/>
           <a:p>
-            <a:pPr indent="0" marL="0">
+            <a:pPr marL="0" indent="0">
               <a:buNone/>
             </a:pPr>
             <a:r>
@@ -5984,7 +5727,7 @@
           <a:bodyPr wrap="square" lIns="0" tIns="0" rIns="0" bIns="0" rtlCol="0" anchor="ctr"/>
           <a:lstStyle/>
           <a:p>
-            <a:pPr indent="0" marL="0">
+            <a:pPr marL="0" indent="0">
               <a:buNone/>
             </a:pPr>
             <a:r>
@@ -6023,7 +5766,7 @@
           <a:bodyPr wrap="square" lIns="0" tIns="0" rIns="0" bIns="0" rtlCol="0" anchor="ctr"/>
           <a:lstStyle/>
           <a:p>
-            <a:pPr algn="r" indent="0" marL="0">
+            <a:pPr marL="0" indent="0" algn="r">
               <a:buNone/>
             </a:pPr>
             <a:r>
@@ -6168,7 +5911,7 @@
           </a:solidFill>
           <a:ln/>
           <a:effectLst>
-            <a:outerShdw sx="100000" sy="100000" kx="0" ky="0" algn="bl" rotWithShape="0" blurRad="88900" dist="38100" dir="5400000">
+            <a:outerShdw blurRad="88900" dist="38100" dir="5400000" algn="bl" rotWithShape="0">
               <a:srgbClr val="000000">
                 <a:alpha val="12000"/>
               </a:srgbClr>
@@ -6197,7 +5940,7 @@
           <a:bodyPr wrap="square" lIns="0" tIns="0" rIns="0" bIns="0" rtlCol="0" anchor="ctr"/>
           <a:lstStyle/>
           <a:p>
-            <a:pPr algn="ctr" indent="0" marL="0">
+            <a:pPr marL="0" indent="0" algn="ctr">
               <a:buNone/>
             </a:pPr>
             <a:r>
@@ -6236,7 +5979,7 @@
           <a:bodyPr wrap="square" lIns="0" tIns="0" rIns="0" bIns="0" rtlCol="0" anchor="ctr"/>
           <a:lstStyle/>
           <a:p>
-            <a:pPr algn="ctr" indent="0" marL="0">
+            <a:pPr marL="0" indent="0" algn="ctr">
               <a:buNone/>
             </a:pPr>
             <a:r>
@@ -6275,7 +6018,7 @@
           <a:bodyPr wrap="square" lIns="0" tIns="0" rIns="0" bIns="0" rtlCol="0" anchor="ctr"/>
           <a:lstStyle/>
           <a:p>
-            <a:pPr algn="ctr" indent="0" marL="0">
+            <a:pPr marL="0" indent="0" algn="ctr">
               <a:buNone/>
             </a:pPr>
             <a:r>
@@ -6292,7 +6035,7 @@
             <a:endParaRPr lang="en-US" sz="1200" dirty="0"/>
           </a:p>
           <a:p>
-            <a:pPr algn="ctr" indent="0" marL="0">
+            <a:pPr marL="0" indent="0" algn="ctr">
               <a:buNone/>
             </a:pPr>
             <a:r>
@@ -6331,7 +6074,7 @@
           </a:solidFill>
           <a:ln/>
           <a:effectLst>
-            <a:outerShdw sx="100000" sy="100000" kx="0" ky="0" algn="bl" rotWithShape="0" blurRad="88900" dist="38100" dir="5400000">
+            <a:outerShdw blurRad="88900" dist="38100" dir="5400000" algn="bl" rotWithShape="0">
               <a:srgbClr val="000000">
                 <a:alpha val="12000"/>
               </a:srgbClr>
@@ -6360,7 +6103,7 @@
           <a:bodyPr wrap="square" lIns="0" tIns="0" rIns="0" bIns="0" rtlCol="0" anchor="ctr"/>
           <a:lstStyle/>
           <a:p>
-            <a:pPr algn="ctr" indent="0" marL="0">
+            <a:pPr marL="0" indent="0" algn="ctr">
               <a:buNone/>
             </a:pPr>
             <a:r>
@@ -6399,7 +6142,7 @@
           <a:bodyPr wrap="square" lIns="0" tIns="0" rIns="0" bIns="0" rtlCol="0" anchor="ctr"/>
           <a:lstStyle/>
           <a:p>
-            <a:pPr algn="ctr" indent="0" marL="0">
+            <a:pPr marL="0" indent="0" algn="ctr">
               <a:buNone/>
             </a:pPr>
             <a:r>
@@ -6438,7 +6181,7 @@
           <a:bodyPr wrap="square" lIns="0" tIns="0" rIns="0" bIns="0" rtlCol="0" anchor="ctr"/>
           <a:lstStyle/>
           <a:p>
-            <a:pPr algn="ctr" indent="0" marL="0">
+            <a:pPr marL="0" indent="0" algn="ctr">
               <a:buNone/>
             </a:pPr>
             <a:r>
@@ -6455,7 +6198,7 @@
             <a:endParaRPr lang="en-US" sz="1200" dirty="0"/>
           </a:p>
           <a:p>
-            <a:pPr algn="ctr" indent="0" marL="0">
+            <a:pPr marL="0" indent="0" algn="ctr">
               <a:buNone/>
             </a:pPr>
             <a:r>
@@ -6494,7 +6237,7 @@
           <a:bodyPr wrap="square" lIns="0" tIns="0" rIns="0" bIns="0" rtlCol="0" anchor="ctr"/>
           <a:lstStyle/>
           <a:p>
-            <a:pPr algn="ctr" indent="0" marL="0">
+            <a:pPr marL="0" indent="0" algn="ctr">
               <a:buNone/>
             </a:pPr>
             <a:r>
@@ -6528,6 +6271,7 @@
         <a:solidFill>
           <a:srgbClr val="FFFFFF"/>
         </a:solidFill>
+        <a:effectLst/>
       </p:bgPr>
     </p:bg>
     <p:spTree>
@@ -6565,11 +6309,11 @@
           <a:bodyPr wrap="square" lIns="0" tIns="0" rIns="0" bIns="0" rtlCol="0" anchor="ctr"/>
           <a:lstStyle/>
           <a:p>
-            <a:pPr indent="0" marL="0">
-              <a:buNone/>
-            </a:pPr>
-            <a:r>
-              <a:rPr lang="en-US" sz="1200" b="1" spc="200" kern="0" dirty="0">
+            <a:pPr marL="0" indent="0">
+              <a:buNone/>
+            </a:pPr>
+            <a:r>
+              <a:rPr lang="en-US" sz="1200" b="1" kern="0" spc="200" dirty="0">
                 <a:solidFill>
                   <a:srgbClr val="0E7C86"/>
                 </a:solidFill>
@@ -6604,7 +6348,7 @@
           <a:bodyPr wrap="square" lIns="0" tIns="0" rIns="0" bIns="0" rtlCol="0" anchor="t"/>
           <a:lstStyle/>
           <a:p>
-            <a:pPr indent="0" marL="0">
+            <a:pPr marL="0" indent="0">
               <a:buNone/>
             </a:pPr>
             <a:r>
@@ -6643,7 +6387,7 @@
           <a:bodyPr wrap="square" lIns="0" tIns="0" rIns="0" bIns="0" rtlCol="0" anchor="ctr"/>
           <a:lstStyle/>
           <a:p>
-            <a:pPr indent="0" marL="0">
+            <a:pPr marL="0" indent="0">
               <a:buNone/>
             </a:pPr>
             <a:r>
@@ -6682,7 +6426,7 @@
           <a:bodyPr wrap="square" lIns="0" tIns="0" rIns="0" bIns="0" rtlCol="0" anchor="ctr"/>
           <a:lstStyle/>
           <a:p>
-            <a:pPr algn="r" indent="0" marL="0">
+            <a:pPr marL="0" indent="0" algn="r">
               <a:buNone/>
             </a:pPr>
             <a:r>
@@ -6827,7 +6571,7 @@
           </a:solidFill>
           <a:ln/>
           <a:effectLst>
-            <a:outerShdw sx="100000" sy="100000" kx="0" ky="0" algn="bl" rotWithShape="0" blurRad="88900" dist="38100" dir="5400000">
+            <a:outerShdw blurRad="88900" dist="38100" dir="5400000" algn="bl" rotWithShape="0">
               <a:srgbClr val="000000">
                 <a:alpha val="12000"/>
               </a:srgbClr>
@@ -6856,7 +6600,7 @@
           <a:bodyPr wrap="square" lIns="0" tIns="0" rIns="0" bIns="0" rtlCol="0" anchor="ctr"/>
           <a:lstStyle/>
           <a:p>
-            <a:pPr algn="ctr" indent="0" marL="0">
+            <a:pPr marL="0" indent="0" algn="ctr">
               <a:buNone/>
             </a:pPr>
             <a:r>
@@ -6919,7 +6663,7 @@
           </a:solidFill>
           <a:ln/>
           <a:effectLst>
-            <a:outerShdw sx="100000" sy="100000" kx="0" ky="0" algn="bl" rotWithShape="0" blurRad="88900" dist="38100" dir="5400000">
+            <a:outerShdw blurRad="88900" dist="38100" dir="5400000" algn="bl" rotWithShape="0">
               <a:srgbClr val="000000">
                 <a:alpha val="12000"/>
               </a:srgbClr>
@@ -6948,7 +6692,7 @@
           <a:bodyPr wrap="square" lIns="0" tIns="0" rIns="0" bIns="0" rtlCol="0" anchor="ctr"/>
           <a:lstStyle/>
           <a:p>
-            <a:pPr algn="ctr" indent="0" marL="0">
+            <a:pPr marL="0" indent="0" algn="ctr">
               <a:buNone/>
             </a:pPr>
             <a:r>
@@ -7011,7 +6755,7 @@
           </a:solidFill>
           <a:ln/>
           <a:effectLst>
-            <a:outerShdw sx="100000" sy="100000" kx="0" ky="0" algn="bl" rotWithShape="0" blurRad="88900" dist="38100" dir="5400000">
+            <a:outerShdw blurRad="88900" dist="38100" dir="5400000" algn="bl" rotWithShape="0">
               <a:srgbClr val="000000">
                 <a:alpha val="12000"/>
               </a:srgbClr>
@@ -7040,7 +6784,7 @@
           <a:bodyPr wrap="square" lIns="0" tIns="0" rIns="0" bIns="0" rtlCol="0" anchor="ctr"/>
           <a:lstStyle/>
           <a:p>
-            <a:pPr algn="ctr" indent="0" marL="0">
+            <a:pPr marL="0" indent="0" algn="ctr">
               <a:buNone/>
             </a:pPr>
             <a:r>
@@ -7103,7 +6847,7 @@
           </a:solidFill>
           <a:ln/>
           <a:effectLst>
-            <a:outerShdw sx="100000" sy="100000" kx="0" ky="0" algn="bl" rotWithShape="0" blurRad="88900" dist="38100" dir="5400000">
+            <a:outerShdw blurRad="88900" dist="38100" dir="5400000" algn="bl" rotWithShape="0">
               <a:srgbClr val="000000">
                 <a:alpha val="12000"/>
               </a:srgbClr>
@@ -7132,7 +6876,7 @@
           <a:bodyPr wrap="square" lIns="0" tIns="0" rIns="0" bIns="0" rtlCol="0" anchor="ctr"/>
           <a:lstStyle/>
           <a:p>
-            <a:pPr algn="ctr" indent="0" marL="0">
+            <a:pPr marL="0" indent="0" algn="ctr">
               <a:buNone/>
             </a:pPr>
             <a:r>
@@ -7195,7 +6939,7 @@
           </a:solidFill>
           <a:ln/>
           <a:effectLst>
-            <a:outerShdw sx="100000" sy="100000" kx="0" ky="0" algn="bl" rotWithShape="0" blurRad="88900" dist="38100" dir="5400000">
+            <a:outerShdw blurRad="88900" dist="38100" dir="5400000" algn="bl" rotWithShape="0">
               <a:srgbClr val="000000">
                 <a:alpha val="12000"/>
               </a:srgbClr>
@@ -7224,7 +6968,7 @@
           <a:bodyPr wrap="square" lIns="0" tIns="0" rIns="0" bIns="0" rtlCol="0" anchor="ctr"/>
           <a:lstStyle/>
           <a:p>
-            <a:pPr algn="ctr" indent="0" marL="0">
+            <a:pPr marL="0" indent="0" algn="ctr">
               <a:buNone/>
             </a:pPr>
             <a:r>
@@ -7263,7 +7007,7 @@
           <a:bodyPr wrap="square" lIns="0" tIns="0" rIns="0" bIns="0" rtlCol="0" anchor="ctr"/>
           <a:lstStyle/>
           <a:p>
-            <a:pPr algn="ctr" indent="0" marL="0">
+            <a:pPr marL="0" indent="0" algn="ctr">
               <a:buNone/>
             </a:pPr>
             <a:r>
@@ -7297,6 +7041,7 @@
         <a:solidFill>
           <a:srgbClr val="FFFFFF"/>
         </a:solidFill>
+        <a:effectLst/>
       </p:bgPr>
     </p:bg>
     <p:spTree>
@@ -7334,11 +7079,11 @@
           <a:bodyPr wrap="square" lIns="0" tIns="0" rIns="0" bIns="0" rtlCol="0" anchor="ctr"/>
           <a:lstStyle/>
           <a:p>
-            <a:pPr indent="0" marL="0">
-              <a:buNone/>
-            </a:pPr>
-            <a:r>
-              <a:rPr lang="en-US" sz="1200" b="1" spc="200" kern="0" dirty="0">
+            <a:pPr marL="0" indent="0">
+              <a:buNone/>
+            </a:pPr>
+            <a:r>
+              <a:rPr lang="en-US" sz="1200" b="1" kern="0" spc="200" dirty="0">
                 <a:solidFill>
                   <a:srgbClr val="0E7C86"/>
                 </a:solidFill>
@@ -7373,7 +7118,7 @@
           <a:bodyPr wrap="square" lIns="0" tIns="0" rIns="0" bIns="0" rtlCol="0" anchor="t"/>
           <a:lstStyle/>
           <a:p>
-            <a:pPr indent="0" marL="0">
+            <a:pPr marL="0" indent="0">
               <a:buNone/>
             </a:pPr>
             <a:r>
@@ -7412,7 +7157,7 @@
           <a:bodyPr wrap="square" lIns="0" tIns="0" rIns="0" bIns="0" rtlCol="0" anchor="ctr"/>
           <a:lstStyle/>
           <a:p>
-            <a:pPr indent="0" marL="0">
+            <a:pPr marL="0" indent="0">
               <a:buNone/>
             </a:pPr>
             <a:r>
@@ -7451,7 +7196,7 @@
           <a:bodyPr wrap="square" lIns="0" tIns="0" rIns="0" bIns="0" rtlCol="0" anchor="ctr"/>
           <a:lstStyle/>
           <a:p>
-            <a:pPr algn="r" indent="0" marL="0">
+            <a:pPr marL="0" indent="0" algn="r">
               <a:buNone/>
             </a:pPr>
             <a:r>
@@ -7596,7 +7341,7 @@
           </a:solidFill>
           <a:ln/>
           <a:effectLst>
-            <a:outerShdw sx="100000" sy="100000" kx="0" ky="0" algn="bl" rotWithShape="0" blurRad="88900" dist="38100" dir="5400000">
+            <a:outerShdw blurRad="88900" dist="38100" dir="5400000" algn="bl" rotWithShape="0">
               <a:srgbClr val="000000">
                 <a:alpha val="12000"/>
               </a:srgbClr>
@@ -7625,7 +7370,7 @@
           <a:bodyPr wrap="square" lIns="0" tIns="0" rIns="0" bIns="0" rtlCol="0" anchor="ctr"/>
           <a:lstStyle/>
           <a:p>
-            <a:pPr algn="ctr" indent="0" marL="0">
+            <a:pPr marL="0" indent="0" algn="ctr">
               <a:buNone/>
             </a:pPr>
             <a:r>
@@ -7642,7 +7387,7 @@
             <a:endParaRPr lang="en-US" sz="1200" dirty="0"/>
           </a:p>
           <a:p>
-            <a:pPr algn="ctr" indent="0" marL="0">
+            <a:pPr marL="0" indent="0" algn="ctr">
               <a:buNone/>
             </a:pPr>
             <a:r>
@@ -7681,7 +7426,7 @@
           <a:bodyPr wrap="square" lIns="0" tIns="0" rIns="0" bIns="0" rtlCol="0" anchor="ctr"/>
           <a:lstStyle/>
           <a:p>
-            <a:pPr algn="ctr" indent="0" marL="0">
+            <a:pPr marL="0" indent="0" algn="ctr">
               <a:buNone/>
             </a:pPr>
             <a:r>
@@ -7720,7 +7465,7 @@
           <a:bodyPr wrap="square" lIns="0" tIns="0" rIns="0" bIns="0" rtlCol="0" anchor="ctr"/>
           <a:lstStyle/>
           <a:p>
-            <a:pPr algn="ctr" indent="0" marL="0">
+            <a:pPr marL="0" indent="0" algn="ctr">
               <a:buNone/>
             </a:pPr>
             <a:r>
@@ -7759,7 +7504,7 @@
           <a:bodyPr wrap="square" lIns="0" tIns="0" rIns="0" bIns="0" rtlCol="0" anchor="ctr"/>
           <a:lstStyle/>
           <a:p>
-            <a:pPr algn="ctr" indent="0" marL="0">
+            <a:pPr marL="0" indent="0" algn="ctr">
               <a:buNone/>
             </a:pPr>
             <a:r>
@@ -7798,7 +7543,7 @@
           </a:solidFill>
           <a:ln/>
           <a:effectLst>
-            <a:outerShdw sx="100000" sy="100000" kx="0" ky="0" algn="bl" rotWithShape="0" blurRad="88900" dist="38100" dir="5400000">
+            <a:outerShdw blurRad="88900" dist="38100" dir="5400000" algn="bl" rotWithShape="0">
               <a:srgbClr val="000000">
                 <a:alpha val="12000"/>
               </a:srgbClr>
@@ -7827,7 +7572,7 @@
           <a:bodyPr wrap="square" lIns="0" tIns="0" rIns="0" bIns="0" rtlCol="0" anchor="ctr"/>
           <a:lstStyle/>
           <a:p>
-            <a:pPr algn="ctr" indent="0" marL="0">
+            <a:pPr marL="0" indent="0" algn="ctr">
               <a:buNone/>
             </a:pPr>
             <a:r>
@@ -7844,7 +7589,7 @@
             <a:endParaRPr lang="en-US" sz="1200" dirty="0"/>
           </a:p>
           <a:p>
-            <a:pPr algn="ctr" indent="0" marL="0">
+            <a:pPr marL="0" indent="0" algn="ctr">
               <a:buNone/>
             </a:pPr>
             <a:r>
@@ -7903,7 +7648,7 @@
           <a:bodyPr wrap="square" lIns="0" tIns="0" rIns="0" bIns="0" rtlCol="0" anchor="ctr"/>
           <a:lstStyle/>
           <a:p>
-            <a:pPr algn="ctr" indent="0" marL="0">
+            <a:pPr marL="0" indent="0" algn="ctr">
               <a:buNone/>
             </a:pPr>
             <a:r>
@@ -7942,7 +7687,7 @@
           <a:bodyPr wrap="square" lIns="0" tIns="0" rIns="0" bIns="0" rtlCol="0" anchor="ctr"/>
           <a:lstStyle/>
           <a:p>
-            <a:pPr algn="ctr" indent="0" marL="0">
+            <a:pPr marL="0" indent="0" algn="ctr">
               <a:buNone/>
             </a:pPr>
             <a:r>
@@ -7981,7 +7726,7 @@
           <a:bodyPr wrap="square" lIns="0" tIns="0" rIns="0" bIns="0" rtlCol="0" anchor="ctr"/>
           <a:lstStyle/>
           <a:p>
-            <a:pPr algn="ctr" indent="0" marL="0">
+            <a:pPr marL="0" indent="0" algn="ctr">
               <a:buNone/>
             </a:pPr>
             <a:r>
@@ -8015,6 +7760,7 @@
         <a:solidFill>
           <a:srgbClr val="FFFFFF"/>
         </a:solidFill>
+        <a:effectLst/>
       </p:bgPr>
     </p:bg>
     <p:spTree>
@@ -8052,11 +7798,11 @@
           <a:bodyPr wrap="square" lIns="0" tIns="0" rIns="0" bIns="0" rtlCol="0" anchor="ctr"/>
           <a:lstStyle/>
           <a:p>
-            <a:pPr indent="0" marL="0">
-              <a:buNone/>
-            </a:pPr>
-            <a:r>
-              <a:rPr lang="en-US" sz="1200" b="1" spc="200" kern="0" dirty="0">
+            <a:pPr marL="0" indent="0">
+              <a:buNone/>
+            </a:pPr>
+            <a:r>
+              <a:rPr lang="en-US" sz="1200" b="1" kern="0" spc="200" dirty="0">
                 <a:solidFill>
                   <a:srgbClr val="0E7C86"/>
                 </a:solidFill>
@@ -8091,7 +7837,7 @@
           <a:bodyPr wrap="square" lIns="0" tIns="0" rIns="0" bIns="0" rtlCol="0" anchor="t"/>
           <a:lstStyle/>
           <a:p>
-            <a:pPr indent="0" marL="0">
+            <a:pPr marL="0" indent="0">
               <a:buNone/>
             </a:pPr>
             <a:r>
@@ -8130,7 +7876,7 @@
           <a:bodyPr wrap="square" lIns="0" tIns="0" rIns="0" bIns="0" rtlCol="0" anchor="ctr"/>
           <a:lstStyle/>
           <a:p>
-            <a:pPr indent="0" marL="0">
+            <a:pPr marL="0" indent="0">
               <a:buNone/>
             </a:pPr>
             <a:r>
@@ -8169,7 +7915,7 @@
           <a:bodyPr wrap="square" lIns="0" tIns="0" rIns="0" bIns="0" rtlCol="0" anchor="ctr"/>
           <a:lstStyle/>
           <a:p>
-            <a:pPr algn="r" indent="0" marL="0">
+            <a:pPr marL="0" indent="0" algn="r">
               <a:buNone/>
             </a:pPr>
             <a:r>
@@ -8341,7 +8087,7 @@
           <a:bodyPr wrap="square" lIns="0" tIns="0" rIns="0" bIns="0" rtlCol="0" anchor="ctr"/>
           <a:lstStyle/>
           <a:p>
-            <a:pPr algn="ctr" indent="0" marL="0">
+            <a:pPr marL="0" indent="0" algn="ctr">
               <a:buNone/>
             </a:pPr>
             <a:r>
@@ -8358,7 +8104,7 @@
             <a:endParaRPr lang="en-US" sz="1100" dirty="0"/>
           </a:p>
           <a:p>
-            <a:pPr algn="ctr" indent="0" marL="0">
+            <a:pPr marL="0" indent="0" algn="ctr">
               <a:buNone/>
             </a:pPr>
             <a:r>
@@ -8424,7 +8170,7 @@
           <a:bodyPr wrap="square" lIns="0" tIns="0" rIns="0" bIns="0" rtlCol="0" anchor="ctr"/>
           <a:lstStyle/>
           <a:p>
-            <a:pPr algn="ctr" indent="0" marL="0">
+            <a:pPr marL="0" indent="0" algn="ctr">
               <a:buNone/>
             </a:pPr>
             <a:r>
@@ -8441,7 +8187,7 @@
             <a:endParaRPr lang="en-US" sz="1100" dirty="0"/>
           </a:p>
           <a:p>
-            <a:pPr algn="ctr" indent="0" marL="0">
+            <a:pPr marL="0" indent="0" algn="ctr">
               <a:buNone/>
             </a:pPr>
             <a:r>
@@ -8468,7 +8214,7 @@
         <p:spPr>
           <a:xfrm>
             <a:off x="8961120" y="5120640"/>
-            <a:ext cx="0" cy="-1645920"/>
+            <a:ext cx="0" cy="0"/>
           </a:xfrm>
           <a:prstGeom prst="line">
             <a:avLst/>
@@ -8504,7 +8250,7 @@
           <a:bodyPr wrap="square" lIns="0" tIns="0" rIns="0" bIns="0" rtlCol="0" anchor="ctr"/>
           <a:lstStyle/>
           <a:p>
-            <a:pPr algn="ctr" indent="0" marL="0">
+            <a:pPr marL="0" indent="0" algn="ctr">
               <a:buNone/>
             </a:pPr>
             <a:r>
@@ -8538,6 +8284,7 @@
         <a:solidFill>
           <a:srgbClr val="FFFFFF"/>
         </a:solidFill>
+        <a:effectLst/>
       </p:bgPr>
     </p:bg>
     <p:spTree>
@@ -8575,11 +8322,11 @@
           <a:bodyPr wrap="square" lIns="0" tIns="0" rIns="0" bIns="0" rtlCol="0" anchor="ctr"/>
           <a:lstStyle/>
           <a:p>
-            <a:pPr indent="0" marL="0">
-              <a:buNone/>
-            </a:pPr>
-            <a:r>
-              <a:rPr lang="en-US" sz="1200" b="1" spc="200" kern="0" dirty="0">
+            <a:pPr marL="0" indent="0">
+              <a:buNone/>
+            </a:pPr>
+            <a:r>
+              <a:rPr lang="en-US" sz="1200" b="1" kern="0" spc="200" dirty="0">
                 <a:solidFill>
                   <a:srgbClr val="0E7C86"/>
                 </a:solidFill>
@@ -8614,7 +8361,7 @@
           <a:bodyPr wrap="square" lIns="0" tIns="0" rIns="0" bIns="0" rtlCol="0" anchor="t"/>
           <a:lstStyle/>
           <a:p>
-            <a:pPr indent="0" marL="0">
+            <a:pPr marL="0" indent="0">
               <a:buNone/>
             </a:pPr>
             <a:r>
@@ -8653,7 +8400,7 @@
           <a:bodyPr wrap="square" lIns="0" tIns="0" rIns="0" bIns="0" rtlCol="0" anchor="ctr"/>
           <a:lstStyle/>
           <a:p>
-            <a:pPr indent="0" marL="0">
+            <a:pPr marL="0" indent="0">
               <a:buNone/>
             </a:pPr>
             <a:r>
@@ -8692,7 +8439,7 @@
           <a:bodyPr wrap="square" lIns="0" tIns="0" rIns="0" bIns="0" rtlCol="0" anchor="ctr"/>
           <a:lstStyle/>
           <a:p>
-            <a:pPr algn="r" indent="0" marL="0">
+            <a:pPr marL="0" indent="0" algn="r">
               <a:buNone/>
             </a:pPr>
             <a:r>
@@ -8837,7 +8584,7 @@
           <a:bodyPr wrap="square" lIns="0" tIns="0" rIns="0" bIns="0" rtlCol="0" anchor="ctr"/>
           <a:lstStyle/>
           <a:p>
-            <a:pPr indent="0" marL="0">
+            <a:pPr marL="0" indent="0">
               <a:buNone/>
             </a:pPr>
             <a:r>
@@ -8951,7 +8698,7 @@
         <p:spPr>
           <a:xfrm>
             <a:off x="7086600" y="3017520"/>
-            <a:ext cx="-539496" cy="640080"/>
+            <a:ext cx="0" cy="640080"/>
           </a:xfrm>
           <a:prstGeom prst="line">
             <a:avLst/>
@@ -9166,7 +8913,7 @@
           <a:bodyPr wrap="square" lIns="0" tIns="0" rIns="0" bIns="0" rtlCol="0" anchor="ctr"/>
           <a:lstStyle/>
           <a:p>
-            <a:pPr indent="0" marL="0">
+            <a:pPr marL="0" indent="0">
               <a:buNone/>
             </a:pPr>
             <a:r>
@@ -9205,7 +8952,7 @@
           <a:bodyPr wrap="square" lIns="0" tIns="0" rIns="0" bIns="0" rtlCol="0" anchor="ctr"/>
           <a:lstStyle/>
           <a:p>
-            <a:pPr indent="0" marL="0">
+            <a:pPr marL="0" indent="0">
               <a:buNone/>
             </a:pPr>
             <a:r>
@@ -9244,7 +8991,7 @@
           </a:solidFill>
           <a:ln/>
           <a:effectLst>
-            <a:outerShdw sx="100000" sy="100000" kx="0" ky="0" algn="bl" rotWithShape="0" blurRad="88900" dist="38100" dir="5400000">
+            <a:outerShdw blurRad="88900" dist="38100" dir="5400000" algn="bl" rotWithShape="0">
               <a:srgbClr val="000000">
                 <a:alpha val="12000"/>
               </a:srgbClr>
@@ -9273,7 +9020,7 @@
           <a:bodyPr wrap="square" lIns="0" tIns="0" rIns="0" bIns="0" rtlCol="0" anchor="ctr"/>
           <a:lstStyle/>
           <a:p>
-            <a:pPr algn="ctr" indent="0" marL="0">
+            <a:pPr marL="0" indent="0" algn="ctr">
               <a:buNone/>
             </a:pPr>
             <a:r>
@@ -9336,7 +9083,7 @@
           </a:solidFill>
           <a:ln/>
           <a:effectLst>
-            <a:outerShdw sx="100000" sy="100000" kx="0" ky="0" algn="bl" rotWithShape="0" blurRad="88900" dist="38100" dir="5400000">
+            <a:outerShdw blurRad="88900" dist="38100" dir="5400000" algn="bl" rotWithShape="0">
               <a:srgbClr val="000000">
                 <a:alpha val="12000"/>
               </a:srgbClr>
@@ -9365,7 +9112,7 @@
           <a:bodyPr wrap="square" lIns="0" tIns="0" rIns="0" bIns="0" rtlCol="0" anchor="ctr"/>
           <a:lstStyle/>
           <a:p>
-            <a:pPr algn="ctr" indent="0" marL="0">
+            <a:pPr marL="0" indent="0" algn="ctr">
               <a:buNone/>
             </a:pPr>
             <a:r>
@@ -9382,7 +9129,7 @@
             <a:endParaRPr lang="en-US" sz="1000" dirty="0"/>
           </a:p>
           <a:p>
-            <a:pPr algn="ctr" indent="0" marL="0">
+            <a:pPr marL="0" indent="0" algn="ctr">
               <a:buNone/>
             </a:pPr>
             <a:r>
@@ -9421,7 +9168,7 @@
           <a:bodyPr wrap="square" lIns="0" tIns="0" rIns="0" bIns="0" rtlCol="0" anchor="ctr"/>
           <a:lstStyle/>
           <a:p>
-            <a:pPr algn="ctr" indent="0" marL="0">
+            <a:pPr marL="0" indent="0" algn="ctr">
               <a:buNone/>
             </a:pPr>
             <a:r>
@@ -9455,6 +9202,7 @@
         <a:solidFill>
           <a:srgbClr val="FFFFFF"/>
         </a:solidFill>
+        <a:effectLst/>
       </p:bgPr>
     </p:bg>
     <p:spTree>
@@ -9492,11 +9240,11 @@
           <a:bodyPr wrap="square" lIns="0" tIns="0" rIns="0" bIns="0" rtlCol="0" anchor="ctr"/>
           <a:lstStyle/>
           <a:p>
-            <a:pPr indent="0" marL="0">
-              <a:buNone/>
-            </a:pPr>
-            <a:r>
-              <a:rPr lang="en-US" sz="1200" b="1" spc="200" kern="0" dirty="0">
+            <a:pPr marL="0" indent="0">
+              <a:buNone/>
+            </a:pPr>
+            <a:r>
+              <a:rPr lang="en-US" sz="1200" b="1" kern="0" spc="200" dirty="0">
                 <a:solidFill>
                   <a:srgbClr val="0E7C86"/>
                 </a:solidFill>
@@ -9531,7 +9279,7 @@
           <a:bodyPr wrap="square" lIns="0" tIns="0" rIns="0" bIns="0" rtlCol="0" anchor="t"/>
           <a:lstStyle/>
           <a:p>
-            <a:pPr indent="0" marL="0">
+            <a:pPr marL="0" indent="0">
               <a:buNone/>
             </a:pPr>
             <a:r>
@@ -9570,7 +9318,7 @@
           <a:bodyPr wrap="square" lIns="0" tIns="0" rIns="0" bIns="0" rtlCol="0" anchor="ctr"/>
           <a:lstStyle/>
           <a:p>
-            <a:pPr indent="0" marL="0">
+            <a:pPr marL="0" indent="0">
               <a:buNone/>
             </a:pPr>
             <a:r>
@@ -9609,7 +9357,7 @@
           <a:bodyPr wrap="square" lIns="0" tIns="0" rIns="0" bIns="0" rtlCol="0" anchor="ctr"/>
           <a:lstStyle/>
           <a:p>
-            <a:pPr algn="r" indent="0" marL="0">
+            <a:pPr marL="0" indent="0" algn="r">
               <a:buNone/>
             </a:pPr>
             <a:r>
@@ -9754,7 +9502,7 @@
           </a:solidFill>
           <a:ln/>
           <a:effectLst>
-            <a:outerShdw sx="100000" sy="100000" kx="0" ky="0" algn="bl" rotWithShape="0" blurRad="88900" dist="38100" dir="5400000">
+            <a:outerShdw blurRad="88900" dist="38100" dir="5400000" algn="bl" rotWithShape="0">
               <a:srgbClr val="000000">
                 <a:alpha val="12000"/>
               </a:srgbClr>
@@ -9783,7 +9531,7 @@
           <a:bodyPr wrap="square" lIns="0" tIns="0" rIns="0" bIns="0" rtlCol="0" anchor="ctr"/>
           <a:lstStyle/>
           <a:p>
-            <a:pPr algn="ctr" indent="0" marL="0">
+            <a:pPr marL="0" indent="0" algn="ctr">
               <a:buNone/>
             </a:pPr>
             <a:r>
@@ -9844,7 +9592,7 @@
           <a:bodyPr wrap="square" lIns="0" tIns="0" rIns="0" bIns="0" rtlCol="0" anchor="ctr"/>
           <a:lstStyle/>
           <a:p>
-            <a:pPr indent="0" marL="0">
+            <a:pPr marL="0" indent="0">
               <a:buNone/>
             </a:pPr>
             <a:r>
@@ -9905,7 +9653,7 @@
           <a:bodyPr wrap="square" lIns="0" tIns="0" rIns="0" bIns="0" rtlCol="0" anchor="ctr"/>
           <a:lstStyle/>
           <a:p>
-            <a:pPr indent="0" marL="0">
+            <a:pPr marL="0" indent="0">
               <a:buNone/>
             </a:pPr>
             <a:r>
@@ -9966,7 +9714,7 @@
           <a:bodyPr wrap="square" lIns="0" tIns="0" rIns="0" bIns="0" rtlCol="0" anchor="ctr"/>
           <a:lstStyle/>
           <a:p>
-            <a:pPr indent="0" marL="0">
+            <a:pPr marL="0" indent="0">
               <a:buNone/>
             </a:pPr>
             <a:r>
@@ -10027,7 +9775,7 @@
           <a:bodyPr wrap="square" lIns="0" tIns="0" rIns="0" bIns="0" rtlCol="0" anchor="ctr"/>
           <a:lstStyle/>
           <a:p>
-            <a:pPr indent="0" marL="0">
+            <a:pPr marL="0" indent="0">
               <a:buNone/>
             </a:pPr>
             <a:r>
@@ -10088,7 +9836,7 @@
           <a:bodyPr wrap="square" lIns="0" tIns="0" rIns="0" bIns="0" rtlCol="0" anchor="ctr"/>
           <a:lstStyle/>
           <a:p>
-            <a:pPr indent="0" marL="0">
+            <a:pPr marL="0" indent="0">
               <a:buNone/>
             </a:pPr>
             <a:r>
@@ -10149,7 +9897,7 @@
           <a:bodyPr wrap="square" lIns="0" tIns="0" rIns="0" bIns="0" rtlCol="0" anchor="ctr"/>
           <a:lstStyle/>
           <a:p>
-            <a:pPr indent="0" marL="0">
+            <a:pPr marL="0" indent="0">
               <a:buNone/>
             </a:pPr>
             <a:r>
@@ -10183,6 +9931,7 @@
         <a:solidFill>
           <a:srgbClr val="FFFFFF"/>
         </a:solidFill>
+        <a:effectLst/>
       </p:bgPr>
     </p:bg>
     <p:spTree>
@@ -10220,11 +9969,11 @@
           <a:bodyPr wrap="square" lIns="0" tIns="0" rIns="0" bIns="0" rtlCol="0" anchor="ctr"/>
           <a:lstStyle/>
           <a:p>
-            <a:pPr indent="0" marL="0">
-              <a:buNone/>
-            </a:pPr>
-            <a:r>
-              <a:rPr lang="en-US" sz="1200" b="1" spc="200" kern="0" dirty="0">
+            <a:pPr marL="0" indent="0">
+              <a:buNone/>
+            </a:pPr>
+            <a:r>
+              <a:rPr lang="en-US" sz="1200" b="1" kern="0" spc="200" dirty="0">
                 <a:solidFill>
                   <a:srgbClr val="0E7C86"/>
                 </a:solidFill>
@@ -10259,7 +10008,7 @@
           <a:bodyPr wrap="square" lIns="0" tIns="0" rIns="0" bIns="0" rtlCol="0" anchor="t"/>
           <a:lstStyle/>
           <a:p>
-            <a:pPr indent="0" marL="0">
+            <a:pPr marL="0" indent="0">
               <a:buNone/>
             </a:pPr>
             <a:r>
@@ -10298,7 +10047,7 @@
           <a:bodyPr wrap="square" lIns="0" tIns="0" rIns="0" bIns="0" rtlCol="0" anchor="ctr"/>
           <a:lstStyle/>
           <a:p>
-            <a:pPr indent="0" marL="0">
+            <a:pPr marL="0" indent="0">
               <a:buNone/>
             </a:pPr>
             <a:r>
@@ -10337,7 +10086,7 @@
           <a:bodyPr wrap="square" lIns="0" tIns="0" rIns="0" bIns="0" rtlCol="0" anchor="ctr"/>
           <a:lstStyle/>
           <a:p>
-            <a:pPr algn="r" indent="0" marL="0">
+            <a:pPr marL="0" indent="0" algn="r">
               <a:buNone/>
             </a:pPr>
             <a:r>
@@ -10401,7 +10150,7 @@
           <a:bodyPr wrap="square" lIns="0" tIns="0" rIns="0" bIns="0" rtlCol="0" anchor="ctr"/>
           <a:lstStyle/>
           <a:p>
-            <a:pPr indent="0" marL="0">
+            <a:pPr marL="0" indent="0">
               <a:buNone/>
             </a:pPr>
             <a:r>
@@ -10465,7 +10214,7 @@
           <a:bodyPr wrap="square" lIns="0" tIns="0" rIns="0" bIns="0" rtlCol="0" anchor="ctr"/>
           <a:lstStyle/>
           <a:p>
-            <a:pPr indent="0" marL="0">
+            <a:pPr marL="0" indent="0">
               <a:buNone/>
             </a:pPr>
             <a:r>
@@ -10529,7 +10278,7 @@
           <a:bodyPr wrap="square" lIns="0" tIns="0" rIns="0" bIns="0" rtlCol="0" anchor="ctr"/>
           <a:lstStyle/>
           <a:p>
-            <a:pPr indent="0" marL="0">
+            <a:pPr marL="0" indent="0">
               <a:buNone/>
             </a:pPr>
             <a:r>
@@ -10593,7 +10342,7 @@
           <a:bodyPr wrap="square" lIns="0" tIns="0" rIns="0" bIns="0" rtlCol="0" anchor="ctr"/>
           <a:lstStyle/>
           <a:p>
-            <a:pPr indent="0" marL="0">
+            <a:pPr marL="0" indent="0">
               <a:buNone/>
             </a:pPr>
             <a:r>
@@ -10657,7 +10406,7 @@
           <a:bodyPr wrap="square" lIns="0" tIns="0" rIns="0" bIns="0" rtlCol="0" anchor="ctr"/>
           <a:lstStyle/>
           <a:p>
-            <a:pPr indent="0" marL="0">
+            <a:pPr marL="0" indent="0">
               <a:buNone/>
             </a:pPr>
             <a:r>
@@ -10721,7 +10470,7 @@
           <a:bodyPr wrap="square" lIns="0" tIns="0" rIns="0" bIns="0" rtlCol="0" anchor="ctr"/>
           <a:lstStyle/>
           <a:p>
-            <a:pPr indent="0" marL="0">
+            <a:pPr marL="0" indent="0">
               <a:buNone/>
             </a:pPr>
             <a:r>
@@ -10785,7 +10534,7 @@
           <a:bodyPr wrap="square" lIns="0" tIns="0" rIns="0" bIns="0" rtlCol="0" anchor="ctr"/>
           <a:lstStyle/>
           <a:p>
-            <a:pPr indent="0" marL="0">
+            <a:pPr marL="0" indent="0">
               <a:buNone/>
             </a:pPr>
             <a:r>
@@ -10849,7 +10598,7 @@
           <a:bodyPr wrap="square" lIns="0" tIns="0" rIns="0" bIns="0" rtlCol="0" anchor="ctr"/>
           <a:lstStyle/>
           <a:p>
-            <a:pPr indent="0" marL="0">
+            <a:pPr marL="0" indent="0">
               <a:buNone/>
             </a:pPr>
             <a:r>
@@ -10913,7 +10662,7 @@
           <a:bodyPr wrap="square" lIns="0" tIns="0" rIns="0" bIns="0" rtlCol="0" anchor="ctr"/>
           <a:lstStyle/>
           <a:p>
-            <a:pPr indent="0" marL="0">
+            <a:pPr marL="0" indent="0">
               <a:buNone/>
             </a:pPr>
             <a:r>
@@ -10977,7 +10726,7 @@
           <a:bodyPr wrap="square" lIns="0" tIns="0" rIns="0" bIns="0" rtlCol="0" anchor="ctr"/>
           <a:lstStyle/>
           <a:p>
-            <a:pPr indent="0" marL="0">
+            <a:pPr marL="0" indent="0">
               <a:buNone/>
             </a:pPr>
             <a:r>
@@ -11041,7 +10790,7 @@
           <a:bodyPr wrap="square" lIns="0" tIns="0" rIns="0" bIns="0" rtlCol="0" anchor="ctr"/>
           <a:lstStyle/>
           <a:p>
-            <a:pPr indent="0" marL="0">
+            <a:pPr marL="0" indent="0">
               <a:buNone/>
             </a:pPr>
             <a:r>
@@ -11105,7 +10854,7 @@
           <a:bodyPr wrap="square" lIns="0" tIns="0" rIns="0" bIns="0" rtlCol="0" anchor="ctr"/>
           <a:lstStyle/>
           <a:p>
-            <a:pPr indent="0" marL="0">
+            <a:pPr marL="0" indent="0">
               <a:buNone/>
             </a:pPr>
             <a:r>
@@ -11169,7 +10918,7 @@
           <a:bodyPr wrap="square" lIns="0" tIns="0" rIns="0" bIns="0" rtlCol="0" anchor="ctr"/>
           <a:lstStyle/>
           <a:p>
-            <a:pPr indent="0" marL="0">
+            <a:pPr marL="0" indent="0">
               <a:buNone/>
             </a:pPr>
             <a:r>
@@ -11233,7 +10982,7 @@
           <a:bodyPr wrap="square" lIns="0" tIns="0" rIns="0" bIns="0" rtlCol="0" anchor="ctr"/>
           <a:lstStyle/>
           <a:p>
-            <a:pPr indent="0" marL="0">
+            <a:pPr marL="0" indent="0">
               <a:buNone/>
             </a:pPr>
             <a:r>
@@ -11272,7 +11021,7 @@
           <a:bodyPr wrap="square" lIns="0" tIns="0" rIns="0" bIns="0" rtlCol="0" anchor="ctr"/>
           <a:lstStyle/>
           <a:p>
-            <a:pPr algn="ctr" indent="0" marL="0">
+            <a:pPr marL="0" indent="0" algn="ctr">
               <a:buNone/>
             </a:pPr>
             <a:r>
@@ -11306,6 +11055,7 @@
         <a:solidFill>
           <a:srgbClr val="FFFFFF"/>
         </a:solidFill>
+        <a:effectLst/>
       </p:bgPr>
     </p:bg>
     <p:spTree>
@@ -11343,11 +11093,11 @@
           <a:bodyPr wrap="square" lIns="0" tIns="0" rIns="0" bIns="0" rtlCol="0" anchor="ctr"/>
           <a:lstStyle/>
           <a:p>
-            <a:pPr indent="0" marL="0">
-              <a:buNone/>
-            </a:pPr>
-            <a:r>
-              <a:rPr lang="en-US" sz="1200" b="1" spc="200" kern="0" dirty="0">
+            <a:pPr marL="0" indent="0">
+              <a:buNone/>
+            </a:pPr>
+            <a:r>
+              <a:rPr lang="en-US" sz="1200" b="1" kern="0" spc="200" dirty="0">
                 <a:solidFill>
                   <a:srgbClr val="0E7C86"/>
                 </a:solidFill>
@@ -11382,7 +11132,7 @@
           <a:bodyPr wrap="square" lIns="0" tIns="0" rIns="0" bIns="0" rtlCol="0" anchor="t"/>
           <a:lstStyle/>
           <a:p>
-            <a:pPr indent="0" marL="0">
+            <a:pPr marL="0" indent="0">
               <a:buNone/>
             </a:pPr>
             <a:r>
@@ -11421,7 +11171,7 @@
           <a:bodyPr wrap="square" lIns="0" tIns="0" rIns="0" bIns="0" rtlCol="0" anchor="ctr"/>
           <a:lstStyle/>
           <a:p>
-            <a:pPr indent="0" marL="0">
+            <a:pPr marL="0" indent="0">
               <a:buNone/>
             </a:pPr>
             <a:r>
@@ -11460,7 +11210,7 @@
           <a:bodyPr wrap="square" lIns="0" tIns="0" rIns="0" bIns="0" rtlCol="0" anchor="ctr"/>
           <a:lstStyle/>
           <a:p>
-            <a:pPr algn="r" indent="0" marL="0">
+            <a:pPr marL="0" indent="0" algn="r">
               <a:buNone/>
             </a:pPr>
             <a:r>
@@ -11499,7 +11249,7 @@
           </a:solidFill>
           <a:ln/>
           <a:effectLst>
-            <a:outerShdw sx="100000" sy="100000" kx="0" ky="0" algn="bl" rotWithShape="0" blurRad="88900" dist="38100" dir="5400000">
+            <a:outerShdw blurRad="88900" dist="38100" dir="5400000" algn="bl" rotWithShape="0">
               <a:srgbClr val="000000">
                 <a:alpha val="12000"/>
               </a:srgbClr>
@@ -11548,7 +11298,7 @@
           <a:bodyPr wrap="square" lIns="0" tIns="0" rIns="0" bIns="0" rtlCol="0" anchor="ctr"/>
           <a:lstStyle/>
           <a:p>
-            <a:pPr algn="ctr" indent="0" marL="0">
+            <a:pPr marL="0" indent="0" algn="ctr">
               <a:buNone/>
             </a:pPr>
             <a:r>
@@ -11587,7 +11337,7 @@
           <a:bodyPr wrap="square" lIns="0" tIns="0" rIns="0" bIns="0" rtlCol="0" anchor="ctr"/>
           <a:lstStyle/>
           <a:p>
-            <a:pPr indent="0" marL="0">
+            <a:pPr marL="0" indent="0">
               <a:buNone/>
             </a:pPr>
             <a:r>
@@ -11626,7 +11376,7 @@
           <a:bodyPr wrap="square" lIns="0" tIns="0" rIns="0" bIns="0" rtlCol="0" anchor="ctr"/>
           <a:lstStyle/>
           <a:p>
-            <a:pPr indent="0" marL="0">
+            <a:pPr marL="0" indent="0">
               <a:buNone/>
             </a:pPr>
             <a:r>
@@ -11665,7 +11415,7 @@
           </a:solidFill>
           <a:ln/>
           <a:effectLst>
-            <a:outerShdw sx="100000" sy="100000" kx="0" ky="0" algn="bl" rotWithShape="0" blurRad="88900" dist="38100" dir="5400000">
+            <a:outerShdw blurRad="88900" dist="38100" dir="5400000" algn="bl" rotWithShape="0">
               <a:srgbClr val="000000">
                 <a:alpha val="12000"/>
               </a:srgbClr>
@@ -11714,7 +11464,7 @@
           <a:bodyPr wrap="square" lIns="0" tIns="0" rIns="0" bIns="0" rtlCol="0" anchor="ctr"/>
           <a:lstStyle/>
           <a:p>
-            <a:pPr algn="ctr" indent="0" marL="0">
+            <a:pPr marL="0" indent="0" algn="ctr">
               <a:buNone/>
             </a:pPr>
             <a:r>
@@ -11753,7 +11503,7 @@
           <a:bodyPr wrap="square" lIns="0" tIns="0" rIns="0" bIns="0" rtlCol="0" anchor="ctr"/>
           <a:lstStyle/>
           <a:p>
-            <a:pPr indent="0" marL="0">
+            <a:pPr marL="0" indent="0">
               <a:buNone/>
             </a:pPr>
             <a:r>
@@ -11792,7 +11542,7 @@
           <a:bodyPr wrap="square" lIns="0" tIns="0" rIns="0" bIns="0" rtlCol="0" anchor="ctr"/>
           <a:lstStyle/>
           <a:p>
-            <a:pPr indent="0" marL="0">
+            <a:pPr marL="0" indent="0">
               <a:buNone/>
             </a:pPr>
             <a:r>
@@ -11831,7 +11581,7 @@
           </a:solidFill>
           <a:ln/>
           <a:effectLst>
-            <a:outerShdw sx="100000" sy="100000" kx="0" ky="0" algn="bl" rotWithShape="0" blurRad="88900" dist="38100" dir="5400000">
+            <a:outerShdw blurRad="88900" dist="38100" dir="5400000" algn="bl" rotWithShape="0">
               <a:srgbClr val="000000">
                 <a:alpha val="12000"/>
               </a:srgbClr>
@@ -11880,7 +11630,7 @@
           <a:bodyPr wrap="square" lIns="0" tIns="0" rIns="0" bIns="0" rtlCol="0" anchor="ctr"/>
           <a:lstStyle/>
           <a:p>
-            <a:pPr algn="ctr" indent="0" marL="0">
+            <a:pPr marL="0" indent="0" algn="ctr">
               <a:buNone/>
             </a:pPr>
             <a:r>
@@ -11919,7 +11669,7 @@
           <a:bodyPr wrap="square" lIns="0" tIns="0" rIns="0" bIns="0" rtlCol="0" anchor="ctr"/>
           <a:lstStyle/>
           <a:p>
-            <a:pPr indent="0" marL="0">
+            <a:pPr marL="0" indent="0">
               <a:buNone/>
             </a:pPr>
             <a:r>
@@ -11958,7 +11708,7 @@
           <a:bodyPr wrap="square" lIns="0" tIns="0" rIns="0" bIns="0" rtlCol="0" anchor="ctr"/>
           <a:lstStyle/>
           <a:p>
-            <a:pPr indent="0" marL="0">
+            <a:pPr marL="0" indent="0">
               <a:buNone/>
             </a:pPr>
             <a:r>
@@ -11997,7 +11747,7 @@
           </a:solidFill>
           <a:ln/>
           <a:effectLst>
-            <a:outerShdw sx="100000" sy="100000" kx="0" ky="0" algn="bl" rotWithShape="0" blurRad="88900" dist="38100" dir="5400000">
+            <a:outerShdw blurRad="88900" dist="38100" dir="5400000" algn="bl" rotWithShape="0">
               <a:srgbClr val="000000">
                 <a:alpha val="12000"/>
               </a:srgbClr>
@@ -12046,7 +11796,7 @@
           <a:bodyPr wrap="square" lIns="0" tIns="0" rIns="0" bIns="0" rtlCol="0" anchor="ctr"/>
           <a:lstStyle/>
           <a:p>
-            <a:pPr algn="ctr" indent="0" marL="0">
+            <a:pPr marL="0" indent="0" algn="ctr">
               <a:buNone/>
             </a:pPr>
             <a:r>
@@ -12085,7 +11835,7 @@
           <a:bodyPr wrap="square" lIns="0" tIns="0" rIns="0" bIns="0" rtlCol="0" anchor="ctr"/>
           <a:lstStyle/>
           <a:p>
-            <a:pPr indent="0" marL="0">
+            <a:pPr marL="0" indent="0">
               <a:buNone/>
             </a:pPr>
             <a:r>
@@ -12124,7 +11874,7 @@
           <a:bodyPr wrap="square" lIns="0" tIns="0" rIns="0" bIns="0" rtlCol="0" anchor="ctr"/>
           <a:lstStyle/>
           <a:p>
-            <a:pPr indent="0" marL="0">
+            <a:pPr marL="0" indent="0">
               <a:buNone/>
             </a:pPr>
             <a:r>
@@ -12163,7 +11913,7 @@
           </a:solidFill>
           <a:ln/>
           <a:effectLst>
-            <a:outerShdw sx="100000" sy="100000" kx="0" ky="0" algn="bl" rotWithShape="0" blurRad="88900" dist="38100" dir="5400000">
+            <a:outerShdw blurRad="88900" dist="38100" dir="5400000" algn="bl" rotWithShape="0">
               <a:srgbClr val="000000">
                 <a:alpha val="12000"/>
               </a:srgbClr>
@@ -12212,7 +11962,7 @@
           <a:bodyPr wrap="square" lIns="0" tIns="0" rIns="0" bIns="0" rtlCol="0" anchor="ctr"/>
           <a:lstStyle/>
           <a:p>
-            <a:pPr algn="ctr" indent="0" marL="0">
+            <a:pPr marL="0" indent="0" algn="ctr">
               <a:buNone/>
             </a:pPr>
             <a:r>
@@ -12251,7 +12001,7 @@
           <a:bodyPr wrap="square" lIns="0" tIns="0" rIns="0" bIns="0" rtlCol="0" anchor="ctr"/>
           <a:lstStyle/>
           <a:p>
-            <a:pPr indent="0" marL="0">
+            <a:pPr marL="0" indent="0">
               <a:buNone/>
             </a:pPr>
             <a:r>
@@ -12290,7 +12040,7 @@
           <a:bodyPr wrap="square" lIns="0" tIns="0" rIns="0" bIns="0" rtlCol="0" anchor="ctr"/>
           <a:lstStyle/>
           <a:p>
-            <a:pPr indent="0" marL="0">
+            <a:pPr marL="0" indent="0">
               <a:buNone/>
             </a:pPr>
             <a:r>
@@ -12324,6 +12074,7 @@
         <a:solidFill>
           <a:srgbClr val="FFFFFF"/>
         </a:solidFill>
+        <a:effectLst/>
       </p:bgPr>
     </p:bg>
     <p:spTree>
@@ -12361,11 +12112,11 @@
           <a:bodyPr wrap="square" lIns="0" tIns="0" rIns="0" bIns="0" rtlCol="0" anchor="ctr"/>
           <a:lstStyle/>
           <a:p>
-            <a:pPr indent="0" marL="0">
-              <a:buNone/>
-            </a:pPr>
-            <a:r>
-              <a:rPr lang="en-US" sz="1200" b="1" spc="200" kern="0" dirty="0">
+            <a:pPr marL="0" indent="0">
+              <a:buNone/>
+            </a:pPr>
+            <a:r>
+              <a:rPr lang="en-US" sz="1200" b="1" kern="0" spc="200" dirty="0">
                 <a:solidFill>
                   <a:srgbClr val="0E7C86"/>
                 </a:solidFill>
@@ -12400,7 +12151,7 @@
           <a:bodyPr wrap="square" lIns="0" tIns="0" rIns="0" bIns="0" rtlCol="0" anchor="t"/>
           <a:lstStyle/>
           <a:p>
-            <a:pPr indent="0" marL="0">
+            <a:pPr marL="0" indent="0">
               <a:buNone/>
             </a:pPr>
             <a:r>
@@ -12439,7 +12190,7 @@
           <a:bodyPr wrap="square" lIns="0" tIns="0" rIns="0" bIns="0" rtlCol="0" anchor="ctr"/>
           <a:lstStyle/>
           <a:p>
-            <a:pPr indent="0" marL="0">
+            <a:pPr marL="0" indent="0">
               <a:buNone/>
             </a:pPr>
             <a:r>
@@ -12478,7 +12229,7 @@
           <a:bodyPr wrap="square" lIns="0" tIns="0" rIns="0" bIns="0" rtlCol="0" anchor="ctr"/>
           <a:lstStyle/>
           <a:p>
-            <a:pPr algn="r" indent="0" marL="0">
+            <a:pPr marL="0" indent="0" algn="r">
               <a:buNone/>
             </a:pPr>
             <a:r>
@@ -12670,7 +12421,7 @@
           <a:bodyPr wrap="square" lIns="0" tIns="0" rIns="0" bIns="0" rtlCol="0" anchor="ctr"/>
           <a:lstStyle/>
           <a:p>
-            <a:pPr algn="ctr" indent="0" marL="0">
+            <a:pPr marL="0" indent="0" algn="ctr">
               <a:buNone/>
             </a:pPr>
             <a:r>
@@ -12709,7 +12460,7 @@
           <a:bodyPr wrap="square" lIns="0" tIns="0" rIns="0" bIns="0" rtlCol="0" anchor="ctr"/>
           <a:lstStyle/>
           <a:p>
-            <a:pPr indent="0" marL="0">
+            <a:pPr marL="0" indent="0">
               <a:buNone/>
             </a:pPr>
             <a:r>
@@ -12795,7 +12546,7 @@
           <a:bodyPr wrap="square" lIns="0" tIns="0" rIns="0" bIns="0" rtlCol="0" anchor="ctr"/>
           <a:lstStyle/>
           <a:p>
-            <a:pPr algn="ctr" indent="0" marL="0">
+            <a:pPr marL="0" indent="0" algn="ctr">
               <a:buNone/>
             </a:pPr>
             <a:r>
@@ -12834,7 +12585,7 @@
           <a:bodyPr wrap="square" lIns="0" tIns="0" rIns="0" bIns="0" rtlCol="0" anchor="ctr"/>
           <a:lstStyle/>
           <a:p>
-            <a:pPr indent="0" marL="0">
+            <a:pPr marL="0" indent="0">
               <a:buNone/>
             </a:pPr>
             <a:r>
@@ -12920,7 +12671,7 @@
           <a:bodyPr wrap="square" lIns="0" tIns="0" rIns="0" bIns="0" rtlCol="0" anchor="ctr"/>
           <a:lstStyle/>
           <a:p>
-            <a:pPr algn="ctr" indent="0" marL="0">
+            <a:pPr marL="0" indent="0" algn="ctr">
               <a:buNone/>
             </a:pPr>
             <a:r>
@@ -12959,7 +12710,7 @@
           <a:bodyPr wrap="square" lIns="0" tIns="0" rIns="0" bIns="0" rtlCol="0" anchor="ctr"/>
           <a:lstStyle/>
           <a:p>
-            <a:pPr indent="0" marL="0">
+            <a:pPr marL="0" indent="0">
               <a:buNone/>
             </a:pPr>
             <a:r>
@@ -13045,7 +12796,7 @@
           <a:bodyPr wrap="square" lIns="0" tIns="0" rIns="0" bIns="0" rtlCol="0" anchor="ctr"/>
           <a:lstStyle/>
           <a:p>
-            <a:pPr algn="ctr" indent="0" marL="0">
+            <a:pPr marL="0" indent="0" algn="ctr">
               <a:buNone/>
             </a:pPr>
             <a:r>
@@ -13084,7 +12835,7 @@
           <a:bodyPr wrap="square" lIns="0" tIns="0" rIns="0" bIns="0" rtlCol="0" anchor="ctr"/>
           <a:lstStyle/>
           <a:p>
-            <a:pPr indent="0" marL="0">
+            <a:pPr marL="0" indent="0">
               <a:buNone/>
             </a:pPr>
             <a:r>
@@ -13123,7 +12874,7 @@
           </a:solidFill>
           <a:ln/>
           <a:effectLst>
-            <a:outerShdw sx="100000" sy="100000" kx="0" ky="0" algn="bl" rotWithShape="0" blurRad="88900" dist="38100" dir="5400000">
+            <a:outerShdw blurRad="88900" dist="38100" dir="5400000" algn="bl" rotWithShape="0">
               <a:srgbClr val="000000">
                 <a:alpha val="12000"/>
               </a:srgbClr>
@@ -13172,7 +12923,7 @@
           <a:bodyPr wrap="square" lIns="0" tIns="0" rIns="0" bIns="0" rtlCol="0" anchor="ctr"/>
           <a:lstStyle/>
           <a:p>
-            <a:pPr algn="ctr" indent="0" marL="0">
+            <a:pPr marL="0" indent="0" algn="ctr">
               <a:buNone/>
             </a:pPr>
             <a:r>
@@ -13211,7 +12962,7 @@
           <a:bodyPr wrap="square" lIns="0" tIns="0" rIns="0" bIns="0" rtlCol="0" anchor="ctr"/>
           <a:lstStyle/>
           <a:p>
-            <a:pPr indent="0" marL="0">
+            <a:pPr marL="0" indent="0">
               <a:buNone/>
             </a:pPr>
             <a:r>
@@ -13250,7 +13001,7 @@
           <a:bodyPr wrap="square" lIns="0" tIns="0" rIns="0" bIns="0" rtlCol="0" anchor="ctr"/>
           <a:lstStyle/>
           <a:p>
-            <a:pPr algn="ctr" indent="0" marL="0">
+            <a:pPr marL="0" indent="0" algn="ctr">
               <a:buNone/>
             </a:pPr>
             <a:r>
@@ -13284,6 +13035,7 @@
         <a:solidFill>
           <a:srgbClr val="FFFFFF"/>
         </a:solidFill>
+        <a:effectLst/>
       </p:bgPr>
     </p:bg>
     <p:spTree>
@@ -13321,11 +13073,11 @@
           <a:bodyPr wrap="square" lIns="0" tIns="0" rIns="0" bIns="0" rtlCol="0" anchor="ctr"/>
           <a:lstStyle/>
           <a:p>
-            <a:pPr indent="0" marL="0">
-              <a:buNone/>
-            </a:pPr>
-            <a:r>
-              <a:rPr lang="en-US" sz="1200" b="1" spc="200" kern="0" dirty="0">
+            <a:pPr marL="0" indent="0">
+              <a:buNone/>
+            </a:pPr>
+            <a:r>
+              <a:rPr lang="en-US" sz="1200" b="1" kern="0" spc="200" dirty="0">
                 <a:solidFill>
                   <a:srgbClr val="0E7C86"/>
                 </a:solidFill>
@@ -13360,7 +13112,7 @@
           <a:bodyPr wrap="square" lIns="0" tIns="0" rIns="0" bIns="0" rtlCol="0" anchor="t"/>
           <a:lstStyle/>
           <a:p>
-            <a:pPr indent="0" marL="0">
+            <a:pPr marL="0" indent="0">
               <a:buNone/>
             </a:pPr>
             <a:r>
@@ -13399,7 +13151,7 @@
           <a:bodyPr wrap="square" lIns="0" tIns="0" rIns="0" bIns="0" rtlCol="0" anchor="ctr"/>
           <a:lstStyle/>
           <a:p>
-            <a:pPr indent="0" marL="0">
+            <a:pPr marL="0" indent="0">
               <a:buNone/>
             </a:pPr>
             <a:r>
@@ -13438,7 +13190,7 @@
           <a:bodyPr wrap="square" lIns="0" tIns="0" rIns="0" bIns="0" rtlCol="0" anchor="ctr"/>
           <a:lstStyle/>
           <a:p>
-            <a:pPr algn="r" indent="0" marL="0">
+            <a:pPr marL="0" indent="0" algn="r">
               <a:buNone/>
             </a:pPr>
             <a:r>
@@ -13625,7 +13377,7 @@
           <a:bodyPr wrap="square" lIns="0" tIns="0" rIns="0" bIns="0" rtlCol="0" anchor="ctr"/>
           <a:lstStyle/>
           <a:p>
-            <a:pPr indent="0" marL="0">
+            <a:pPr marL="0" indent="0">
               <a:buNone/>
             </a:pPr>
             <a:r>
@@ -13706,7 +13458,7 @@
           <a:bodyPr wrap="square" lIns="0" tIns="0" rIns="0" bIns="0" rtlCol="0" anchor="ctr"/>
           <a:lstStyle/>
           <a:p>
-            <a:pPr indent="0" marL="0">
+            <a:pPr marL="0" indent="0">
               <a:buNone/>
             </a:pPr>
             <a:r>
@@ -13787,7 +13539,7 @@
           <a:bodyPr wrap="square" lIns="0" tIns="0" rIns="0" bIns="0" rtlCol="0" anchor="ctr"/>
           <a:lstStyle/>
           <a:p>
-            <a:pPr indent="0" marL="0">
+            <a:pPr marL="0" indent="0">
               <a:buNone/>
             </a:pPr>
             <a:r>
@@ -13868,7 +13620,7 @@
           <a:bodyPr wrap="square" lIns="0" tIns="0" rIns="0" bIns="0" rtlCol="0" anchor="ctr"/>
           <a:lstStyle/>
           <a:p>
-            <a:pPr indent="0" marL="0">
+            <a:pPr marL="0" indent="0">
               <a:buNone/>
             </a:pPr>
             <a:r>
@@ -13949,7 +13701,7 @@
           <a:bodyPr wrap="square" lIns="0" tIns="0" rIns="0" bIns="0" rtlCol="0" anchor="ctr"/>
           <a:lstStyle/>
           <a:p>
-            <a:pPr indent="0" marL="0">
+            <a:pPr marL="0" indent="0">
               <a:buNone/>
             </a:pPr>
             <a:r>
@@ -14010,7 +13762,7 @@
           <a:bodyPr wrap="square" lIns="0" tIns="0" rIns="0" bIns="0" rtlCol="0" anchor="ctr"/>
           <a:lstStyle/>
           <a:p>
-            <a:pPr algn="ctr" indent="0" marL="0">
+            <a:pPr marL="0" indent="0" algn="ctr">
               <a:buNone/>
             </a:pPr>
             <a:r>
@@ -14044,6 +13796,7 @@
         <a:solidFill>
           <a:srgbClr val="FFFFFF"/>
         </a:solidFill>
+        <a:effectLst/>
       </p:bgPr>
     </p:bg>
     <p:spTree>
@@ -14081,11 +13834,11 @@
           <a:bodyPr wrap="square" lIns="0" tIns="0" rIns="0" bIns="0" rtlCol="0" anchor="ctr"/>
           <a:lstStyle/>
           <a:p>
-            <a:pPr indent="0" marL="0">
-              <a:buNone/>
-            </a:pPr>
-            <a:r>
-              <a:rPr lang="en-US" sz="1200" b="1" spc="200" kern="0" dirty="0">
+            <a:pPr marL="0" indent="0">
+              <a:buNone/>
+            </a:pPr>
+            <a:r>
+              <a:rPr lang="en-US" sz="1200" b="1" kern="0" spc="200" dirty="0">
                 <a:solidFill>
                   <a:srgbClr val="0E7C86"/>
                 </a:solidFill>
@@ -14120,7 +13873,7 @@
           <a:bodyPr wrap="square" lIns="0" tIns="0" rIns="0" bIns="0" rtlCol="0" anchor="t"/>
           <a:lstStyle/>
           <a:p>
-            <a:pPr indent="0" marL="0">
+            <a:pPr marL="0" indent="0">
               <a:buNone/>
             </a:pPr>
             <a:r>
@@ -14159,7 +13912,7 @@
           <a:bodyPr wrap="square" lIns="0" tIns="0" rIns="0" bIns="0" rtlCol="0" anchor="ctr"/>
           <a:lstStyle/>
           <a:p>
-            <a:pPr indent="0" marL="0">
+            <a:pPr marL="0" indent="0">
               <a:buNone/>
             </a:pPr>
             <a:r>
@@ -14198,7 +13951,7 @@
           <a:bodyPr wrap="square" lIns="0" tIns="0" rIns="0" bIns="0" rtlCol="0" anchor="ctr"/>
           <a:lstStyle/>
           <a:p>
-            <a:pPr algn="r" indent="0" marL="0">
+            <a:pPr marL="0" indent="0" algn="r">
               <a:buNone/>
             </a:pPr>
             <a:r>
@@ -14343,7 +14096,7 @@
           </a:solidFill>
           <a:ln/>
           <a:effectLst>
-            <a:outerShdw sx="100000" sy="100000" kx="0" ky="0" algn="bl" rotWithShape="0" blurRad="88900" dist="38100" dir="5400000">
+            <a:outerShdw blurRad="88900" dist="38100" dir="5400000" algn="bl" rotWithShape="0">
               <a:srgbClr val="000000">
                 <a:alpha val="12000"/>
               </a:srgbClr>
@@ -14372,7 +14125,7 @@
           <a:bodyPr wrap="square" lIns="0" tIns="0" rIns="0" bIns="0" rtlCol="0" anchor="ctr"/>
           <a:lstStyle/>
           <a:p>
-            <a:pPr algn="ctr" indent="0" marL="0">
+            <a:pPr marL="0" indent="0" algn="ctr">
               <a:buNone/>
             </a:pPr>
             <a:r>
@@ -14411,7 +14164,7 @@
           <a:bodyPr wrap="square" lIns="0" tIns="0" rIns="0" bIns="0" rtlCol="0" anchor="ctr"/>
           <a:lstStyle/>
           <a:p>
-            <a:pPr indent="0" marL="0">
+            <a:pPr marL="0" indent="0">
               <a:buNone/>
             </a:pPr>
             <a:r>
@@ -14428,30 +14181,6 @@
             <a:endParaRPr lang="en-US" sz="1000" dirty="0"/>
           </a:p>
         </p:txBody>
-      </p:sp>
-      <p:sp>
-        <p:nvSpPr>
-          <p:cNvPr id="11" name="Shape 8"/>
-          <p:cNvSpPr/>
-          <p:nvPr/>
-        </p:nvSpPr>
-        <p:spPr>
-          <a:xfrm>
-            <a:off x="10424160" y="2569464"/>
-            <a:ext cx="640080" cy="1060704"/>
-          </a:xfrm>
-          <a:prstGeom prst="line">
-            <a:avLst/>
-          </a:prstGeom>
-          <a:noFill/>
-          <a:ln w="12700">
-            <a:solidFill>
-              <a:srgbClr val="C9D7D9"/>
-            </a:solidFill>
-            <a:prstDash val="solid"/>
-            <a:tailEnd type="triangle"/>
-          </a:ln>
-        </p:spPr>
       </p:sp>
       <p:sp>
         <p:nvSpPr>
@@ -14474,7 +14203,7 @@
           </a:solidFill>
           <a:ln/>
           <a:effectLst>
-            <a:outerShdw sx="100000" sy="100000" kx="0" ky="0" algn="bl" rotWithShape="0" blurRad="88900" dist="38100" dir="5400000">
+            <a:outerShdw blurRad="88900" dist="38100" dir="5400000" algn="bl" rotWithShape="0">
               <a:srgbClr val="000000">
                 <a:alpha val="12000"/>
               </a:srgbClr>
@@ -14503,7 +14232,7 @@
           <a:bodyPr wrap="square" lIns="0" tIns="0" rIns="0" bIns="0" rtlCol="0" anchor="ctr"/>
           <a:lstStyle/>
           <a:p>
-            <a:pPr algn="ctr" indent="0" marL="0">
+            <a:pPr marL="0" indent="0" algn="ctr">
               <a:buNone/>
             </a:pPr>
             <a:r>
@@ -14542,7 +14271,7 @@
           <a:bodyPr wrap="square" lIns="0" tIns="0" rIns="0" bIns="0" rtlCol="0" anchor="ctr"/>
           <a:lstStyle/>
           <a:p>
-            <a:pPr indent="0" marL="0">
+            <a:pPr marL="0" indent="0">
               <a:buNone/>
             </a:pPr>
             <a:r>
@@ -14559,30 +14288,6 @@
             <a:endParaRPr lang="en-US" sz="1000" dirty="0"/>
           </a:p>
         </p:txBody>
-      </p:sp>
-      <p:sp>
-        <p:nvSpPr>
-          <p:cNvPr id="15" name="Shape 12"/>
-          <p:cNvSpPr/>
-          <p:nvPr/>
-        </p:nvSpPr>
-        <p:spPr>
-          <a:xfrm>
-            <a:off x="10424160" y="3438144"/>
-            <a:ext cx="640080" cy="192024"/>
-          </a:xfrm>
-          <a:prstGeom prst="line">
-            <a:avLst/>
-          </a:prstGeom>
-          <a:noFill/>
-          <a:ln w="12700">
-            <a:solidFill>
-              <a:srgbClr val="C9D7D9"/>
-            </a:solidFill>
-            <a:prstDash val="solid"/>
-            <a:tailEnd type="triangle"/>
-          </a:ln>
-        </p:spPr>
       </p:sp>
       <p:sp>
         <p:nvSpPr>
@@ -14605,7 +14310,7 @@
           </a:solidFill>
           <a:ln/>
           <a:effectLst>
-            <a:outerShdw sx="100000" sy="100000" kx="0" ky="0" algn="bl" rotWithShape="0" blurRad="88900" dist="38100" dir="5400000">
+            <a:outerShdw blurRad="88900" dist="38100" dir="5400000" algn="bl" rotWithShape="0">
               <a:srgbClr val="000000">
                 <a:alpha val="12000"/>
               </a:srgbClr>
@@ -14634,7 +14339,7 @@
           <a:bodyPr wrap="square" lIns="0" tIns="0" rIns="0" bIns="0" rtlCol="0" anchor="ctr"/>
           <a:lstStyle/>
           <a:p>
-            <a:pPr algn="ctr" indent="0" marL="0">
+            <a:pPr marL="0" indent="0" algn="ctr">
               <a:buNone/>
             </a:pPr>
             <a:r>
@@ -14673,7 +14378,7 @@
           <a:bodyPr wrap="square" lIns="0" tIns="0" rIns="0" bIns="0" rtlCol="0" anchor="ctr"/>
           <a:lstStyle/>
           <a:p>
-            <a:pPr indent="0" marL="0">
+            <a:pPr marL="0" indent="0">
               <a:buNone/>
             </a:pPr>
             <a:r>
@@ -14691,30 +14396,72 @@
           </a:p>
         </p:txBody>
       </p:sp>
-      <p:sp>
-        <p:nvSpPr>
-          <p:cNvPr id="19" name="Shape 16"/>
-          <p:cNvSpPr/>
-          <p:nvPr/>
-        </p:nvSpPr>
-        <p:spPr>
-          <a:xfrm>
-            <a:off x="10424160" y="4306824"/>
-            <a:ext cx="640080" cy="-676656"/>
-          </a:xfrm>
-          <a:prstGeom prst="line">
-            <a:avLst/>
-          </a:prstGeom>
-          <a:noFill/>
-          <a:ln w="12700">
+      <p:cxnSp>
+        <p:nvCxnSpPr>
+          <p:cNvPr id="900" name="trustarrow0"/>
+          <p:cNvCxnSpPr/>
+          <p:nvPr/>
+        </p:nvCxnSpPr>
+        <p:spPr>
+          <a:xfrm flipH="0" flipV="0">
+            <a:off x="10424160" y="2940000"/>
+            <a:ext cx="487200" cy="809040"/>
+          </a:xfrm>
+          <a:prstGeom prst="straightConnector1">
+            <a:avLst/>
+          </a:prstGeom>
+          <a:ln w="19050">
             <a:solidFill>
-              <a:srgbClr val="C9D7D9"/>
+              <a:srgbClr val="5B6B70"/>
             </a:solidFill>
-            <a:prstDash val="solid"/>
-            <a:tailEnd type="triangle"/>
+            <a:tailEnd type="triangle" w="med" len="med"/>
           </a:ln>
         </p:spPr>
-      </p:sp>
+      </p:cxnSp>
+      <p:cxnSp>
+        <p:nvCxnSpPr>
+          <p:cNvPr id="901" name="trustarrow1"/>
+          <p:cNvCxnSpPr/>
+          <p:nvPr/>
+        </p:nvCxnSpPr>
+        <p:spPr>
+          <a:xfrm flipH="0" flipV="0">
+            <a:off x="10424160" y="3657600"/>
+            <a:ext cx="487200" cy="91440"/>
+          </a:xfrm>
+          <a:prstGeom prst="straightConnector1">
+            <a:avLst/>
+          </a:prstGeom>
+          <a:ln w="19050">
+            <a:solidFill>
+              <a:srgbClr val="5B6B70"/>
+            </a:solidFill>
+            <a:tailEnd type="triangle" w="med" len="med"/>
+          </a:ln>
+        </p:spPr>
+      </p:cxnSp>
+      <p:cxnSp>
+        <p:nvCxnSpPr>
+          <p:cNvPr id="902" name="trustarrow2"/>
+          <p:cNvCxnSpPr/>
+          <p:nvPr/>
+        </p:nvCxnSpPr>
+        <p:spPr>
+          <a:xfrm flipH="0" flipV="1">
+            <a:off x="10424160" y="3749040"/>
+            <a:ext cx="487200" cy="650960"/>
+          </a:xfrm>
+          <a:prstGeom prst="straightConnector1">
+            <a:avLst/>
+          </a:prstGeom>
+          <a:ln w="19050">
+            <a:solidFill>
+              <a:srgbClr val="5B6B70"/>
+            </a:solidFill>
+            <a:tailEnd type="triangle" w="med" len="med"/>
+          </a:ln>
+        </p:spPr>
+      </p:cxnSp>
       <p:sp>
         <p:nvSpPr>
           <p:cNvPr id="20" name="Shape 17"/>
@@ -14734,7 +14481,7 @@
           </a:solidFill>
           <a:ln/>
           <a:effectLst>
-            <a:outerShdw sx="100000" sy="100000" kx="0" ky="0" algn="bl" rotWithShape="0" blurRad="88900" dist="38100" dir="5400000">
+            <a:outerShdw blurRad="88900" dist="38100" dir="5400000" algn="bl" rotWithShape="0">
               <a:srgbClr val="000000">
                 <a:alpha val="12000"/>
               </a:srgbClr>
@@ -14763,7 +14510,7 @@
           <a:bodyPr wrap="square" lIns="0" tIns="0" rIns="0" bIns="0" rtlCol="0" anchor="ctr"/>
           <a:lstStyle/>
           <a:p>
-            <a:pPr algn="ctr" indent="0" marL="0">
+            <a:pPr marL="0" indent="0" algn="ctr">
               <a:buNone/>
             </a:pPr>
             <a:r>
@@ -14797,6 +14544,7 @@
         <a:solidFill>
           <a:srgbClr val="FFFFFF"/>
         </a:solidFill>
+        <a:effectLst/>
       </p:bgPr>
     </p:bg>
     <p:spTree>
@@ -14834,11 +14582,11 @@
           <a:bodyPr wrap="square" lIns="0" tIns="0" rIns="0" bIns="0" rtlCol="0" anchor="ctr"/>
           <a:lstStyle/>
           <a:p>
-            <a:pPr indent="0" marL="0">
-              <a:buNone/>
-            </a:pPr>
-            <a:r>
-              <a:rPr lang="en-US" sz="1200" b="1" spc="200" kern="0" dirty="0">
+            <a:pPr marL="0" indent="0">
+              <a:buNone/>
+            </a:pPr>
+            <a:r>
+              <a:rPr lang="en-US" sz="1200" b="1" kern="0" spc="200" dirty="0">
                 <a:solidFill>
                   <a:srgbClr val="0E7C86"/>
                 </a:solidFill>
@@ -14873,7 +14621,7 @@
           <a:bodyPr wrap="square" lIns="0" tIns="0" rIns="0" bIns="0" rtlCol="0" anchor="t"/>
           <a:lstStyle/>
           <a:p>
-            <a:pPr indent="0" marL="0">
+            <a:pPr marL="0" indent="0">
               <a:buNone/>
             </a:pPr>
             <a:r>
@@ -14912,7 +14660,7 @@
           <a:bodyPr wrap="square" lIns="0" tIns="0" rIns="0" bIns="0" rtlCol="0" anchor="ctr"/>
           <a:lstStyle/>
           <a:p>
-            <a:pPr indent="0" marL="0">
+            <a:pPr marL="0" indent="0">
               <a:buNone/>
             </a:pPr>
             <a:r>
@@ -14951,7 +14699,7 @@
           <a:bodyPr wrap="square" lIns="0" tIns="0" rIns="0" bIns="0" rtlCol="0" anchor="ctr"/>
           <a:lstStyle/>
           <a:p>
-            <a:pPr algn="r" indent="0" marL="0">
+            <a:pPr marL="0" indent="0" algn="r">
               <a:buNone/>
             </a:pPr>
             <a:r>
@@ -14990,7 +14738,7 @@
           </a:solidFill>
           <a:ln/>
           <a:effectLst>
-            <a:outerShdw sx="100000" sy="100000" kx="0" ky="0" algn="bl" rotWithShape="0" blurRad="88900" dist="38100" dir="5400000">
+            <a:outerShdw blurRad="88900" dist="38100" dir="5400000" algn="bl" rotWithShape="0">
               <a:srgbClr val="000000">
                 <a:alpha val="12000"/>
               </a:srgbClr>
@@ -15019,7 +14767,7 @@
           <a:bodyPr wrap="square" lIns="0" tIns="0" rIns="0" bIns="0" rtlCol="0" anchor="ctr"/>
           <a:lstStyle/>
           <a:p>
-            <a:pPr algn="ctr" indent="0" marL="0">
+            <a:pPr marL="0" indent="0" algn="ctr">
               <a:buNone/>
             </a:pPr>
             <a:r>
@@ -15058,7 +14806,7 @@
           <a:bodyPr wrap="square" lIns="0" tIns="0" rIns="0" bIns="0" rtlCol="0" anchor="ctr"/>
           <a:lstStyle/>
           <a:p>
-            <a:pPr algn="ctr" indent="0" marL="0">
+            <a:pPr marL="0" indent="0" algn="ctr">
               <a:buNone/>
             </a:pPr>
             <a:r>
@@ -15121,7 +14869,7 @@
           </a:solidFill>
           <a:ln/>
           <a:effectLst>
-            <a:outerShdw sx="100000" sy="100000" kx="0" ky="0" algn="bl" rotWithShape="0" blurRad="88900" dist="38100" dir="5400000">
+            <a:outerShdw blurRad="88900" dist="38100" dir="5400000" algn="bl" rotWithShape="0">
               <a:srgbClr val="000000">
                 <a:alpha val="12000"/>
               </a:srgbClr>
@@ -15150,7 +14898,7 @@
           <a:bodyPr wrap="square" lIns="0" tIns="0" rIns="0" bIns="0" rtlCol="0" anchor="ctr"/>
           <a:lstStyle/>
           <a:p>
-            <a:pPr algn="ctr" indent="0" marL="0">
+            <a:pPr marL="0" indent="0" algn="ctr">
               <a:buNone/>
             </a:pPr>
             <a:r>
@@ -15189,7 +14937,7 @@
           <a:bodyPr wrap="square" lIns="0" tIns="0" rIns="0" bIns="0" rtlCol="0" anchor="ctr"/>
           <a:lstStyle/>
           <a:p>
-            <a:pPr algn="ctr" indent="0" marL="0">
+            <a:pPr marL="0" indent="0" algn="ctr">
               <a:buNone/>
             </a:pPr>
             <a:r>
@@ -15252,7 +15000,7 @@
           </a:solidFill>
           <a:ln/>
           <a:effectLst>
-            <a:outerShdw sx="100000" sy="100000" kx="0" ky="0" algn="bl" rotWithShape="0" blurRad="88900" dist="38100" dir="5400000">
+            <a:outerShdw blurRad="88900" dist="38100" dir="5400000" algn="bl" rotWithShape="0">
               <a:srgbClr val="000000">
                 <a:alpha val="12000"/>
               </a:srgbClr>
@@ -15281,7 +15029,7 @@
           <a:bodyPr wrap="square" lIns="0" tIns="0" rIns="0" bIns="0" rtlCol="0" anchor="ctr"/>
           <a:lstStyle/>
           <a:p>
-            <a:pPr algn="ctr" indent="0" marL="0">
+            <a:pPr marL="0" indent="0" algn="ctr">
               <a:buNone/>
             </a:pPr>
             <a:r>
@@ -15320,7 +15068,7 @@
           <a:bodyPr wrap="square" lIns="0" tIns="0" rIns="0" bIns="0" rtlCol="0" anchor="ctr"/>
           <a:lstStyle/>
           <a:p>
-            <a:pPr algn="ctr" indent="0" marL="0">
+            <a:pPr marL="0" indent="0" algn="ctr">
               <a:buNone/>
             </a:pPr>
             <a:r>
@@ -15383,7 +15131,7 @@
           </a:solidFill>
           <a:ln/>
           <a:effectLst>
-            <a:outerShdw sx="100000" sy="100000" kx="0" ky="0" algn="bl" rotWithShape="0" blurRad="88900" dist="38100" dir="5400000">
+            <a:outerShdw blurRad="88900" dist="38100" dir="5400000" algn="bl" rotWithShape="0">
               <a:srgbClr val="000000">
                 <a:alpha val="12000"/>
               </a:srgbClr>
@@ -15412,7 +15160,7 @@
           <a:bodyPr wrap="square" lIns="0" tIns="0" rIns="0" bIns="0" rtlCol="0" anchor="ctr"/>
           <a:lstStyle/>
           <a:p>
-            <a:pPr algn="ctr" indent="0" marL="0">
+            <a:pPr marL="0" indent="0" algn="ctr">
               <a:buNone/>
             </a:pPr>
             <a:r>
@@ -15451,7 +15199,7 @@
           <a:bodyPr wrap="square" lIns="0" tIns="0" rIns="0" bIns="0" rtlCol="0" anchor="ctr"/>
           <a:lstStyle/>
           <a:p>
-            <a:pPr algn="ctr" indent="0" marL="0">
+            <a:pPr marL="0" indent="0" algn="ctr">
               <a:buNone/>
             </a:pPr>
             <a:r>
@@ -15514,7 +15262,7 @@
           </a:solidFill>
           <a:ln/>
           <a:effectLst>
-            <a:outerShdw sx="100000" sy="100000" kx="0" ky="0" algn="bl" rotWithShape="0" blurRad="88900" dist="38100" dir="5400000">
+            <a:outerShdw blurRad="88900" dist="38100" dir="5400000" algn="bl" rotWithShape="0">
               <a:srgbClr val="000000">
                 <a:alpha val="12000"/>
               </a:srgbClr>
@@ -15543,7 +15291,7 @@
           <a:bodyPr wrap="square" lIns="0" tIns="0" rIns="0" bIns="0" rtlCol="0" anchor="ctr"/>
           <a:lstStyle/>
           <a:p>
-            <a:pPr algn="ctr" indent="0" marL="0">
+            <a:pPr marL="0" indent="0" algn="ctr">
               <a:buNone/>
             </a:pPr>
             <a:r>
@@ -15582,7 +15330,7 @@
           <a:bodyPr wrap="square" lIns="0" tIns="0" rIns="0" bIns="0" rtlCol="0" anchor="ctr"/>
           <a:lstStyle/>
           <a:p>
-            <a:pPr algn="ctr" indent="0" marL="0">
+            <a:pPr marL="0" indent="0" algn="ctr">
               <a:buNone/>
             </a:pPr>
             <a:r>
@@ -15645,7 +15393,7 @@
           </a:solidFill>
           <a:ln/>
           <a:effectLst>
-            <a:outerShdw sx="100000" sy="100000" kx="0" ky="0" algn="bl" rotWithShape="0" blurRad="88900" dist="38100" dir="5400000">
+            <a:outerShdw blurRad="88900" dist="38100" dir="5400000" algn="bl" rotWithShape="0">
               <a:srgbClr val="000000">
                 <a:alpha val="12000"/>
               </a:srgbClr>
@@ -15674,7 +15422,7 @@
           <a:bodyPr wrap="square" lIns="0" tIns="0" rIns="0" bIns="0" rtlCol="0" anchor="ctr"/>
           <a:lstStyle/>
           <a:p>
-            <a:pPr algn="ctr" indent="0" marL="0">
+            <a:pPr marL="0" indent="0" algn="ctr">
               <a:buNone/>
             </a:pPr>
             <a:r>
@@ -15713,7 +15461,7 @@
           <a:bodyPr wrap="square" lIns="0" tIns="0" rIns="0" bIns="0" rtlCol="0" anchor="ctr"/>
           <a:lstStyle/>
           <a:p>
-            <a:pPr algn="ctr" indent="0" marL="0">
+            <a:pPr marL="0" indent="0" algn="ctr">
               <a:buNone/>
             </a:pPr>
             <a:r>
@@ -15776,7 +15524,7 @@
           </a:solidFill>
           <a:ln/>
           <a:effectLst>
-            <a:outerShdw sx="100000" sy="100000" kx="0" ky="0" algn="bl" rotWithShape="0" blurRad="88900" dist="38100" dir="5400000">
+            <a:outerShdw blurRad="88900" dist="38100" dir="5400000" algn="bl" rotWithShape="0">
               <a:srgbClr val="000000">
                 <a:alpha val="12000"/>
               </a:srgbClr>
@@ -15805,7 +15553,7 @@
           <a:bodyPr wrap="square" lIns="0" tIns="0" rIns="0" bIns="0" rtlCol="0" anchor="ctr"/>
           <a:lstStyle/>
           <a:p>
-            <a:pPr algn="ctr" indent="0" marL="0">
+            <a:pPr marL="0" indent="0" algn="ctr">
               <a:buNone/>
             </a:pPr>
             <a:r>
@@ -15844,7 +15592,7 @@
           <a:bodyPr wrap="square" lIns="0" tIns="0" rIns="0" bIns="0" rtlCol="0" anchor="ctr"/>
           <a:lstStyle/>
           <a:p>
-            <a:pPr algn="ctr" indent="0" marL="0">
+            <a:pPr marL="0" indent="0" algn="ctr">
               <a:buNone/>
             </a:pPr>
             <a:r>
@@ -15907,7 +15655,7 @@
           </a:solidFill>
           <a:ln/>
           <a:effectLst>
-            <a:outerShdw sx="100000" sy="100000" kx="0" ky="0" algn="bl" rotWithShape="0" blurRad="88900" dist="38100" dir="5400000">
+            <a:outerShdw blurRad="88900" dist="38100" dir="5400000" algn="bl" rotWithShape="0">
               <a:srgbClr val="000000">
                 <a:alpha val="12000"/>
               </a:srgbClr>
@@ -15936,7 +15684,7 @@
           <a:bodyPr wrap="square" lIns="0" tIns="0" rIns="0" bIns="0" rtlCol="0" anchor="ctr"/>
           <a:lstStyle/>
           <a:p>
-            <a:pPr algn="ctr" indent="0" marL="0">
+            <a:pPr marL="0" indent="0" algn="ctr">
               <a:buNone/>
             </a:pPr>
             <a:r>
@@ -15975,7 +15723,7 @@
           <a:bodyPr wrap="square" lIns="0" tIns="0" rIns="0" bIns="0" rtlCol="0" anchor="ctr"/>
           <a:lstStyle/>
           <a:p>
-            <a:pPr algn="ctr" indent="0" marL="0">
+            <a:pPr marL="0" indent="0" algn="ctr">
               <a:buNone/>
             </a:pPr>
             <a:r>
@@ -16014,7 +15762,7 @@
           <a:bodyPr wrap="square" lIns="0" tIns="0" rIns="0" bIns="0" rtlCol="0" anchor="ctr"/>
           <a:lstStyle/>
           <a:p>
-            <a:pPr algn="ctr" indent="0" marL="0">
+            <a:pPr marL="0" indent="0" algn="ctr">
               <a:buNone/>
             </a:pPr>
             <a:r>
@@ -16048,6 +15796,7 @@
         <a:solidFill>
           <a:srgbClr val="0B3B40"/>
         </a:solidFill>
+        <a:effectLst/>
       </p:bgPr>
     </p:bg>
     <p:spTree>
@@ -16085,11 +15834,11 @@
           <a:bodyPr wrap="square" lIns="0" tIns="0" rIns="0" bIns="0" rtlCol="0" anchor="ctr"/>
           <a:lstStyle/>
           <a:p>
-            <a:pPr indent="0" marL="0">
-              <a:buNone/>
-            </a:pPr>
-            <a:r>
-              <a:rPr lang="en-US" sz="1400" b="1" spc="300" kern="0" dirty="0">
+            <a:pPr marL="0" indent="0">
+              <a:buNone/>
+            </a:pPr>
+            <a:r>
+              <a:rPr lang="en-US" sz="1400" b="1" kern="0" spc="300" dirty="0">
                 <a:solidFill>
                   <a:srgbClr val="14A6B0"/>
                 </a:solidFill>
@@ -16124,7 +15873,7 @@
           <a:bodyPr wrap="square" lIns="0" tIns="0" rIns="0" bIns="0" rtlCol="0" anchor="t"/>
           <a:lstStyle/>
           <a:p>
-            <a:pPr indent="0" marL="0">
+            <a:pPr marL="0" indent="0">
               <a:lnSpc>
                 <a:spcPct val="110000"/>
               </a:lnSpc>
@@ -16144,7 +15893,7 @@
             <a:endParaRPr lang="en-US" sz="2700" dirty="0"/>
           </a:p>
           <a:p>
-            <a:pPr indent="0" marL="0">
+            <a:pPr marL="0" indent="0">
               <a:lnSpc>
                 <a:spcPct val="110000"/>
               </a:lnSpc>
@@ -16186,7 +15935,7 @@
           <a:bodyPr wrap="square" lIns="0" tIns="0" rIns="0" bIns="0" rtlCol="0" anchor="ctr"/>
           <a:lstStyle/>
           <a:p>
-            <a:pPr indent="0" marL="0">
+            <a:pPr marL="0" indent="0">
               <a:spcAft>
                 <a:spcPts val="800"/>
               </a:spcAft>
@@ -16206,7 +15955,7 @@
             <a:endParaRPr lang="en-US" sz="1500" dirty="0"/>
           </a:p>
           <a:p>
-            <a:pPr indent="0" marL="0">
+            <a:pPr marL="0" indent="0">
               <a:spcAft>
                 <a:spcPts val="800"/>
               </a:spcAft>
@@ -16226,7 +15975,7 @@
             <a:endParaRPr lang="en-US" sz="1500" dirty="0"/>
           </a:p>
           <a:p>
-            <a:pPr indent="0" marL="0">
+            <a:pPr marL="0" indent="0">
               <a:buNone/>
             </a:pPr>
             <a:r>
@@ -16260,6 +16009,7 @@
         <a:solidFill>
           <a:srgbClr val="FFFFFF"/>
         </a:solidFill>
+        <a:effectLst/>
       </p:bgPr>
     </p:bg>
     <p:spTree>
@@ -16297,11 +16047,11 @@
           <a:bodyPr wrap="square" lIns="0" tIns="0" rIns="0" bIns="0" rtlCol="0" anchor="ctr"/>
           <a:lstStyle/>
           <a:p>
-            <a:pPr indent="0" marL="0">
-              <a:buNone/>
-            </a:pPr>
-            <a:r>
-              <a:rPr lang="en-US" sz="1200" b="1" spc="200" kern="0" dirty="0">
+            <a:pPr marL="0" indent="0">
+              <a:buNone/>
+            </a:pPr>
+            <a:r>
+              <a:rPr lang="en-US" sz="1200" b="1" kern="0" spc="200" dirty="0">
                 <a:solidFill>
                   <a:srgbClr val="0E7C86"/>
                 </a:solidFill>
@@ -16336,7 +16086,7 @@
           <a:bodyPr wrap="square" lIns="0" tIns="0" rIns="0" bIns="0" rtlCol="0" anchor="t"/>
           <a:lstStyle/>
           <a:p>
-            <a:pPr indent="0" marL="0">
+            <a:pPr marL="0" indent="0">
               <a:buNone/>
             </a:pPr>
             <a:r>
@@ -16375,7 +16125,7 @@
           <a:bodyPr wrap="square" lIns="0" tIns="0" rIns="0" bIns="0" rtlCol="0" anchor="ctr"/>
           <a:lstStyle/>
           <a:p>
-            <a:pPr indent="0" marL="0">
+            <a:pPr marL="0" indent="0">
               <a:buNone/>
             </a:pPr>
             <a:r>
@@ -16414,7 +16164,7 @@
           <a:bodyPr wrap="square" lIns="0" tIns="0" rIns="0" bIns="0" rtlCol="0" anchor="ctr"/>
           <a:lstStyle/>
           <a:p>
-            <a:pPr algn="r" indent="0" marL="0">
+            <a:pPr marL="0" indent="0" algn="r">
               <a:buNone/>
             </a:pPr>
             <a:r>
@@ -16453,7 +16203,7 @@
           <a:bodyPr wrap="square" lIns="0" tIns="0" rIns="0" bIns="0" rtlCol="0" anchor="ctr"/>
           <a:lstStyle/>
           <a:p>
-            <a:pPr indent="0" marL="0">
+            <a:pPr marL="0" indent="0">
               <a:buNone/>
             </a:pPr>
             <a:r>
@@ -16492,7 +16242,7 @@
           <a:bodyPr wrap="square" lIns="0" tIns="0" rIns="0" bIns="0" rtlCol="0" anchor="t"/>
           <a:lstStyle/>
           <a:p>
-            <a:pPr indent="0" marL="0">
+            <a:pPr marL="0" indent="0">
               <a:buNone/>
             </a:pPr>
             <a:r>
@@ -16506,12 +16256,6 @@
               </a:rPr>
               <a:t>✓  </a:t>
             </a:r>
-            <a:pPr indent="0" marL="0">
-              <a:spcAft>
-                <a:spcPts val="1200"/>
-              </a:spcAft>
-              <a:buNone/>
-            </a:pPr>
             <a:r>
               <a:rPr lang="en-US" sz="1400" dirty="0">
                 <a:solidFill>
@@ -16526,7 +16270,7 @@
             <a:endParaRPr lang="en-US" sz="1400" dirty="0"/>
           </a:p>
           <a:p>
-            <a:pPr indent="0" marL="0">
+            <a:pPr marL="0" indent="0">
               <a:buNone/>
             </a:pPr>
             <a:r>
@@ -16540,12 +16284,6 @@
               </a:rPr>
               <a:t>✓  </a:t>
             </a:r>
-            <a:pPr indent="0" marL="0">
-              <a:spcAft>
-                <a:spcPts val="1200"/>
-              </a:spcAft>
-              <a:buNone/>
-            </a:pPr>
             <a:r>
               <a:rPr lang="en-US" sz="1400" dirty="0">
                 <a:solidFill>
@@ -16560,7 +16298,7 @@
             <a:endParaRPr lang="en-US" sz="1400" dirty="0"/>
           </a:p>
           <a:p>
-            <a:pPr indent="0" marL="0">
+            <a:pPr marL="0" indent="0">
               <a:buNone/>
             </a:pPr>
             <a:r>
@@ -16574,12 +16312,6 @@
               </a:rPr>
               <a:t>✓  </a:t>
             </a:r>
-            <a:pPr indent="0" marL="0">
-              <a:spcAft>
-                <a:spcPts val="1200"/>
-              </a:spcAft>
-              <a:buNone/>
-            </a:pPr>
             <a:r>
               <a:rPr lang="en-US" sz="1400" dirty="0">
                 <a:solidFill>
@@ -16594,7 +16326,7 @@
             <a:endParaRPr lang="en-US" sz="1400" dirty="0"/>
           </a:p>
           <a:p>
-            <a:pPr indent="0" marL="0">
+            <a:pPr marL="0" indent="0">
               <a:buNone/>
             </a:pPr>
             <a:r>
@@ -16608,12 +16340,6 @@
               </a:rPr>
               <a:t>✓  </a:t>
             </a:r>
-            <a:pPr indent="0" marL="0">
-              <a:spcAft>
-                <a:spcPts val="1200"/>
-              </a:spcAft>
-              <a:buNone/>
-            </a:pPr>
             <a:r>
               <a:rPr lang="en-US" sz="1400" dirty="0">
                 <a:solidFill>
@@ -16628,7 +16354,7 @@
             <a:endParaRPr lang="en-US" sz="1400" dirty="0"/>
           </a:p>
           <a:p>
-            <a:pPr indent="0" marL="0">
+            <a:pPr marL="0" indent="0">
               <a:buNone/>
             </a:pPr>
             <a:r>
@@ -16642,12 +16368,6 @@
               </a:rPr>
               <a:t>✓  </a:t>
             </a:r>
-            <a:pPr indent="0" marL="0">
-              <a:spcAft>
-                <a:spcPts val="1200"/>
-              </a:spcAft>
-              <a:buNone/>
-            </a:pPr>
             <a:r>
               <a:rPr lang="en-US" sz="1400" dirty="0">
                 <a:solidFill>
@@ -16662,7 +16382,7 @@
             <a:endParaRPr lang="en-US" sz="1400" dirty="0"/>
           </a:p>
           <a:p>
-            <a:pPr indent="0" marL="0">
+            <a:pPr marL="0" indent="0">
               <a:buNone/>
             </a:pPr>
             <a:r>
@@ -16676,12 +16396,6 @@
               </a:rPr>
               <a:t>✓  </a:t>
             </a:r>
-            <a:pPr indent="0" marL="0">
-              <a:spcAft>
-                <a:spcPts val="1200"/>
-              </a:spcAft>
-              <a:buNone/>
-            </a:pPr>
             <a:r>
               <a:rPr lang="en-US" sz="1400" dirty="0">
                 <a:solidFill>
@@ -16718,7 +16432,7 @@
           </a:solidFill>
           <a:ln/>
           <a:effectLst>
-            <a:outerShdw sx="100000" sy="100000" kx="0" ky="0" algn="bl" rotWithShape="0" blurRad="88900" dist="38100" dir="5400000">
+            <a:outerShdw blurRad="88900" dist="38100" dir="5400000" algn="bl" rotWithShape="0">
               <a:srgbClr val="000000">
                 <a:alpha val="12000"/>
               </a:srgbClr>
@@ -16747,7 +16461,7 @@
           <a:bodyPr wrap="square" lIns="0" tIns="0" rIns="0" bIns="0" rtlCol="0" anchor="ctr"/>
           <a:lstStyle/>
           <a:p>
-            <a:pPr indent="0" marL="0">
+            <a:pPr marL="0" indent="0">
               <a:buNone/>
             </a:pPr>
             <a:r>
@@ -16892,7 +16606,7 @@
           <a:bodyPr wrap="square" lIns="0" tIns="0" rIns="0" bIns="0" rtlCol="0" anchor="ctr"/>
           <a:lstStyle/>
           <a:p>
-            <a:pPr indent="0" marL="0">
+            <a:pPr marL="0" indent="0">
               <a:buNone/>
             </a:pPr>
             <a:r>
@@ -16926,6 +16640,7 @@
         <a:solidFill>
           <a:srgbClr val="0B3B40"/>
         </a:solidFill>
+        <a:effectLst/>
       </p:bgPr>
     </p:bg>
     <p:spTree>
@@ -16963,11 +16678,11 @@
           <a:bodyPr wrap="square" lIns="0" tIns="0" rIns="0" bIns="0" rtlCol="0" anchor="ctr"/>
           <a:lstStyle/>
           <a:p>
-            <a:pPr indent="0" marL="0">
-              <a:buNone/>
-            </a:pPr>
-            <a:r>
-              <a:rPr lang="en-US" sz="1400" b="1" spc="300" kern="0" dirty="0">
+            <a:pPr marL="0" indent="0">
+              <a:buNone/>
+            </a:pPr>
+            <a:r>
+              <a:rPr lang="en-US" sz="1400" b="1" kern="0" spc="300" dirty="0">
                 <a:solidFill>
                   <a:srgbClr val="14A6B0"/>
                 </a:solidFill>
@@ -17002,7 +16717,7 @@
           <a:bodyPr wrap="square" lIns="0" tIns="0" rIns="0" bIns="0" rtlCol="0" anchor="ctr"/>
           <a:lstStyle/>
           <a:p>
-            <a:pPr indent="0" marL="0">
+            <a:pPr marL="0" indent="0">
               <a:lnSpc>
                 <a:spcPct val="110000"/>
               </a:lnSpc>
@@ -17044,7 +16759,7 @@
           <a:bodyPr wrap="square" lIns="0" tIns="0" rIns="0" bIns="0" rtlCol="0" anchor="ctr"/>
           <a:lstStyle/>
           <a:p>
-            <a:pPr indent="0" marL="0">
+            <a:pPr marL="0" indent="0">
               <a:buNone/>
             </a:pPr>
             <a:r>
@@ -17058,9 +16773,6 @@
               </a:rPr>
               <a:t>A final charge: be the scientist who asks </a:t>
             </a:r>
-            <a:pPr indent="0" marL="0">
-              <a:buNone/>
-            </a:pPr>
             <a:r>
               <a:rPr lang="en-US" sz="1600" i="1" dirty="0">
                 <a:solidFill>
@@ -17097,7 +16809,7 @@
           <a:bodyPr wrap="square" lIns="0" tIns="0" rIns="0" bIns="0" rtlCol="0" anchor="ctr"/>
           <a:lstStyle/>
           <a:p>
-            <a:pPr indent="0" marL="0">
+            <a:pPr marL="0" indent="0">
               <a:buNone/>
             </a:pPr>
             <a:r>
@@ -17136,7 +16848,7 @@
           <a:bodyPr wrap="square" lIns="0" tIns="0" rIns="0" bIns="0" rtlCol="0" anchor="ctr"/>
           <a:lstStyle/>
           <a:p>
-            <a:pPr indent="0" marL="0">
+            <a:pPr marL="0" indent="0">
               <a:lnSpc>
                 <a:spcPct val="115000"/>
               </a:lnSpc>
@@ -17202,7 +16914,7 @@
           <a:bodyPr wrap="square" lIns="0" tIns="0" rIns="0" bIns="0" rtlCol="0" anchor="ctr"/>
           <a:lstStyle/>
           <a:p>
-            <a:pPr algn="ctr" indent="0" marL="0">
+            <a:pPr marL="0" indent="0" algn="ctr">
               <a:buNone/>
             </a:pPr>
             <a:r>
@@ -17265,7 +16977,7 @@
           <a:bodyPr wrap="square" lIns="0" tIns="0" rIns="0" bIns="0" rtlCol="0" anchor="ctr"/>
           <a:lstStyle/>
           <a:p>
-            <a:pPr algn="ctr" indent="0" marL="0">
+            <a:pPr marL="0" indent="0" algn="ctr">
               <a:buNone/>
             </a:pPr>
             <a:r>
@@ -17328,7 +17040,7 @@
           <a:bodyPr wrap="square" lIns="0" tIns="0" rIns="0" bIns="0" rtlCol="0" anchor="ctr"/>
           <a:lstStyle/>
           <a:p>
-            <a:pPr algn="ctr" indent="0" marL="0">
+            <a:pPr marL="0" indent="0" algn="ctr">
               <a:buNone/>
             </a:pPr>
             <a:r>
@@ -17389,7 +17101,7 @@
           <a:bodyPr wrap="square" lIns="0" tIns="0" rIns="0" bIns="0" rtlCol="0" anchor="ctr"/>
           <a:lstStyle/>
           <a:p>
-            <a:pPr algn="ctr" indent="0" marL="0">
+            <a:pPr marL="0" indent="0" algn="ctr">
               <a:buNone/>
             </a:pPr>
             <a:r>
@@ -17428,7 +17140,7 @@
           <a:bodyPr wrap="square" lIns="0" tIns="0" rIns="0" bIns="0" rtlCol="0" anchor="ctr"/>
           <a:lstStyle/>
           <a:p>
-            <a:pPr algn="ctr" indent="0" marL="0">
+            <a:pPr marL="0" indent="0" algn="ctr">
               <a:buNone/>
             </a:pPr>
             <a:r>
@@ -17462,6 +17174,7 @@
         <a:solidFill>
           <a:srgbClr val="FFFFFF"/>
         </a:solidFill>
+        <a:effectLst/>
       </p:bgPr>
     </p:bg>
     <p:spTree>
@@ -17499,11 +17212,11 @@
           <a:bodyPr wrap="square" lIns="0" tIns="0" rIns="0" bIns="0" rtlCol="0" anchor="ctr"/>
           <a:lstStyle/>
           <a:p>
-            <a:pPr indent="0" marL="0">
-              <a:buNone/>
-            </a:pPr>
-            <a:r>
-              <a:rPr lang="en-US" sz="1200" b="1" spc="200" kern="0" dirty="0">
+            <a:pPr marL="0" indent="0">
+              <a:buNone/>
+            </a:pPr>
+            <a:r>
+              <a:rPr lang="en-US" sz="1200" b="1" kern="0" spc="200" dirty="0">
                 <a:solidFill>
                   <a:srgbClr val="0E7C86"/>
                 </a:solidFill>
@@ -17538,7 +17251,7 @@
           <a:bodyPr wrap="square" lIns="0" tIns="0" rIns="0" bIns="0" rtlCol="0" anchor="t"/>
           <a:lstStyle/>
           <a:p>
-            <a:pPr indent="0" marL="0">
+            <a:pPr marL="0" indent="0">
               <a:buNone/>
             </a:pPr>
             <a:r>
@@ -17577,7 +17290,7 @@
           <a:bodyPr wrap="square" lIns="0" tIns="0" rIns="0" bIns="0" rtlCol="0" anchor="ctr"/>
           <a:lstStyle/>
           <a:p>
-            <a:pPr indent="0" marL="0">
+            <a:pPr marL="0" indent="0">
               <a:buNone/>
             </a:pPr>
             <a:r>
@@ -17616,7 +17329,7 @@
           <a:bodyPr wrap="square" lIns="0" tIns="0" rIns="0" bIns="0" rtlCol="0" anchor="ctr"/>
           <a:lstStyle/>
           <a:p>
-            <a:pPr algn="r" indent="0" marL="0">
+            <a:pPr marL="0" indent="0" algn="r">
               <a:buNone/>
             </a:pPr>
             <a:r>
@@ -17702,7 +17415,7 @@
           <a:bodyPr wrap="square" lIns="0" tIns="0" rIns="0" bIns="0" rtlCol="0" anchor="ctr"/>
           <a:lstStyle/>
           <a:p>
-            <a:pPr algn="ctr" indent="0" marL="0">
+            <a:pPr marL="0" indent="0" algn="ctr">
               <a:buNone/>
             </a:pPr>
             <a:r>
@@ -17741,7 +17454,7 @@
           <a:bodyPr wrap="square" lIns="0" tIns="0" rIns="0" bIns="0" rtlCol="0" anchor="ctr"/>
           <a:lstStyle/>
           <a:p>
-            <a:pPr indent="0" marL="0">
+            <a:pPr marL="0" indent="0">
               <a:buNone/>
             </a:pPr>
             <a:r>
@@ -17827,7 +17540,7 @@
           <a:bodyPr wrap="square" lIns="0" tIns="0" rIns="0" bIns="0" rtlCol="0" anchor="ctr"/>
           <a:lstStyle/>
           <a:p>
-            <a:pPr algn="ctr" indent="0" marL="0">
+            <a:pPr marL="0" indent="0" algn="ctr">
               <a:buNone/>
             </a:pPr>
             <a:r>
@@ -17866,7 +17579,7 @@
           <a:bodyPr wrap="square" lIns="0" tIns="0" rIns="0" bIns="0" rtlCol="0" anchor="ctr"/>
           <a:lstStyle/>
           <a:p>
-            <a:pPr indent="0" marL="0">
+            <a:pPr marL="0" indent="0">
               <a:buNone/>
             </a:pPr>
             <a:r>
@@ -17952,7 +17665,7 @@
           <a:bodyPr wrap="square" lIns="0" tIns="0" rIns="0" bIns="0" rtlCol="0" anchor="ctr"/>
           <a:lstStyle/>
           <a:p>
-            <a:pPr algn="ctr" indent="0" marL="0">
+            <a:pPr marL="0" indent="0" algn="ctr">
               <a:buNone/>
             </a:pPr>
             <a:r>
@@ -17991,7 +17704,7 @@
           <a:bodyPr wrap="square" lIns="0" tIns="0" rIns="0" bIns="0" rtlCol="0" anchor="ctr"/>
           <a:lstStyle/>
           <a:p>
-            <a:pPr indent="0" marL="0">
+            <a:pPr marL="0" indent="0">
               <a:buNone/>
             </a:pPr>
             <a:r>
@@ -18077,7 +17790,7 @@
           <a:bodyPr wrap="square" lIns="0" tIns="0" rIns="0" bIns="0" rtlCol="0" anchor="ctr"/>
           <a:lstStyle/>
           <a:p>
-            <a:pPr algn="ctr" indent="0" marL="0">
+            <a:pPr marL="0" indent="0" algn="ctr">
               <a:buNone/>
             </a:pPr>
             <a:r>
@@ -18116,7 +17829,7 @@
           <a:bodyPr wrap="square" lIns="0" tIns="0" rIns="0" bIns="0" rtlCol="0" anchor="ctr"/>
           <a:lstStyle/>
           <a:p>
-            <a:pPr indent="0" marL="0">
+            <a:pPr marL="0" indent="0">
               <a:buNone/>
             </a:pPr>
             <a:r>
@@ -18202,7 +17915,7 @@
           <a:bodyPr wrap="square" lIns="0" tIns="0" rIns="0" bIns="0" rtlCol="0" anchor="ctr"/>
           <a:lstStyle/>
           <a:p>
-            <a:pPr algn="ctr" indent="0" marL="0">
+            <a:pPr marL="0" indent="0" algn="ctr">
               <a:buNone/>
             </a:pPr>
             <a:r>
@@ -18241,7 +17954,7 @@
           <a:bodyPr wrap="square" lIns="0" tIns="0" rIns="0" bIns="0" rtlCol="0" anchor="ctr"/>
           <a:lstStyle/>
           <a:p>
-            <a:pPr indent="0" marL="0">
+            <a:pPr marL="0" indent="0">
               <a:buNone/>
             </a:pPr>
             <a:r>
@@ -18327,7 +18040,7 @@
           <a:bodyPr wrap="square" lIns="0" tIns="0" rIns="0" bIns="0" rtlCol="0" anchor="ctr"/>
           <a:lstStyle/>
           <a:p>
-            <a:pPr algn="ctr" indent="0" marL="0">
+            <a:pPr marL="0" indent="0" algn="ctr">
               <a:buNone/>
             </a:pPr>
             <a:r>
@@ -18366,7 +18079,7 @@
           <a:bodyPr wrap="square" lIns="0" tIns="0" rIns="0" bIns="0" rtlCol="0" anchor="ctr"/>
           <a:lstStyle/>
           <a:p>
-            <a:pPr indent="0" marL="0">
+            <a:pPr marL="0" indent="0">
               <a:buNone/>
             </a:pPr>
             <a:r>
@@ -18452,7 +18165,7 @@
           <a:bodyPr wrap="square" lIns="0" tIns="0" rIns="0" bIns="0" rtlCol="0" anchor="ctr"/>
           <a:lstStyle/>
           <a:p>
-            <a:pPr algn="ctr" indent="0" marL="0">
+            <a:pPr marL="0" indent="0" algn="ctr">
               <a:buNone/>
             </a:pPr>
             <a:r>
@@ -18491,7 +18204,7 @@
           <a:bodyPr wrap="square" lIns="0" tIns="0" rIns="0" bIns="0" rtlCol="0" anchor="ctr"/>
           <a:lstStyle/>
           <a:p>
-            <a:pPr indent="0" marL="0">
+            <a:pPr marL="0" indent="0">
               <a:buNone/>
             </a:pPr>
             <a:r>
@@ -18577,7 +18290,7 @@
           <a:bodyPr wrap="square" lIns="0" tIns="0" rIns="0" bIns="0" rtlCol="0" anchor="ctr"/>
           <a:lstStyle/>
           <a:p>
-            <a:pPr algn="ctr" indent="0" marL="0">
+            <a:pPr marL="0" indent="0" algn="ctr">
               <a:buNone/>
             </a:pPr>
             <a:r>
@@ -18616,7 +18329,7 @@
           <a:bodyPr wrap="square" lIns="0" tIns="0" rIns="0" bIns="0" rtlCol="0" anchor="ctr"/>
           <a:lstStyle/>
           <a:p>
-            <a:pPr indent="0" marL="0">
+            <a:pPr marL="0" indent="0">
               <a:buNone/>
             </a:pPr>
             <a:r>
@@ -18650,6 +18363,7 @@
         <a:solidFill>
           <a:srgbClr val="FFFFFF"/>
         </a:solidFill>
+        <a:effectLst/>
       </p:bgPr>
     </p:bg>
     <p:spTree>
@@ -18687,11 +18401,11 @@
           <a:bodyPr wrap="square" lIns="0" tIns="0" rIns="0" bIns="0" rtlCol="0" anchor="ctr"/>
           <a:lstStyle/>
           <a:p>
-            <a:pPr indent="0" marL="0">
-              <a:buNone/>
-            </a:pPr>
-            <a:r>
-              <a:rPr lang="en-US" sz="1200" b="1" spc="200" kern="0" dirty="0">
+            <a:pPr marL="0" indent="0">
+              <a:buNone/>
+            </a:pPr>
+            <a:r>
+              <a:rPr lang="en-US" sz="1200" b="1" kern="0" spc="200" dirty="0">
                 <a:solidFill>
                   <a:srgbClr val="0E7C86"/>
                 </a:solidFill>
@@ -18726,7 +18440,7 @@
           <a:bodyPr wrap="square" lIns="0" tIns="0" rIns="0" bIns="0" rtlCol="0" anchor="t"/>
           <a:lstStyle/>
           <a:p>
-            <a:pPr indent="0" marL="0">
+            <a:pPr marL="0" indent="0">
               <a:buNone/>
             </a:pPr>
             <a:r>
@@ -18765,7 +18479,7 @@
           <a:bodyPr wrap="square" lIns="0" tIns="0" rIns="0" bIns="0" rtlCol="0" anchor="ctr"/>
           <a:lstStyle/>
           <a:p>
-            <a:pPr indent="0" marL="0">
+            <a:pPr marL="0" indent="0">
               <a:buNone/>
             </a:pPr>
             <a:r>
@@ -18804,7 +18518,7 @@
           <a:bodyPr wrap="square" lIns="0" tIns="0" rIns="0" bIns="0" rtlCol="0" anchor="ctr"/>
           <a:lstStyle/>
           <a:p>
-            <a:pPr algn="r" indent="0" marL="0">
+            <a:pPr marL="0" indent="0" algn="r">
               <a:buNone/>
             </a:pPr>
             <a:r>
@@ -18949,7 +18663,7 @@
           </a:solidFill>
           <a:ln/>
           <a:effectLst>
-            <a:outerShdw sx="100000" sy="100000" kx="0" ky="0" algn="bl" rotWithShape="0" blurRad="88900" dist="38100" dir="5400000">
+            <a:outerShdw blurRad="88900" dist="38100" dir="5400000" algn="bl" rotWithShape="0">
               <a:srgbClr val="000000">
                 <a:alpha val="12000"/>
               </a:srgbClr>
@@ -18978,7 +18692,7 @@
           <a:bodyPr wrap="square" lIns="0" tIns="0" rIns="0" bIns="0" rtlCol="0" anchor="ctr"/>
           <a:lstStyle/>
           <a:p>
-            <a:pPr algn="ctr" indent="0" marL="0">
+            <a:pPr marL="0" indent="0" algn="ctr">
               <a:buNone/>
             </a:pPr>
             <a:r>
@@ -19017,7 +18731,7 @@
           </a:solidFill>
           <a:ln/>
           <a:effectLst>
-            <a:outerShdw sx="100000" sy="100000" kx="0" ky="0" algn="bl" rotWithShape="0" blurRad="88900" dist="38100" dir="5400000">
+            <a:outerShdw blurRad="88900" dist="38100" dir="5400000" algn="bl" rotWithShape="0">
               <a:srgbClr val="000000">
                 <a:alpha val="12000"/>
               </a:srgbClr>
@@ -19046,7 +18760,7 @@
           <a:bodyPr wrap="square" lIns="0" tIns="0" rIns="0" bIns="0" rtlCol="0" anchor="ctr"/>
           <a:lstStyle/>
           <a:p>
-            <a:pPr algn="ctr" indent="0" marL="0">
+            <a:pPr marL="0" indent="0" algn="ctr">
               <a:buNone/>
             </a:pPr>
             <a:r>
@@ -19085,7 +18799,7 @@
           </a:solidFill>
           <a:ln/>
           <a:effectLst>
-            <a:outerShdw sx="100000" sy="100000" kx="0" ky="0" algn="bl" rotWithShape="0" blurRad="88900" dist="38100" dir="5400000">
+            <a:outerShdw blurRad="88900" dist="38100" dir="5400000" algn="bl" rotWithShape="0">
               <a:srgbClr val="000000">
                 <a:alpha val="12000"/>
               </a:srgbClr>
@@ -19114,7 +18828,7 @@
           <a:bodyPr wrap="square" lIns="0" tIns="0" rIns="0" bIns="0" rtlCol="0" anchor="ctr"/>
           <a:lstStyle/>
           <a:p>
-            <a:pPr algn="ctr" indent="0" marL="0">
+            <a:pPr marL="0" indent="0" algn="ctr">
               <a:buNone/>
             </a:pPr>
             <a:r>
@@ -19153,7 +18867,7 @@
           </a:solidFill>
           <a:ln/>
           <a:effectLst>
-            <a:outerShdw sx="100000" sy="100000" kx="0" ky="0" algn="bl" rotWithShape="0" blurRad="88900" dist="38100" dir="5400000">
+            <a:outerShdw blurRad="88900" dist="38100" dir="5400000" algn="bl" rotWithShape="0">
               <a:srgbClr val="000000">
                 <a:alpha val="12000"/>
               </a:srgbClr>
@@ -19182,7 +18896,7 @@
           <a:bodyPr wrap="square" lIns="0" tIns="0" rIns="0" bIns="0" rtlCol="0" anchor="ctr"/>
           <a:lstStyle/>
           <a:p>
-            <a:pPr algn="ctr" indent="0" marL="0">
+            <a:pPr marL="0" indent="0" algn="ctr">
               <a:buNone/>
             </a:pPr>
             <a:r>
@@ -19216,6 +18930,7 @@
         <a:solidFill>
           <a:srgbClr val="FFFFFF"/>
         </a:solidFill>
+        <a:effectLst/>
       </p:bgPr>
     </p:bg>
     <p:spTree>
@@ -19253,11 +18968,11 @@
           <a:bodyPr wrap="square" lIns="0" tIns="0" rIns="0" bIns="0" rtlCol="0" anchor="ctr"/>
           <a:lstStyle/>
           <a:p>
-            <a:pPr indent="0" marL="0">
-              <a:buNone/>
-            </a:pPr>
-            <a:r>
-              <a:rPr lang="en-US" sz="1200" b="1" spc="200" kern="0" dirty="0">
+            <a:pPr marL="0" indent="0">
+              <a:buNone/>
+            </a:pPr>
+            <a:r>
+              <a:rPr lang="en-US" sz="1200" b="1" kern="0" spc="200" dirty="0">
                 <a:solidFill>
                   <a:srgbClr val="0E7C86"/>
                 </a:solidFill>
@@ -19292,7 +19007,7 @@
           <a:bodyPr wrap="square" lIns="0" tIns="0" rIns="0" bIns="0" rtlCol="0" anchor="t"/>
           <a:lstStyle/>
           <a:p>
-            <a:pPr indent="0" marL="0">
+            <a:pPr marL="0" indent="0">
               <a:buNone/>
             </a:pPr>
             <a:r>
@@ -19331,7 +19046,7 @@
           <a:bodyPr wrap="square" lIns="0" tIns="0" rIns="0" bIns="0" rtlCol="0" anchor="ctr"/>
           <a:lstStyle/>
           <a:p>
-            <a:pPr indent="0" marL="0">
+            <a:pPr marL="0" indent="0">
               <a:buNone/>
             </a:pPr>
             <a:r>
@@ -19370,7 +19085,7 @@
           <a:bodyPr wrap="square" lIns="0" tIns="0" rIns="0" bIns="0" rtlCol="0" anchor="ctr"/>
           <a:lstStyle/>
           <a:p>
-            <a:pPr algn="r" indent="0" marL="0">
+            <a:pPr marL="0" indent="0" algn="r">
               <a:buNone/>
             </a:pPr>
             <a:r>
@@ -19409,7 +19124,7 @@
           </a:solidFill>
           <a:ln/>
           <a:effectLst>
-            <a:outerShdw sx="100000" sy="100000" kx="0" ky="0" algn="bl" rotWithShape="0" blurRad="88900" dist="38100" dir="5400000">
+            <a:outerShdw blurRad="88900" dist="38100" dir="5400000" algn="bl" rotWithShape="0">
               <a:srgbClr val="000000">
                 <a:alpha val="12000"/>
               </a:srgbClr>
@@ -19478,7 +19193,7 @@
           <a:bodyPr wrap="square" lIns="0" tIns="0" rIns="0" bIns="0" rtlCol="0" anchor="ctr"/>
           <a:lstStyle/>
           <a:p>
-            <a:pPr algn="ctr" indent="0" marL="0">
+            <a:pPr marL="0" indent="0" algn="ctr">
               <a:buNone/>
             </a:pPr>
             <a:r>
@@ -19517,7 +19232,7 @@
           <a:bodyPr wrap="square" lIns="0" tIns="0" rIns="0" bIns="0" rtlCol="0" anchor="t"/>
           <a:lstStyle/>
           <a:p>
-            <a:pPr algn="ctr" indent="0" marL="0">
+            <a:pPr marL="0" indent="0" algn="ctr">
               <a:buNone/>
             </a:pPr>
             <a:r>
@@ -19556,7 +19271,7 @@
           <a:bodyPr wrap="square" lIns="0" tIns="0" rIns="0" bIns="0" rtlCol="0" anchor="t"/>
           <a:lstStyle/>
           <a:p>
-            <a:pPr algn="ctr" indent="0" marL="0">
+            <a:pPr marL="0" indent="0" algn="ctr">
               <a:buNone/>
             </a:pPr>
             <a:r>
@@ -19595,7 +19310,7 @@
           <a:bodyPr wrap="square" lIns="0" tIns="0" rIns="0" bIns="0" rtlCol="0" anchor="ctr"/>
           <a:lstStyle/>
           <a:p>
-            <a:pPr algn="ctr" indent="0" marL="0">
+            <a:pPr marL="0" indent="0" algn="ctr">
               <a:buNone/>
             </a:pPr>
             <a:r>
@@ -19634,7 +19349,7 @@
           </a:solidFill>
           <a:ln/>
           <a:effectLst>
-            <a:outerShdw sx="100000" sy="100000" kx="0" ky="0" algn="bl" rotWithShape="0" blurRad="88900" dist="38100" dir="5400000">
+            <a:outerShdw blurRad="88900" dist="38100" dir="5400000" algn="bl" rotWithShape="0">
               <a:srgbClr val="000000">
                 <a:alpha val="12000"/>
               </a:srgbClr>
@@ -19703,7 +19418,7 @@
           <a:bodyPr wrap="square" lIns="0" tIns="0" rIns="0" bIns="0" rtlCol="0" anchor="ctr"/>
           <a:lstStyle/>
           <a:p>
-            <a:pPr algn="ctr" indent="0" marL="0">
+            <a:pPr marL="0" indent="0" algn="ctr">
               <a:buNone/>
             </a:pPr>
             <a:r>
@@ -19742,7 +19457,7 @@
           <a:bodyPr wrap="square" lIns="0" tIns="0" rIns="0" bIns="0" rtlCol="0" anchor="t"/>
           <a:lstStyle/>
           <a:p>
-            <a:pPr algn="ctr" indent="0" marL="0">
+            <a:pPr marL="0" indent="0" algn="ctr">
               <a:buNone/>
             </a:pPr>
             <a:r>
@@ -19781,7 +19496,7 @@
           <a:bodyPr wrap="square" lIns="0" tIns="0" rIns="0" bIns="0" rtlCol="0" anchor="t"/>
           <a:lstStyle/>
           <a:p>
-            <a:pPr algn="ctr" indent="0" marL="0">
+            <a:pPr marL="0" indent="0" algn="ctr">
               <a:buNone/>
             </a:pPr>
             <a:r>
@@ -19820,7 +19535,7 @@
           <a:bodyPr wrap="square" lIns="0" tIns="0" rIns="0" bIns="0" rtlCol="0" anchor="ctr"/>
           <a:lstStyle/>
           <a:p>
-            <a:pPr algn="ctr" indent="0" marL="0">
+            <a:pPr marL="0" indent="0" algn="ctr">
               <a:buNone/>
             </a:pPr>
             <a:r>
@@ -19859,7 +19574,7 @@
           </a:solidFill>
           <a:ln/>
           <a:effectLst>
-            <a:outerShdw sx="100000" sy="100000" kx="0" ky="0" algn="bl" rotWithShape="0" blurRad="88900" dist="38100" dir="5400000">
+            <a:outerShdw blurRad="88900" dist="38100" dir="5400000" algn="bl" rotWithShape="0">
               <a:srgbClr val="000000">
                 <a:alpha val="12000"/>
               </a:srgbClr>
@@ -19928,7 +19643,7 @@
           <a:bodyPr wrap="square" lIns="0" tIns="0" rIns="0" bIns="0" rtlCol="0" anchor="ctr"/>
           <a:lstStyle/>
           <a:p>
-            <a:pPr algn="ctr" indent="0" marL="0">
+            <a:pPr marL="0" indent="0" algn="ctr">
               <a:buNone/>
             </a:pPr>
             <a:r>
@@ -19967,7 +19682,7 @@
           <a:bodyPr wrap="square" lIns="0" tIns="0" rIns="0" bIns="0" rtlCol="0" anchor="t"/>
           <a:lstStyle/>
           <a:p>
-            <a:pPr algn="ctr" indent="0" marL="0">
+            <a:pPr marL="0" indent="0" algn="ctr">
               <a:buNone/>
             </a:pPr>
             <a:r>
@@ -20006,7 +19721,7 @@
           <a:bodyPr wrap="square" lIns="0" tIns="0" rIns="0" bIns="0" rtlCol="0" anchor="t"/>
           <a:lstStyle/>
           <a:p>
-            <a:pPr algn="ctr" indent="0" marL="0">
+            <a:pPr marL="0" indent="0" algn="ctr">
               <a:buNone/>
             </a:pPr>
             <a:r>
@@ -20045,7 +19760,7 @@
           <a:bodyPr wrap="square" lIns="0" tIns="0" rIns="0" bIns="0" rtlCol="0" anchor="ctr"/>
           <a:lstStyle/>
           <a:p>
-            <a:pPr algn="ctr" indent="0" marL="0">
+            <a:pPr marL="0" indent="0" algn="ctr">
               <a:buNone/>
             </a:pPr>
             <a:r>
@@ -20084,7 +19799,7 @@
           </a:solidFill>
           <a:ln/>
           <a:effectLst>
-            <a:outerShdw sx="100000" sy="100000" kx="0" ky="0" algn="bl" rotWithShape="0" blurRad="88900" dist="38100" dir="5400000">
+            <a:outerShdw blurRad="88900" dist="38100" dir="5400000" algn="bl" rotWithShape="0">
               <a:srgbClr val="000000">
                 <a:alpha val="12000"/>
               </a:srgbClr>
@@ -20153,7 +19868,7 @@
           <a:bodyPr wrap="square" lIns="0" tIns="0" rIns="0" bIns="0" rtlCol="0" anchor="ctr"/>
           <a:lstStyle/>
           <a:p>
-            <a:pPr algn="ctr" indent="0" marL="0">
+            <a:pPr marL="0" indent="0" algn="ctr">
               <a:buNone/>
             </a:pPr>
             <a:r>
@@ -20192,7 +19907,7 @@
           <a:bodyPr wrap="square" lIns="0" tIns="0" rIns="0" bIns="0" rtlCol="0" anchor="t"/>
           <a:lstStyle/>
           <a:p>
-            <a:pPr algn="ctr" indent="0" marL="0">
+            <a:pPr marL="0" indent="0" algn="ctr">
               <a:buNone/>
             </a:pPr>
             <a:r>
@@ -20231,7 +19946,7 @@
           <a:bodyPr wrap="square" lIns="0" tIns="0" rIns="0" bIns="0" rtlCol="0" anchor="t"/>
           <a:lstStyle/>
           <a:p>
-            <a:pPr algn="ctr" indent="0" marL="0">
+            <a:pPr marL="0" indent="0" algn="ctr">
               <a:buNone/>
             </a:pPr>
             <a:r>
@@ -20270,7 +19985,7 @@
           <a:bodyPr wrap="square" lIns="0" tIns="0" rIns="0" bIns="0" rtlCol="0" anchor="ctr"/>
           <a:lstStyle/>
           <a:p>
-            <a:pPr algn="ctr" indent="0" marL="0">
+            <a:pPr marL="0" indent="0" algn="ctr">
               <a:buNone/>
             </a:pPr>
             <a:r>
@@ -20309,7 +20024,7 @@
           </a:solidFill>
           <a:ln/>
           <a:effectLst>
-            <a:outerShdw sx="100000" sy="100000" kx="0" ky="0" algn="bl" rotWithShape="0" blurRad="88900" dist="38100" dir="5400000">
+            <a:outerShdw blurRad="88900" dist="38100" dir="5400000" algn="bl" rotWithShape="0">
               <a:srgbClr val="000000">
                 <a:alpha val="12000"/>
               </a:srgbClr>
@@ -20378,7 +20093,7 @@
           <a:bodyPr wrap="square" lIns="0" tIns="0" rIns="0" bIns="0" rtlCol="0" anchor="ctr"/>
           <a:lstStyle/>
           <a:p>
-            <a:pPr algn="ctr" indent="0" marL="0">
+            <a:pPr marL="0" indent="0" algn="ctr">
               <a:buNone/>
             </a:pPr>
             <a:r>
@@ -20417,7 +20132,7 @@
           <a:bodyPr wrap="square" lIns="0" tIns="0" rIns="0" bIns="0" rtlCol="0" anchor="t"/>
           <a:lstStyle/>
           <a:p>
-            <a:pPr algn="ctr" indent="0" marL="0">
+            <a:pPr marL="0" indent="0" algn="ctr">
               <a:buNone/>
             </a:pPr>
             <a:r>
@@ -20456,7 +20171,7 @@
           <a:bodyPr wrap="square" lIns="0" tIns="0" rIns="0" bIns="0" rtlCol="0" anchor="t"/>
           <a:lstStyle/>
           <a:p>
-            <a:pPr algn="ctr" indent="0" marL="0">
+            <a:pPr marL="0" indent="0" algn="ctr">
               <a:buNone/>
             </a:pPr>
             <a:r>
@@ -20495,7 +20210,7 @@
           <a:bodyPr wrap="square" lIns="0" tIns="0" rIns="0" bIns="0" rtlCol="0" anchor="ctr"/>
           <a:lstStyle/>
           <a:p>
-            <a:pPr algn="ctr" indent="0" marL="0">
+            <a:pPr marL="0" indent="0" algn="ctr">
               <a:buNone/>
             </a:pPr>
             <a:r>
@@ -20534,7 +20249,7 @@
           <a:bodyPr wrap="square" lIns="0" tIns="0" rIns="0" bIns="0" rtlCol="0" anchor="ctr"/>
           <a:lstStyle/>
           <a:p>
-            <a:pPr algn="ctr" indent="0" marL="0">
+            <a:pPr marL="0" indent="0" algn="ctr">
               <a:buNone/>
             </a:pPr>
             <a:r>
@@ -20568,6 +20283,7 @@
         <a:solidFill>
           <a:srgbClr val="FFFFFF"/>
         </a:solidFill>
+        <a:effectLst/>
       </p:bgPr>
     </p:bg>
     <p:spTree>
@@ -20605,11 +20321,11 @@
           <a:bodyPr wrap="square" lIns="0" tIns="0" rIns="0" bIns="0" rtlCol="0" anchor="ctr"/>
           <a:lstStyle/>
           <a:p>
-            <a:pPr indent="0" marL="0">
-              <a:buNone/>
-            </a:pPr>
-            <a:r>
-              <a:rPr lang="en-US" sz="1200" b="1" spc="200" kern="0" dirty="0">
+            <a:pPr marL="0" indent="0">
+              <a:buNone/>
+            </a:pPr>
+            <a:r>
+              <a:rPr lang="en-US" sz="1200" b="1" kern="0" spc="200" dirty="0">
                 <a:solidFill>
                   <a:srgbClr val="0E7C86"/>
                 </a:solidFill>
@@ -20644,7 +20360,7 @@
           <a:bodyPr wrap="square" lIns="0" tIns="0" rIns="0" bIns="0" rtlCol="0" anchor="t"/>
           <a:lstStyle/>
           <a:p>
-            <a:pPr indent="0" marL="0">
+            <a:pPr marL="0" indent="0">
               <a:buNone/>
             </a:pPr>
             <a:r>
@@ -20683,7 +20399,7 @@
           <a:bodyPr wrap="square" lIns="0" tIns="0" rIns="0" bIns="0" rtlCol="0" anchor="ctr"/>
           <a:lstStyle/>
           <a:p>
-            <a:pPr indent="0" marL="0">
+            <a:pPr marL="0" indent="0">
               <a:buNone/>
             </a:pPr>
             <a:r>
@@ -20722,7 +20438,7 @@
           <a:bodyPr wrap="square" lIns="0" tIns="0" rIns="0" bIns="0" rtlCol="0" anchor="ctr"/>
           <a:lstStyle/>
           <a:p>
-            <a:pPr algn="r" indent="0" marL="0">
+            <a:pPr marL="0" indent="0" algn="r">
               <a:buNone/>
             </a:pPr>
             <a:r>
@@ -20896,7 +20612,7 @@
           <a:bodyPr wrap="square" lIns="0" tIns="0" rIns="0" bIns="0" rtlCol="0" anchor="ctr"/>
           <a:lstStyle/>
           <a:p>
-            <a:pPr algn="ctr" indent="0" marL="0">
+            <a:pPr marL="0" indent="0" algn="ctr">
               <a:buNone/>
             </a:pPr>
             <a:r>
@@ -20935,7 +20651,7 @@
           </a:solidFill>
           <a:ln/>
           <a:effectLst>
-            <a:outerShdw sx="100000" sy="100000" kx="0" ky="0" algn="bl" rotWithShape="0" blurRad="88900" dist="38100" dir="5400000">
+            <a:outerShdw blurRad="88900" dist="38100" dir="5400000" algn="bl" rotWithShape="0">
               <a:srgbClr val="000000">
                 <a:alpha val="12000"/>
               </a:srgbClr>
@@ -20964,7 +20680,7 @@
           <a:bodyPr wrap="square" lIns="0" tIns="0" rIns="0" bIns="0" rtlCol="0" anchor="ctr"/>
           <a:lstStyle/>
           <a:p>
-            <a:pPr algn="ctr" indent="0" marL="0">
+            <a:pPr marL="0" indent="0" algn="ctr">
               <a:buNone/>
             </a:pPr>
             <a:r>
@@ -21003,7 +20719,7 @@
           </a:solidFill>
           <a:ln/>
           <a:effectLst>
-            <a:outerShdw sx="100000" sy="100000" kx="0" ky="0" algn="bl" rotWithShape="0" blurRad="88900" dist="38100" dir="5400000">
+            <a:outerShdw blurRad="88900" dist="38100" dir="5400000" algn="bl" rotWithShape="0">
               <a:srgbClr val="000000">
                 <a:alpha val="12000"/>
               </a:srgbClr>
@@ -21032,7 +20748,7 @@
           <a:bodyPr wrap="square" lIns="0" tIns="0" rIns="0" bIns="0" rtlCol="0" anchor="ctr"/>
           <a:lstStyle/>
           <a:p>
-            <a:pPr algn="ctr" indent="0" marL="0">
+            <a:pPr marL="0" indent="0" algn="ctr">
               <a:buNone/>
             </a:pPr>
             <a:r>
@@ -21071,7 +20787,7 @@
           </a:solidFill>
           <a:ln/>
           <a:effectLst>
-            <a:outerShdw sx="100000" sy="100000" kx="0" ky="0" algn="bl" rotWithShape="0" blurRad="88900" dist="38100" dir="5400000">
+            <a:outerShdw blurRad="88900" dist="38100" dir="5400000" algn="bl" rotWithShape="0">
               <a:srgbClr val="000000">
                 <a:alpha val="12000"/>
               </a:srgbClr>
@@ -21100,7 +20816,7 @@
           <a:bodyPr wrap="square" lIns="0" tIns="0" rIns="0" bIns="0" rtlCol="0" anchor="ctr"/>
           <a:lstStyle/>
           <a:p>
-            <a:pPr algn="ctr" indent="0" marL="0">
+            <a:pPr marL="0" indent="0" algn="ctr">
               <a:buNone/>
             </a:pPr>
             <a:r>
@@ -21139,7 +20855,7 @@
           <a:bodyPr wrap="square" lIns="0" tIns="0" rIns="0" bIns="0" rtlCol="0" anchor="ctr"/>
           <a:lstStyle/>
           <a:p>
-            <a:pPr algn="ctr" indent="0" marL="0">
+            <a:pPr marL="0" indent="0" algn="ctr">
               <a:buNone/>
             </a:pPr>
             <a:r>
@@ -21173,6 +20889,7 @@
         <a:solidFill>
           <a:srgbClr val="FFFFFF"/>
         </a:solidFill>
+        <a:effectLst/>
       </p:bgPr>
     </p:bg>
     <p:spTree>
@@ -21210,11 +20927,11 @@
           <a:bodyPr wrap="square" lIns="0" tIns="0" rIns="0" bIns="0" rtlCol="0" anchor="ctr"/>
           <a:lstStyle/>
           <a:p>
-            <a:pPr indent="0" marL="0">
-              <a:buNone/>
-            </a:pPr>
-            <a:r>
-              <a:rPr lang="en-US" sz="1200" b="1" spc="200" kern="0" dirty="0">
+            <a:pPr marL="0" indent="0">
+              <a:buNone/>
+            </a:pPr>
+            <a:r>
+              <a:rPr lang="en-US" sz="1200" b="1" kern="0" spc="200" dirty="0">
                 <a:solidFill>
                   <a:srgbClr val="0E7C86"/>
                 </a:solidFill>
@@ -21249,7 +20966,7 @@
           <a:bodyPr wrap="square" lIns="0" tIns="0" rIns="0" bIns="0" rtlCol="0" anchor="t"/>
           <a:lstStyle/>
           <a:p>
-            <a:pPr indent="0" marL="0">
+            <a:pPr marL="0" indent="0">
               <a:buNone/>
             </a:pPr>
             <a:r>
@@ -21288,7 +21005,7 @@
           <a:bodyPr wrap="square" lIns="0" tIns="0" rIns="0" bIns="0" rtlCol="0" anchor="ctr"/>
           <a:lstStyle/>
           <a:p>
-            <a:pPr indent="0" marL="0">
+            <a:pPr marL="0" indent="0">
               <a:buNone/>
             </a:pPr>
             <a:r>
@@ -21327,7 +21044,7 @@
           <a:bodyPr wrap="square" lIns="0" tIns="0" rIns="0" bIns="0" rtlCol="0" anchor="ctr"/>
           <a:lstStyle/>
           <a:p>
-            <a:pPr algn="r" indent="0" marL="0">
+            <a:pPr marL="0" indent="0" algn="r">
               <a:buNone/>
             </a:pPr>
             <a:r>
@@ -21472,7 +21189,7 @@
           </a:solidFill>
           <a:ln/>
           <a:effectLst>
-            <a:outerShdw sx="100000" sy="100000" kx="0" ky="0" algn="bl" rotWithShape="0" blurRad="88900" dist="38100" dir="5400000">
+            <a:outerShdw blurRad="88900" dist="38100" dir="5400000" algn="bl" rotWithShape="0">
               <a:srgbClr val="000000">
                 <a:alpha val="12000"/>
               </a:srgbClr>
@@ -21501,7 +21218,7 @@
           <a:bodyPr wrap="square" lIns="0" tIns="0" rIns="0" bIns="0" rtlCol="0" anchor="ctr"/>
           <a:lstStyle/>
           <a:p>
-            <a:pPr algn="ctr" indent="0" marL="0">
+            <a:pPr marL="0" indent="0" algn="ctr">
               <a:buNone/>
             </a:pPr>
             <a:r>
@@ -21518,7 +21235,7 @@
             <a:endParaRPr lang="en-US" sz="1200" dirty="0"/>
           </a:p>
           <a:p>
-            <a:pPr algn="ctr" indent="0" marL="0">
+            <a:pPr marL="0" indent="0" algn="ctr">
               <a:buNone/>
             </a:pPr>
             <a:r>
@@ -21581,7 +21298,7 @@
           </a:solidFill>
           <a:ln/>
           <a:effectLst>
-            <a:outerShdw sx="100000" sy="100000" kx="0" ky="0" algn="bl" rotWithShape="0" blurRad="88900" dist="38100" dir="5400000">
+            <a:outerShdw blurRad="88900" dist="38100" dir="5400000" algn="bl" rotWithShape="0">
               <a:srgbClr val="000000">
                 <a:alpha val="12000"/>
               </a:srgbClr>
@@ -21610,7 +21327,7 @@
           <a:bodyPr wrap="square" lIns="0" tIns="0" rIns="0" bIns="0" rtlCol="0" anchor="ctr"/>
           <a:lstStyle/>
           <a:p>
-            <a:pPr algn="ctr" indent="0" marL="0">
+            <a:pPr marL="0" indent="0" algn="ctr">
               <a:buNone/>
             </a:pPr>
             <a:r>
@@ -21627,7 +21344,7 @@
             <a:endParaRPr lang="en-US" sz="1200" dirty="0"/>
           </a:p>
           <a:p>
-            <a:pPr algn="ctr" indent="0" marL="0">
+            <a:pPr marL="0" indent="0" algn="ctr">
               <a:buNone/>
             </a:pPr>
             <a:r>
@@ -21647,7 +21364,7 @@
       </p:sp>
       <p:graphicFrame>
         <p:nvGraphicFramePr>
-          <p:cNvPr id="13" name="Chart 0" descr=""/>
+          <p:cNvPr id="13" name="Chart 0"/>
           <p:cNvGraphicFramePr/>
           <p:nvPr/>
         </p:nvGraphicFramePr>
@@ -21655,9 +21372,9 @@
           <a:off x="7132320" y="3749040"/>
           <a:ext cx="4023360" cy="1828800"/>
         </p:xfrm>
-        <a:graphic xmlns:a="http://schemas.openxmlformats.org/drawingml/2006/main">
+        <a:graphic>
           <a:graphicData uri="http://schemas.openxmlformats.org/drawingml/2006/chart">
-            <c:chart xmlns:c="http://schemas.openxmlformats.org/drawingml/2006/chart" r:id="rId1"/>
+            <c:chart xmlns:c="http://schemas.openxmlformats.org/drawingml/2006/chart" xmlns:r="http://schemas.openxmlformats.org/officeDocument/2006/relationships" r:id="rId3"/>
           </a:graphicData>
         </a:graphic>
       </p:graphicFrame>
@@ -21682,7 +21399,7 @@
           <a:bodyPr wrap="square" lIns="0" tIns="0" rIns="0" bIns="0" rtlCol="0" anchor="ctr"/>
           <a:lstStyle/>
           <a:p>
-            <a:pPr algn="ctr" indent="0" marL="0">
+            <a:pPr marL="0" indent="0" algn="ctr">
               <a:buNone/>
             </a:pPr>
             <a:r>
@@ -21716,6 +21433,7 @@
         <a:solidFill>
           <a:srgbClr val="FFFFFF"/>
         </a:solidFill>
+        <a:effectLst/>
       </p:bgPr>
     </p:bg>
     <p:spTree>
@@ -21753,11 +21471,11 @@
           <a:bodyPr wrap="square" lIns="0" tIns="0" rIns="0" bIns="0" rtlCol="0" anchor="ctr"/>
           <a:lstStyle/>
           <a:p>
-            <a:pPr indent="0" marL="0">
-              <a:buNone/>
-            </a:pPr>
-            <a:r>
-              <a:rPr lang="en-US" sz="1200" b="1" spc="200" kern="0" dirty="0">
+            <a:pPr marL="0" indent="0">
+              <a:buNone/>
+            </a:pPr>
+            <a:r>
+              <a:rPr lang="en-US" sz="1200" b="1" kern="0" spc="200" dirty="0">
                 <a:solidFill>
                   <a:srgbClr val="0E7C86"/>
                 </a:solidFill>
@@ -21792,7 +21510,7 @@
           <a:bodyPr wrap="square" lIns="0" tIns="0" rIns="0" bIns="0" rtlCol="0" anchor="t"/>
           <a:lstStyle/>
           <a:p>
-            <a:pPr indent="0" marL="0">
+            <a:pPr marL="0" indent="0">
               <a:buNone/>
             </a:pPr>
             <a:r>
@@ -21831,7 +21549,7 @@
           <a:bodyPr wrap="square" lIns="0" tIns="0" rIns="0" bIns="0" rtlCol="0" anchor="ctr"/>
           <a:lstStyle/>
           <a:p>
-            <a:pPr indent="0" marL="0">
+            <a:pPr marL="0" indent="0">
               <a:buNone/>
             </a:pPr>
             <a:r>
@@ -21870,7 +21588,7 @@
           <a:bodyPr wrap="square" lIns="0" tIns="0" rIns="0" bIns="0" rtlCol="0" anchor="ctr"/>
           <a:lstStyle/>
           <a:p>
-            <a:pPr algn="r" indent="0" marL="0">
+            <a:pPr marL="0" indent="0" algn="r">
               <a:buNone/>
             </a:pPr>
             <a:r>
@@ -22015,7 +21733,7 @@
           </a:solidFill>
           <a:ln/>
           <a:effectLst>
-            <a:outerShdw sx="100000" sy="100000" kx="0" ky="0" algn="bl" rotWithShape="0" blurRad="88900" dist="38100" dir="5400000">
+            <a:outerShdw blurRad="88900" dist="38100" dir="5400000" algn="bl" rotWithShape="0">
               <a:srgbClr val="000000">
                 <a:alpha val="12000"/>
               </a:srgbClr>
@@ -22044,7 +21762,7 @@
           <a:bodyPr wrap="square" lIns="0" tIns="0" rIns="0" bIns="0" rtlCol="0" anchor="ctr"/>
           <a:lstStyle/>
           <a:p>
-            <a:pPr indent="0" marL="0">
+            <a:pPr marL="0" indent="0">
               <a:buNone/>
             </a:pPr>
             <a:r>
@@ -22083,7 +21801,7 @@
           <a:bodyPr wrap="square" lIns="0" tIns="0" rIns="0" bIns="0" rtlCol="0" anchor="ctr"/>
           <a:lstStyle/>
           <a:p>
-            <a:pPr indent="0" marL="0">
+            <a:pPr marL="0" indent="0">
               <a:buNone/>
             </a:pPr>
             <a:r>
@@ -22122,7 +21840,7 @@
           </a:solidFill>
           <a:ln/>
           <a:effectLst>
-            <a:outerShdw sx="100000" sy="100000" kx="0" ky="0" algn="bl" rotWithShape="0" blurRad="88900" dist="38100" dir="5400000">
+            <a:outerShdw blurRad="88900" dist="38100" dir="5400000" algn="bl" rotWithShape="0">
               <a:srgbClr val="000000">
                 <a:alpha val="12000"/>
               </a:srgbClr>
@@ -22151,7 +21869,7 @@
           <a:bodyPr wrap="square" lIns="0" tIns="0" rIns="0" bIns="0" rtlCol="0" anchor="ctr"/>
           <a:lstStyle/>
           <a:p>
-            <a:pPr indent="0" marL="0">
+            <a:pPr marL="0" indent="0">
               <a:buNone/>
             </a:pPr>
             <a:r>
@@ -22190,7 +21908,7 @@
           <a:bodyPr wrap="square" lIns="0" tIns="0" rIns="0" bIns="0" rtlCol="0" anchor="ctr"/>
           <a:lstStyle/>
           <a:p>
-            <a:pPr indent="0" marL="0">
+            <a:pPr marL="0" indent="0">
               <a:buNone/>
             </a:pPr>
             <a:r>
@@ -22224,6 +21942,7 @@
         <a:solidFill>
           <a:srgbClr val="FFFFFF"/>
         </a:solidFill>
+        <a:effectLst/>
       </p:bgPr>
     </p:bg>
     <p:spTree>
@@ -22261,11 +21980,11 @@
           <a:bodyPr wrap="square" lIns="0" tIns="0" rIns="0" bIns="0" rtlCol="0" anchor="ctr"/>
           <a:lstStyle/>
           <a:p>
-            <a:pPr indent="0" marL="0">
-              <a:buNone/>
-            </a:pPr>
-            <a:r>
-              <a:rPr lang="en-US" sz="1200" b="1" spc="200" kern="0" dirty="0">
+            <a:pPr marL="0" indent="0">
+              <a:buNone/>
+            </a:pPr>
+            <a:r>
+              <a:rPr lang="en-US" sz="1200" b="1" kern="0" spc="200" dirty="0">
                 <a:solidFill>
                   <a:srgbClr val="0E7C86"/>
                 </a:solidFill>
@@ -22300,7 +22019,7 @@
           <a:bodyPr wrap="square" lIns="0" tIns="0" rIns="0" bIns="0" rtlCol="0" anchor="t"/>
           <a:lstStyle/>
           <a:p>
-            <a:pPr indent="0" marL="0">
+            <a:pPr marL="0" indent="0">
               <a:buNone/>
             </a:pPr>
             <a:r>
@@ -22339,7 +22058,7 @@
           <a:bodyPr wrap="square" lIns="0" tIns="0" rIns="0" bIns="0" rtlCol="0" anchor="ctr"/>
           <a:lstStyle/>
           <a:p>
-            <a:pPr indent="0" marL="0">
+            <a:pPr marL="0" indent="0">
               <a:buNone/>
             </a:pPr>
             <a:r>
@@ -22378,7 +22097,7 @@
           <a:bodyPr wrap="square" lIns="0" tIns="0" rIns="0" bIns="0" rtlCol="0" anchor="ctr"/>
           <a:lstStyle/>
           <a:p>
-            <a:pPr algn="r" indent="0" marL="0">
+            <a:pPr marL="0" indent="0" algn="r">
               <a:buNone/>
             </a:pPr>
             <a:r>
@@ -22529,1330 +22248,484 @@
       </p:sp>
       <p:sp>
         <p:nvSpPr>
-          <p:cNvPr id="9" name="Shape 6"/>
-          <p:cNvSpPr/>
-          <p:nvPr/>
-        </p:nvSpPr>
-        <p:spPr>
-          <a:xfrm>
-            <a:off x="6949440" y="4599783"/>
-            <a:ext cx="146957" cy="-113943"/>
-          </a:xfrm>
-          <a:prstGeom prst="line">
-            <a:avLst/>
-          </a:prstGeom>
-          <a:noFill/>
-          <a:ln w="25400">
+          <p:cNvPr id="601" name="dist"/>
+          <p:cNvSpPr/>
+          <p:nvPr/>
+        </p:nvSpPr>
+        <p:spPr>
+          <a:xfrm>
+            <a:off x="6875120" y="2639693"/>
+            <a:ext cx="4313440" cy="2280804"/>
+          </a:xfrm>
+          <a:custGeom>
+            <a:avLst/>
+            <a:gdLst/>
+            <a:ahLst/>
+            <a:cxnLst/>
+            <a:rect l="0" t="0" r="0" b="0"/>
+            <a:pathLst>
+              <a:path w="4313440" h="2280804">
+                <a:moveTo>
+                  <a:pt x="0" y="2106006"/>
+                </a:moveTo>
+                <a:lnTo>
+                  <a:pt x="71890" y="2057287"/>
+                </a:lnTo>
+                <a:lnTo>
+                  <a:pt x="143781" y="1998509"/>
+                </a:lnTo>
+                <a:lnTo>
+                  <a:pt x="215672" y="1928660"/>
+                </a:lnTo>
+                <a:lnTo>
+                  <a:pt x="287562" y="1846928"/>
+                </a:lnTo>
+                <a:lnTo>
+                  <a:pt x="359453" y="1752795"/>
+                </a:lnTo>
+                <a:lnTo>
+                  <a:pt x="431344" y="1646132"/>
+                </a:lnTo>
+                <a:lnTo>
+                  <a:pt x="503234" y="1527289"/>
+                </a:lnTo>
+                <a:lnTo>
+                  <a:pt x="575125" y="1397176"/>
+                </a:lnTo>
+                <a:lnTo>
+                  <a:pt x="647016" y="1257316"/>
+                </a:lnTo>
+                <a:lnTo>
+                  <a:pt x="718906" y="1109870"/>
+                </a:lnTo>
+                <a:lnTo>
+                  <a:pt x="790797" y="957624"/>
+                </a:lnTo>
+                <a:lnTo>
+                  <a:pt x="862688" y="803933"/>
+                </a:lnTo>
+                <a:lnTo>
+                  <a:pt x="934578" y="652619"/>
+                </a:lnTo>
+                <a:lnTo>
+                  <a:pt x="1006469" y="507830"/>
+                </a:lnTo>
+                <a:lnTo>
+                  <a:pt x="1078360" y="373858"/>
+                </a:lnTo>
+                <a:lnTo>
+                  <a:pt x="1150250" y="254930"/>
+                </a:lnTo>
+                <a:lnTo>
+                  <a:pt x="1222141" y="154994"/>
+                </a:lnTo>
+                <a:lnTo>
+                  <a:pt x="1294032" y="77501"/>
+                </a:lnTo>
+                <a:lnTo>
+                  <a:pt x="1365922" y="25204"/>
+                </a:lnTo>
+                <a:lnTo>
+                  <a:pt x="1437813" y="0"/>
+                </a:lnTo>
+                <a:lnTo>
+                  <a:pt x="1509704" y="2815"/>
+                </a:lnTo>
+                <a:lnTo>
+                  <a:pt x="1581594" y="33543"/>
+                </a:lnTo>
+                <a:lnTo>
+                  <a:pt x="1653485" y="91060"/>
+                </a:lnTo>
+                <a:lnTo>
+                  <a:pt x="1725376" y="173287"/>
+                </a:lnTo>
+                <a:lnTo>
+                  <a:pt x="1797266" y="277316"/>
+                </a:lnTo>
+                <a:lnTo>
+                  <a:pt x="1869157" y="399581"/>
+                </a:lnTo>
+                <a:lnTo>
+                  <a:pt x="1941048" y="536061"/>
+                </a:lnTo>
+                <a:lnTo>
+                  <a:pt x="2012938" y="682496"/>
+                </a:lnTo>
+                <a:lnTo>
+                  <a:pt x="2084829" y="834609"/>
+                </a:lnTo>
+                <a:lnTo>
+                  <a:pt x="2156720" y="988303"/>
+                </a:lnTo>
+                <a:lnTo>
+                  <a:pt x="2228610" y="1139841"/>
+                </a:lnTo>
+                <a:lnTo>
+                  <a:pt x="2300501" y="1285973"/>
+                </a:lnTo>
+                <a:lnTo>
+                  <a:pt x="2372392" y="1424036"/>
+                </a:lnTo>
+                <a:lnTo>
+                  <a:pt x="2444282" y="1551997"/>
+                </a:lnTo>
+                <a:lnTo>
+                  <a:pt x="2516173" y="1668458"/>
+                </a:lnTo>
+                <a:lnTo>
+                  <a:pt x="2588064" y="1772627"/>
+                </a:lnTo>
+                <a:lnTo>
+                  <a:pt x="2659954" y="1864255"/>
+                </a:lnTo>
+                <a:lnTo>
+                  <a:pt x="2731845" y="1943558"/>
+                </a:lnTo>
+                <a:lnTo>
+                  <a:pt x="2803736" y="2011120"/>
+                </a:lnTo>
+                <a:lnTo>
+                  <a:pt x="2875626" y="2067801"/>
+                </a:lnTo>
+                <a:lnTo>
+                  <a:pt x="2947517" y="2114641"/>
+                </a:lnTo>
+                <a:lnTo>
+                  <a:pt x="3019408" y="2152780"/>
+                </a:lnTo>
+                <a:lnTo>
+                  <a:pt x="3091298" y="2183384"/>
+                </a:lnTo>
+                <a:lnTo>
+                  <a:pt x="3163189" y="2207592"/>
+                </a:lnTo>
+                <a:lnTo>
+                  <a:pt x="3235080" y="2226470"/>
+                </a:lnTo>
+                <a:lnTo>
+                  <a:pt x="3306970" y="2240986"/>
+                </a:lnTo>
+                <a:lnTo>
+                  <a:pt x="3378861" y="2251993"/>
+                </a:lnTo>
+                <a:lnTo>
+                  <a:pt x="3450752" y="2260226"/>
+                </a:lnTo>
+                <a:lnTo>
+                  <a:pt x="3522642" y="2266300"/>
+                </a:lnTo>
+                <a:lnTo>
+                  <a:pt x="3594533" y="2270720"/>
+                </a:lnTo>
+                <a:lnTo>
+                  <a:pt x="3666424" y="2273894"/>
+                </a:lnTo>
+                <a:lnTo>
+                  <a:pt x="3738314" y="2276143"/>
+                </a:lnTo>
+                <a:lnTo>
+                  <a:pt x="3810205" y="2277715"/>
+                </a:lnTo>
+                <a:lnTo>
+                  <a:pt x="3882096" y="2278799"/>
+                </a:lnTo>
+                <a:lnTo>
+                  <a:pt x="3953986" y="2279537"/>
+                </a:lnTo>
+                <a:lnTo>
+                  <a:pt x="4025877" y="2280032"/>
+                </a:lnTo>
+                <a:lnTo>
+                  <a:pt x="4097768" y="2280361"/>
+                </a:lnTo>
+                <a:lnTo>
+                  <a:pt x="4169658" y="2280576"/>
+                </a:lnTo>
+                <a:lnTo>
+                  <a:pt x="4241549" y="2280715"/>
+                </a:lnTo>
+                <a:lnTo>
+                  <a:pt x="4313440" y="2280804"/>
+                </a:lnTo>
+              </a:path>
+            </a:pathLst>
+          </a:custGeom>
+          <a:noFill/>
+          <a:ln w="28575" cap="rnd">
             <a:solidFill>
               <a:srgbClr val="0E7C86"/>
             </a:solidFill>
-            <a:prstDash val="solid"/>
+            <a:round/>
           </a:ln>
         </p:spPr>
-      </p:sp>
-      <p:sp>
-        <p:nvSpPr>
-          <p:cNvPr id="10" name="Shape 7"/>
-          <p:cNvSpPr/>
-          <p:nvPr/>
-        </p:nvSpPr>
-        <p:spPr>
-          <a:xfrm>
-            <a:off x="7096397" y="4485840"/>
-            <a:ext cx="146957" cy="-154616"/>
-          </a:xfrm>
-          <a:prstGeom prst="line">
-            <a:avLst/>
-          </a:prstGeom>
-          <a:noFill/>
-          <a:ln w="25400">
-            <a:solidFill>
-              <a:srgbClr val="0E7C86"/>
-            </a:solidFill>
-            <a:prstDash val="solid"/>
-          </a:ln>
-        </p:spPr>
-      </p:sp>
-      <p:sp>
-        <p:nvSpPr>
-          <p:cNvPr id="11" name="Shape 8"/>
-          <p:cNvSpPr/>
-          <p:nvPr/>
-        </p:nvSpPr>
-        <p:spPr>
-          <a:xfrm>
-            <a:off x="7243354" y="4331224"/>
-            <a:ext cx="146957" cy="-196546"/>
-          </a:xfrm>
-          <a:prstGeom prst="line">
-            <a:avLst/>
-          </a:prstGeom>
-          <a:noFill/>
-          <a:ln w="25400">
-            <a:solidFill>
-              <a:srgbClr val="0E7C86"/>
-            </a:solidFill>
-            <a:prstDash val="solid"/>
-          </a:ln>
-        </p:spPr>
-      </p:sp>
-      <p:sp>
-        <p:nvSpPr>
-          <p:cNvPr id="12" name="Shape 9"/>
-          <p:cNvSpPr/>
-          <p:nvPr/>
-        </p:nvSpPr>
-        <p:spPr>
-          <a:xfrm>
-            <a:off x="7390311" y="4134678"/>
-            <a:ext cx="146957" cy="-232929"/>
-          </a:xfrm>
-          <a:prstGeom prst="line">
-            <a:avLst/>
-          </a:prstGeom>
-          <a:noFill/>
-          <a:ln w="25400">
-            <a:solidFill>
-              <a:srgbClr val="0E7C86"/>
-            </a:solidFill>
-            <a:prstDash val="solid"/>
-          </a:ln>
-        </p:spPr>
-      </p:sp>
-      <p:sp>
-        <p:nvSpPr>
-          <p:cNvPr id="13" name="Shape 10"/>
-          <p:cNvSpPr/>
-          <p:nvPr/>
-        </p:nvSpPr>
-        <p:spPr>
-          <a:xfrm>
-            <a:off x="7537269" y="3901749"/>
-            <a:ext cx="146957" cy="-255435"/>
-          </a:xfrm>
-          <a:prstGeom prst="line">
-            <a:avLst/>
-          </a:prstGeom>
-          <a:noFill/>
-          <a:ln w="25400">
-            <a:solidFill>
-              <a:srgbClr val="0E7C86"/>
-            </a:solidFill>
-            <a:prstDash val="solid"/>
-          </a:ln>
-        </p:spPr>
-      </p:sp>
-      <p:sp>
-        <p:nvSpPr>
-          <p:cNvPr id="14" name="Shape 11"/>
-          <p:cNvSpPr/>
-          <p:nvPr/>
-        </p:nvSpPr>
-        <p:spPr>
-          <a:xfrm>
-            <a:off x="7684226" y="3646314"/>
-            <a:ext cx="146957" cy="-255978"/>
-          </a:xfrm>
-          <a:prstGeom prst="line">
-            <a:avLst/>
-          </a:prstGeom>
-          <a:noFill/>
-          <a:ln w="25400">
-            <a:solidFill>
-              <a:srgbClr val="0E7C86"/>
-            </a:solidFill>
-            <a:prstDash val="solid"/>
-          </a:ln>
-        </p:spPr>
-      </p:sp>
-      <p:sp>
-        <p:nvSpPr>
-          <p:cNvPr id="15" name="Shape 12"/>
-          <p:cNvSpPr/>
-          <p:nvPr/>
-        </p:nvSpPr>
-        <p:spPr>
-          <a:xfrm>
-            <a:off x="7831183" y="3390336"/>
-            <a:ext cx="146957" cy="-229000"/>
-          </a:xfrm>
-          <a:prstGeom prst="line">
-            <a:avLst/>
-          </a:prstGeom>
-          <a:noFill/>
-          <a:ln w="25400">
-            <a:solidFill>
-              <a:srgbClr val="0E7C86"/>
-            </a:solidFill>
-            <a:prstDash val="solid"/>
-          </a:ln>
-        </p:spPr>
-      </p:sp>
-      <p:sp>
-        <p:nvSpPr>
-          <p:cNvPr id="16" name="Shape 13"/>
-          <p:cNvSpPr/>
-          <p:nvPr/>
-        </p:nvSpPr>
-        <p:spPr>
-          <a:xfrm>
-            <a:off x="7978140" y="3161337"/>
-            <a:ext cx="146957" cy="-173573"/>
-          </a:xfrm>
-          <a:prstGeom prst="line">
-            <a:avLst/>
-          </a:prstGeom>
-          <a:noFill/>
-          <a:ln w="25400">
-            <a:solidFill>
-              <a:srgbClr val="0E7C86"/>
-            </a:solidFill>
-            <a:prstDash val="solid"/>
-          </a:ln>
-        </p:spPr>
-      </p:sp>
-      <p:sp>
-        <p:nvSpPr>
-          <p:cNvPr id="17" name="Shape 14"/>
-          <p:cNvSpPr/>
-          <p:nvPr/>
-        </p:nvSpPr>
-        <p:spPr>
-          <a:xfrm>
-            <a:off x="8125097" y="2987763"/>
-            <a:ext cx="146957" cy="-94512"/>
-          </a:xfrm>
-          <a:prstGeom prst="line">
-            <a:avLst/>
-          </a:prstGeom>
-          <a:noFill/>
-          <a:ln w="25400">
-            <a:solidFill>
-              <a:srgbClr val="0E7C86"/>
-            </a:solidFill>
-            <a:prstDash val="solid"/>
-          </a:ln>
-        </p:spPr>
-      </p:sp>
-      <p:sp>
-        <p:nvSpPr>
-          <p:cNvPr id="18" name="Shape 15"/>
-          <p:cNvSpPr/>
-          <p:nvPr/>
-        </p:nvSpPr>
-        <p:spPr>
-          <a:xfrm>
-            <a:off x="8272054" y="2893252"/>
-            <a:ext cx="146957" cy="-1902"/>
-          </a:xfrm>
-          <a:prstGeom prst="line">
-            <a:avLst/>
-          </a:prstGeom>
-          <a:noFill/>
-          <a:ln w="25400">
-            <a:solidFill>
-              <a:srgbClr val="0E7C86"/>
-            </a:solidFill>
-            <a:prstDash val="solid"/>
-          </a:ln>
-        </p:spPr>
-      </p:sp>
-      <p:sp>
-        <p:nvSpPr>
-          <p:cNvPr id="19" name="Shape 16"/>
-          <p:cNvSpPr/>
-          <p:nvPr/>
-        </p:nvSpPr>
-        <p:spPr>
-          <a:xfrm>
-            <a:off x="8419011" y="2891350"/>
-            <a:ext cx="146957" cy="90986"/>
-          </a:xfrm>
-          <a:prstGeom prst="line">
-            <a:avLst/>
-          </a:prstGeom>
-          <a:noFill/>
-          <a:ln w="25400">
-            <a:solidFill>
-              <a:srgbClr val="0E7C86"/>
-            </a:solidFill>
-            <a:prstDash val="solid"/>
-          </a:ln>
-        </p:spPr>
-      </p:sp>
-      <p:sp>
-        <p:nvSpPr>
-          <p:cNvPr id="20" name="Shape 17"/>
-          <p:cNvSpPr/>
-          <p:nvPr/>
-        </p:nvSpPr>
-        <p:spPr>
-          <a:xfrm>
-            <a:off x="8565969" y="2982336"/>
-            <a:ext cx="146957" cy="170813"/>
-          </a:xfrm>
-          <a:prstGeom prst="line">
-            <a:avLst/>
-          </a:prstGeom>
-          <a:noFill/>
-          <a:ln w="25400">
-            <a:solidFill>
-              <a:srgbClr val="0E7C86"/>
-            </a:solidFill>
-            <a:prstDash val="solid"/>
-          </a:ln>
-        </p:spPr>
-      </p:sp>
-      <p:sp>
-        <p:nvSpPr>
-          <p:cNvPr id="21" name="Shape 18"/>
-          <p:cNvSpPr/>
-          <p:nvPr/>
-        </p:nvSpPr>
-        <p:spPr>
-          <a:xfrm>
-            <a:off x="8712926" y="3153149"/>
-            <a:ext cx="146957" cy="227316"/>
-          </a:xfrm>
-          <a:prstGeom prst="line">
-            <a:avLst/>
-          </a:prstGeom>
-          <a:noFill/>
-          <a:ln w="25400">
-            <a:solidFill>
-              <a:srgbClr val="0E7C86"/>
-            </a:solidFill>
-            <a:prstDash val="solid"/>
-          </a:ln>
-        </p:spPr>
-      </p:sp>
-      <p:sp>
-        <p:nvSpPr>
-          <p:cNvPr id="22" name="Shape 19"/>
-          <p:cNvSpPr/>
-          <p:nvPr/>
-        </p:nvSpPr>
-        <p:spPr>
-          <a:xfrm>
-            <a:off x="8859883" y="3380465"/>
-            <a:ext cx="146957" cy="255451"/>
-          </a:xfrm>
-          <a:prstGeom prst="line">
-            <a:avLst/>
-          </a:prstGeom>
-          <a:noFill/>
-          <a:ln w="25400">
-            <a:solidFill>
-              <a:srgbClr val="0E7C86"/>
-            </a:solidFill>
-            <a:prstDash val="solid"/>
-          </a:ln>
-        </p:spPr>
-      </p:sp>
-      <p:sp>
-        <p:nvSpPr>
-          <p:cNvPr id="23" name="Shape 20"/>
-          <p:cNvSpPr/>
-          <p:nvPr/>
-        </p:nvSpPr>
-        <p:spPr>
-          <a:xfrm>
-            <a:off x="9006840" y="3635916"/>
-            <a:ext cx="146957" cy="255926"/>
-          </a:xfrm>
-          <a:prstGeom prst="line">
-            <a:avLst/>
-          </a:prstGeom>
-          <a:noFill/>
-          <a:ln w="25400">
-            <a:solidFill>
-              <a:srgbClr val="0E7C86"/>
-            </a:solidFill>
-            <a:prstDash val="solid"/>
-          </a:ln>
-        </p:spPr>
-      </p:sp>
-      <p:sp>
-        <p:nvSpPr>
-          <p:cNvPr id="24" name="Shape 21"/>
-          <p:cNvSpPr/>
-          <p:nvPr/>
-        </p:nvSpPr>
-        <p:spPr>
-          <a:xfrm>
-            <a:off x="9153797" y="3891842"/>
-            <a:ext cx="146957" cy="234153"/>
-          </a:xfrm>
-          <a:prstGeom prst="line">
-            <a:avLst/>
-          </a:prstGeom>
-          <a:noFill/>
-          <a:ln w="25400">
-            <a:solidFill>
-              <a:srgbClr val="0E7C86"/>
-            </a:solidFill>
-            <a:prstDash val="solid"/>
-          </a:ln>
-        </p:spPr>
-      </p:sp>
-      <p:sp>
-        <p:nvSpPr>
-          <p:cNvPr id="25" name="Shape 22"/>
-          <p:cNvSpPr/>
-          <p:nvPr/>
-        </p:nvSpPr>
-        <p:spPr>
-          <a:xfrm>
-            <a:off x="9300754" y="4125995"/>
-            <a:ext cx="146957" cy="198160"/>
-          </a:xfrm>
-          <a:prstGeom prst="line">
-            <a:avLst/>
-          </a:prstGeom>
-          <a:noFill/>
-          <a:ln w="25400">
-            <a:solidFill>
-              <a:srgbClr val="0E7C86"/>
-            </a:solidFill>
-            <a:prstDash val="solid"/>
-          </a:ln>
-        </p:spPr>
-      </p:sp>
-      <p:sp>
-        <p:nvSpPr>
-          <p:cNvPr id="26" name="Shape 23"/>
-          <p:cNvSpPr/>
-          <p:nvPr/>
-        </p:nvSpPr>
-        <p:spPr>
-          <a:xfrm>
-            <a:off x="9447711" y="4324155"/>
-            <a:ext cx="146957" cy="156307"/>
-          </a:xfrm>
-          <a:prstGeom prst="line">
-            <a:avLst/>
-          </a:prstGeom>
-          <a:noFill/>
-          <a:ln w="25400">
-            <a:solidFill>
-              <a:srgbClr val="0E7C86"/>
-            </a:solidFill>
-            <a:prstDash val="solid"/>
-          </a:ln>
-        </p:spPr>
-      </p:sp>
-      <p:sp>
-        <p:nvSpPr>
-          <p:cNvPr id="27" name="Shape 24"/>
-          <p:cNvSpPr/>
-          <p:nvPr/>
-        </p:nvSpPr>
-        <p:spPr>
-          <a:xfrm>
-            <a:off x="9594669" y="4480462"/>
-            <a:ext cx="146957" cy="115483"/>
-          </a:xfrm>
-          <a:prstGeom prst="line">
-            <a:avLst/>
-          </a:prstGeom>
-          <a:noFill/>
-          <a:ln w="25400">
-            <a:solidFill>
-              <a:srgbClr val="0E7C86"/>
-            </a:solidFill>
-            <a:prstDash val="solid"/>
-          </a:ln>
-        </p:spPr>
-      </p:sp>
-      <p:sp>
-        <p:nvSpPr>
-          <p:cNvPr id="28" name="Shape 25"/>
-          <p:cNvSpPr/>
-          <p:nvPr/>
-        </p:nvSpPr>
-        <p:spPr>
-          <a:xfrm>
-            <a:off x="9741626" y="4595945"/>
-            <a:ext cx="146957" cy="80184"/>
-          </a:xfrm>
-          <a:prstGeom prst="line">
-            <a:avLst/>
-          </a:prstGeom>
-          <a:noFill/>
-          <a:ln w="25400">
-            <a:solidFill>
-              <a:srgbClr val="0E7C86"/>
-            </a:solidFill>
-            <a:prstDash val="solid"/>
-          </a:ln>
-        </p:spPr>
-      </p:sp>
-      <p:sp>
-        <p:nvSpPr>
-          <p:cNvPr id="29" name="Shape 26"/>
-          <p:cNvSpPr/>
-          <p:nvPr/>
-        </p:nvSpPr>
-        <p:spPr>
-          <a:xfrm>
-            <a:off x="9888583" y="4676129"/>
-            <a:ext cx="146957" cy="52447"/>
-          </a:xfrm>
-          <a:prstGeom prst="line">
-            <a:avLst/>
-          </a:prstGeom>
-          <a:noFill/>
-          <a:ln w="25400">
-            <a:solidFill>
-              <a:srgbClr val="0E7C86"/>
-            </a:solidFill>
-            <a:prstDash val="solid"/>
-          </a:ln>
-        </p:spPr>
-      </p:sp>
-      <p:sp>
-        <p:nvSpPr>
-          <p:cNvPr id="30" name="Shape 27"/>
-          <p:cNvSpPr/>
-          <p:nvPr/>
-        </p:nvSpPr>
-        <p:spPr>
-          <a:xfrm>
-            <a:off x="10035540" y="4728576"/>
-            <a:ext cx="146957" cy="32374"/>
-          </a:xfrm>
-          <a:prstGeom prst="line">
-            <a:avLst/>
-          </a:prstGeom>
-          <a:noFill/>
-          <a:ln w="25400">
-            <a:solidFill>
-              <a:srgbClr val="0E7C86"/>
-            </a:solidFill>
-            <a:prstDash val="solid"/>
-          </a:ln>
-        </p:spPr>
-      </p:sp>
-      <p:sp>
-        <p:nvSpPr>
-          <p:cNvPr id="31" name="Shape 28"/>
-          <p:cNvSpPr/>
-          <p:nvPr/>
-        </p:nvSpPr>
-        <p:spPr>
-          <a:xfrm>
-            <a:off x="10182497" y="4760950"/>
-            <a:ext cx="146957" cy="18883"/>
-          </a:xfrm>
-          <a:prstGeom prst="line">
-            <a:avLst/>
-          </a:prstGeom>
-          <a:noFill/>
-          <a:ln w="25400">
-            <a:solidFill>
-              <a:srgbClr val="0E7C86"/>
-            </a:solidFill>
-            <a:prstDash val="solid"/>
-          </a:ln>
-        </p:spPr>
-      </p:sp>
-      <p:sp>
-        <p:nvSpPr>
-          <p:cNvPr id="32" name="Shape 29"/>
-          <p:cNvSpPr/>
-          <p:nvPr/>
-        </p:nvSpPr>
-        <p:spPr>
-          <a:xfrm>
-            <a:off x="10329454" y="4779833"/>
-            <a:ext cx="146957" cy="10419"/>
-          </a:xfrm>
-          <a:prstGeom prst="line">
-            <a:avLst/>
-          </a:prstGeom>
-          <a:noFill/>
-          <a:ln w="25400">
-            <a:solidFill>
-              <a:srgbClr val="0E7C86"/>
-            </a:solidFill>
-            <a:prstDash val="solid"/>
-          </a:ln>
-        </p:spPr>
-      </p:sp>
-      <p:sp>
-        <p:nvSpPr>
-          <p:cNvPr id="33" name="Shape 30"/>
-          <p:cNvSpPr/>
-          <p:nvPr/>
-        </p:nvSpPr>
-        <p:spPr>
-          <a:xfrm>
-            <a:off x="10476411" y="4790252"/>
-            <a:ext cx="146957" cy="5442"/>
-          </a:xfrm>
-          <a:prstGeom prst="line">
-            <a:avLst/>
-          </a:prstGeom>
-          <a:noFill/>
-          <a:ln w="25400">
-            <a:solidFill>
-              <a:srgbClr val="0E7C86"/>
-            </a:solidFill>
-            <a:prstDash val="solid"/>
-          </a:ln>
-        </p:spPr>
-      </p:sp>
-      <p:sp>
-        <p:nvSpPr>
-          <p:cNvPr id="34" name="Shape 31"/>
-          <p:cNvSpPr/>
-          <p:nvPr/>
-        </p:nvSpPr>
-        <p:spPr>
-          <a:xfrm>
-            <a:off x="10623369" y="4795694"/>
-            <a:ext cx="146957" cy="2693"/>
-          </a:xfrm>
-          <a:prstGeom prst="line">
-            <a:avLst/>
-          </a:prstGeom>
-          <a:noFill/>
-          <a:ln w="25400">
-            <a:solidFill>
-              <a:srgbClr val="0E7C86"/>
-            </a:solidFill>
-            <a:prstDash val="solid"/>
-          </a:ln>
-        </p:spPr>
-      </p:sp>
-      <p:sp>
-        <p:nvSpPr>
-          <p:cNvPr id="35" name="Shape 32"/>
-          <p:cNvSpPr/>
-          <p:nvPr/>
-        </p:nvSpPr>
-        <p:spPr>
-          <a:xfrm>
-            <a:off x="10770326" y="4798387"/>
-            <a:ext cx="146957" cy="1263"/>
-          </a:xfrm>
-          <a:prstGeom prst="line">
-            <a:avLst/>
-          </a:prstGeom>
-          <a:noFill/>
-          <a:ln w="25400">
-            <a:solidFill>
-              <a:srgbClr val="0E7C86"/>
-            </a:solidFill>
-            <a:prstDash val="solid"/>
-          </a:ln>
-        </p:spPr>
-      </p:sp>
-      <p:sp>
-        <p:nvSpPr>
-          <p:cNvPr id="36" name="Shape 33"/>
-          <p:cNvSpPr/>
-          <p:nvPr/>
-        </p:nvSpPr>
-        <p:spPr>
-          <a:xfrm>
-            <a:off x="10917283" y="4799650"/>
-            <a:ext cx="146957" cy="562"/>
-          </a:xfrm>
-          <a:prstGeom prst="line">
-            <a:avLst/>
-          </a:prstGeom>
-          <a:noFill/>
-          <a:ln w="25400">
-            <a:solidFill>
-              <a:srgbClr val="0E7C86"/>
-            </a:solidFill>
-            <a:prstDash val="solid"/>
-          </a:ln>
-        </p:spPr>
-      </p:sp>
-      <p:sp>
-        <p:nvSpPr>
-          <p:cNvPr id="37" name="Text 34"/>
-          <p:cNvSpPr/>
-          <p:nvPr/>
-        </p:nvSpPr>
-        <p:spPr>
-          <a:xfrm>
-            <a:off x="7525512" y="2514600"/>
-            <a:ext cx="1645920" cy="274320"/>
-          </a:xfrm>
-          <a:prstGeom prst="rect">
-            <a:avLst/>
-          </a:prstGeom>
-          <a:noFill/>
-          <a:ln/>
-        </p:spPr>
-        <p:txBody>
-          <a:bodyPr wrap="square" lIns="0" tIns="0" rIns="0" bIns="0" rtlCol="0" anchor="ctr"/>
-          <a:lstStyle/>
-          <a:p>
-            <a:pPr algn="ctr" indent="0" marL="0">
-              <a:buNone/>
-            </a:pPr>
-            <a:r>
-              <a:rPr lang="en-US" sz="1000" dirty="0">
-                <a:solidFill>
-                  <a:srgbClr val="0E7C86"/>
-                </a:solidFill>
-                <a:latin typeface="Calibri" pitchFamily="34" charset="0"/>
-                <a:ea typeface="Calibri" pitchFamily="34" charset="-122"/>
-                <a:cs typeface="Calibri" pitchFamily="34" charset="-120"/>
-              </a:rPr>
-              <a:t>development</a:t>
-            </a:r>
-            <a:endParaRPr lang="en-US" sz="1000" dirty="0"/>
-          </a:p>
-        </p:txBody>
-      </p:sp>
-      <p:sp>
-        <p:nvSpPr>
-          <p:cNvPr id="38" name="Shape 35"/>
-          <p:cNvSpPr/>
-          <p:nvPr/>
-        </p:nvSpPr>
-        <p:spPr>
-          <a:xfrm>
-            <a:off x="6949440" y="4800212"/>
-            <a:ext cx="146957" cy="-562"/>
-          </a:xfrm>
-          <a:prstGeom prst="line">
-            <a:avLst/>
-          </a:prstGeom>
-          <a:noFill/>
-          <a:ln w="25400">
+        <p:txBody>
+          <a:bodyPr/>
+          <a:lstStyle/>
+          <a:p>
+            <a:endParaRPr lang="en-US"/>
+          </a:p>
+        </p:txBody>
+      </p:sp>
+      <p:sp>
+        <p:nvSpPr>
+          <p:cNvPr id="602" name="dist"/>
+          <p:cNvSpPr/>
+          <p:nvPr/>
+        </p:nvSpPr>
+        <p:spPr>
+          <a:xfrm>
+            <a:off x="6875120" y="2638003"/>
+            <a:ext cx="4313440" cy="2282191"/>
+          </a:xfrm>
+          <a:custGeom>
+            <a:avLst/>
+            <a:gdLst/>
+            <a:ahLst/>
+            <a:cxnLst/>
+            <a:rect l="0" t="0" r="0" b="0"/>
+            <a:pathLst>
+              <a:path w="4313440" h="2282191">
+                <a:moveTo>
+                  <a:pt x="0" y="2282191"/>
+                </a:moveTo>
+                <a:lnTo>
+                  <a:pt x="71890" y="2281936"/>
+                </a:lnTo>
+                <a:lnTo>
+                  <a:pt x="143781" y="2281548"/>
+                </a:lnTo>
+                <a:lnTo>
+                  <a:pt x="215672" y="2280966"/>
+                </a:lnTo>
+                <a:lnTo>
+                  <a:pt x="287562" y="2280104"/>
+                </a:lnTo>
+                <a:lnTo>
+                  <a:pt x="359453" y="2278844"/>
+                </a:lnTo>
+                <a:lnTo>
+                  <a:pt x="431344" y="2277027"/>
+                </a:lnTo>
+                <a:lnTo>
+                  <a:pt x="503234" y="2274442"/>
+                </a:lnTo>
+                <a:lnTo>
+                  <a:pt x="575125" y="2270813"/>
+                </a:lnTo>
+                <a:lnTo>
+                  <a:pt x="647016" y="2265785"/>
+                </a:lnTo>
+                <a:lnTo>
+                  <a:pt x="718906" y="2258914"/>
+                </a:lnTo>
+                <a:lnTo>
+                  <a:pt x="790797" y="2249652"/>
+                </a:lnTo>
+                <a:lnTo>
+                  <a:pt x="862688" y="2237335"/>
+                </a:lnTo>
+                <a:lnTo>
+                  <a:pt x="934578" y="2221184"/>
+                </a:lnTo>
+                <a:lnTo>
+                  <a:pt x="1006469" y="2200296"/>
+                </a:lnTo>
+                <a:lnTo>
+                  <a:pt x="1078360" y="2173662"/>
+                </a:lnTo>
+                <a:lnTo>
+                  <a:pt x="1150250" y="2140183"/>
+                </a:lnTo>
+                <a:lnTo>
+                  <a:pt x="1222141" y="2098704"/>
+                </a:lnTo>
+                <a:lnTo>
+                  <a:pt x="1294032" y="2048061"/>
+                </a:lnTo>
+                <a:lnTo>
+                  <a:pt x="1365922" y="1987144"/>
+                </a:lnTo>
+                <a:lnTo>
+                  <a:pt x="1437813" y="1914976"/>
+                </a:lnTo>
+                <a:lnTo>
+                  <a:pt x="1509704" y="1830794"/>
+                </a:lnTo>
+                <a:lnTo>
+                  <a:pt x="1581594" y="1734151"/>
+                </a:lnTo>
+                <a:lnTo>
+                  <a:pt x="1653485" y="1625007"/>
+                </a:lnTo>
+                <a:lnTo>
+                  <a:pt x="1725376" y="1503818"/>
+                </a:lnTo>
+                <a:lnTo>
+                  <a:pt x="1797266" y="1371614"/>
+                </a:lnTo>
+                <a:lnTo>
+                  <a:pt x="1869157" y="1230043"/>
+                </a:lnTo>
+                <a:lnTo>
+                  <a:pt x="1941048" y="1081395"/>
+                </a:lnTo>
+                <a:lnTo>
+                  <a:pt x="2012938" y="928575"/>
+                </a:lnTo>
+                <a:lnTo>
+                  <a:pt x="2084829" y="775041"/>
+                </a:lnTo>
+                <a:lnTo>
+                  <a:pt x="2156720" y="624693"/>
+                </a:lnTo>
+                <a:lnTo>
+                  <a:pt x="2228610" y="481723"/>
+                </a:lnTo>
+                <a:lnTo>
+                  <a:pt x="2300501" y="350427"/>
+                </a:lnTo>
+                <a:lnTo>
+                  <a:pt x="2372392" y="234994"/>
+                </a:lnTo>
+                <a:lnTo>
+                  <a:pt x="2444282" y="139291"/>
+                </a:lnTo>
+                <a:lnTo>
+                  <a:pt x="2516173" y="66642"/>
+                </a:lnTo>
+                <a:lnTo>
+                  <a:pt x="2588064" y="19642"/>
+                </a:lnTo>
+                <a:lnTo>
+                  <a:pt x="2659954" y="0"/>
+                </a:lnTo>
+                <a:lnTo>
+                  <a:pt x="2731845" y="8439"/>
+                </a:lnTo>
+                <a:lnTo>
+                  <a:pt x="2803736" y="44647"/>
+                </a:lnTo>
+                <a:lnTo>
+                  <a:pt x="2875626" y="107301"/>
+                </a:lnTo>
+                <a:lnTo>
+                  <a:pt x="2947517" y="194145"/>
+                </a:lnTo>
+                <a:lnTo>
+                  <a:pt x="3019408" y="302124"/>
+                </a:lnTo>
+                <a:lnTo>
+                  <a:pt x="3091298" y="427564"/>
+                </a:lnTo>
+                <a:lnTo>
+                  <a:pt x="3163189" y="566379"/>
+                </a:lnTo>
+                <a:lnTo>
+                  <a:pt x="3235080" y="714289"/>
+                </a:lnTo>
+                <a:lnTo>
+                  <a:pt x="3306970" y="867037"/>
+                </a:lnTo>
+                <a:lnTo>
+                  <a:pt x="3378861" y="1020585"/>
+                </a:lnTo>
+                <a:lnTo>
+                  <a:pt x="3450752" y="1171284"/>
+                </a:lnTo>
+                <a:lnTo>
+                  <a:pt x="3522642" y="1315996"/>
+                </a:lnTo>
+                <a:lnTo>
+                  <a:pt x="3594533" y="1452180"/>
+                </a:lnTo>
+                <a:lnTo>
+                  <a:pt x="3666424" y="1577933"/>
+                </a:lnTo>
+                <a:lnTo>
+                  <a:pt x="3738314" y="1691980"/>
+                </a:lnTo>
+                <a:lnTo>
+                  <a:pt x="3810205" y="1793645"/>
+                </a:lnTo>
+                <a:lnTo>
+                  <a:pt x="3882096" y="1882778"/>
+                </a:lnTo>
+                <a:lnTo>
+                  <a:pt x="3953986" y="1959676"/>
+                </a:lnTo>
+                <a:lnTo>
+                  <a:pt x="4025877" y="2024986"/>
+                </a:lnTo>
+                <a:lnTo>
+                  <a:pt x="4097768" y="2079611"/>
+                </a:lnTo>
+                <a:lnTo>
+                  <a:pt x="4169658" y="2124617"/>
+                </a:lnTo>
+                <a:lnTo>
+                  <a:pt x="4241549" y="2161156"/>
+                </a:lnTo>
+                <a:lnTo>
+                  <a:pt x="4313440" y="2190392"/>
+                </a:lnTo>
+              </a:path>
+            </a:pathLst>
+          </a:custGeom>
+          <a:noFill/>
+          <a:ln w="28575" cap="rnd">
             <a:solidFill>
               <a:srgbClr val="C2772B"/>
             </a:solidFill>
-            <a:prstDash val="solid"/>
+            <a:round/>
           </a:ln>
         </p:spPr>
-      </p:sp>
-      <p:sp>
-        <p:nvSpPr>
-          <p:cNvPr id="39" name="Shape 36"/>
-          <p:cNvSpPr/>
-          <p:nvPr/>
-        </p:nvSpPr>
-        <p:spPr>
-          <a:xfrm>
-            <a:off x="7096397" y="4799650"/>
-            <a:ext cx="146957" cy="-1263"/>
-          </a:xfrm>
-          <a:prstGeom prst="line">
-            <a:avLst/>
-          </a:prstGeom>
-          <a:noFill/>
-          <a:ln w="25400">
-            <a:solidFill>
-              <a:srgbClr val="C2772B"/>
-            </a:solidFill>
-            <a:prstDash val="solid"/>
-          </a:ln>
-        </p:spPr>
-      </p:sp>
-      <p:sp>
-        <p:nvSpPr>
-          <p:cNvPr id="40" name="Shape 37"/>
-          <p:cNvSpPr/>
-          <p:nvPr/>
-        </p:nvSpPr>
-        <p:spPr>
-          <a:xfrm>
-            <a:off x="7243354" y="4798387"/>
-            <a:ext cx="146957" cy="-2693"/>
-          </a:xfrm>
-          <a:prstGeom prst="line">
-            <a:avLst/>
-          </a:prstGeom>
-          <a:noFill/>
-          <a:ln w="25400">
-            <a:solidFill>
-              <a:srgbClr val="C2772B"/>
-            </a:solidFill>
-            <a:prstDash val="solid"/>
-          </a:ln>
-        </p:spPr>
-      </p:sp>
-      <p:sp>
-        <p:nvSpPr>
-          <p:cNvPr id="41" name="Shape 38"/>
-          <p:cNvSpPr/>
-          <p:nvPr/>
-        </p:nvSpPr>
-        <p:spPr>
-          <a:xfrm>
-            <a:off x="7390311" y="4795694"/>
-            <a:ext cx="146957" cy="-5442"/>
-          </a:xfrm>
-          <a:prstGeom prst="line">
-            <a:avLst/>
-          </a:prstGeom>
-          <a:noFill/>
-          <a:ln w="25400">
-            <a:solidFill>
-              <a:srgbClr val="C2772B"/>
-            </a:solidFill>
-            <a:prstDash val="solid"/>
-          </a:ln>
-        </p:spPr>
-      </p:sp>
-      <p:sp>
-        <p:nvSpPr>
-          <p:cNvPr id="42" name="Shape 39"/>
-          <p:cNvSpPr/>
-          <p:nvPr/>
-        </p:nvSpPr>
-        <p:spPr>
-          <a:xfrm>
-            <a:off x="7537269" y="4790252"/>
-            <a:ext cx="146957" cy="-10419"/>
-          </a:xfrm>
-          <a:prstGeom prst="line">
-            <a:avLst/>
-          </a:prstGeom>
-          <a:noFill/>
-          <a:ln w="25400">
-            <a:solidFill>
-              <a:srgbClr val="C2772B"/>
-            </a:solidFill>
-            <a:prstDash val="solid"/>
-          </a:ln>
-        </p:spPr>
-      </p:sp>
-      <p:sp>
-        <p:nvSpPr>
-          <p:cNvPr id="43" name="Shape 40"/>
-          <p:cNvSpPr/>
-          <p:nvPr/>
-        </p:nvSpPr>
-        <p:spPr>
-          <a:xfrm>
-            <a:off x="7684226" y="4779833"/>
-            <a:ext cx="146957" cy="-18883"/>
-          </a:xfrm>
-          <a:prstGeom prst="line">
-            <a:avLst/>
-          </a:prstGeom>
-          <a:noFill/>
-          <a:ln w="25400">
-            <a:solidFill>
-              <a:srgbClr val="C2772B"/>
-            </a:solidFill>
-            <a:prstDash val="solid"/>
-          </a:ln>
-        </p:spPr>
-      </p:sp>
-      <p:sp>
-        <p:nvSpPr>
-          <p:cNvPr id="44" name="Shape 41"/>
-          <p:cNvSpPr/>
-          <p:nvPr/>
-        </p:nvSpPr>
-        <p:spPr>
-          <a:xfrm>
-            <a:off x="7831183" y="4760950"/>
-            <a:ext cx="146957" cy="-32374"/>
-          </a:xfrm>
-          <a:prstGeom prst="line">
-            <a:avLst/>
-          </a:prstGeom>
-          <a:noFill/>
-          <a:ln w="25400">
-            <a:solidFill>
-              <a:srgbClr val="C2772B"/>
-            </a:solidFill>
-            <a:prstDash val="solid"/>
-          </a:ln>
-        </p:spPr>
-      </p:sp>
-      <p:sp>
-        <p:nvSpPr>
-          <p:cNvPr id="45" name="Shape 42"/>
-          <p:cNvSpPr/>
-          <p:nvPr/>
-        </p:nvSpPr>
-        <p:spPr>
-          <a:xfrm>
-            <a:off x="7978140" y="4728576"/>
-            <a:ext cx="146957" cy="-52447"/>
-          </a:xfrm>
-          <a:prstGeom prst="line">
-            <a:avLst/>
-          </a:prstGeom>
-          <a:noFill/>
-          <a:ln w="25400">
-            <a:solidFill>
-              <a:srgbClr val="C2772B"/>
-            </a:solidFill>
-            <a:prstDash val="solid"/>
-          </a:ln>
-        </p:spPr>
-      </p:sp>
-      <p:sp>
-        <p:nvSpPr>
-          <p:cNvPr id="46" name="Shape 43"/>
-          <p:cNvSpPr/>
-          <p:nvPr/>
-        </p:nvSpPr>
-        <p:spPr>
-          <a:xfrm>
-            <a:off x="8125097" y="4676129"/>
-            <a:ext cx="146957" cy="-80184"/>
-          </a:xfrm>
-          <a:prstGeom prst="line">
-            <a:avLst/>
-          </a:prstGeom>
-          <a:noFill/>
-          <a:ln w="25400">
-            <a:solidFill>
-              <a:srgbClr val="C2772B"/>
-            </a:solidFill>
-            <a:prstDash val="solid"/>
-          </a:ln>
-        </p:spPr>
-      </p:sp>
-      <p:sp>
-        <p:nvSpPr>
-          <p:cNvPr id="47" name="Shape 44"/>
-          <p:cNvSpPr/>
-          <p:nvPr/>
-        </p:nvSpPr>
-        <p:spPr>
-          <a:xfrm>
-            <a:off x="8272054" y="4595945"/>
-            <a:ext cx="146957" cy="-115483"/>
-          </a:xfrm>
-          <a:prstGeom prst="line">
-            <a:avLst/>
-          </a:prstGeom>
-          <a:noFill/>
-          <a:ln w="25400">
-            <a:solidFill>
-              <a:srgbClr val="C2772B"/>
-            </a:solidFill>
-            <a:prstDash val="solid"/>
-          </a:ln>
-        </p:spPr>
-      </p:sp>
-      <p:sp>
-        <p:nvSpPr>
-          <p:cNvPr id="48" name="Shape 45"/>
-          <p:cNvSpPr/>
-          <p:nvPr/>
-        </p:nvSpPr>
-        <p:spPr>
-          <a:xfrm>
-            <a:off x="8419011" y="4480462"/>
-            <a:ext cx="146957" cy="-156307"/>
-          </a:xfrm>
-          <a:prstGeom prst="line">
-            <a:avLst/>
-          </a:prstGeom>
-          <a:noFill/>
-          <a:ln w="25400">
-            <a:solidFill>
-              <a:srgbClr val="C2772B"/>
-            </a:solidFill>
-            <a:prstDash val="solid"/>
-          </a:ln>
-        </p:spPr>
-      </p:sp>
-      <p:sp>
-        <p:nvSpPr>
-          <p:cNvPr id="49" name="Shape 46"/>
-          <p:cNvSpPr/>
-          <p:nvPr/>
-        </p:nvSpPr>
-        <p:spPr>
-          <a:xfrm>
-            <a:off x="8565969" y="4324155"/>
-            <a:ext cx="146957" cy="-198160"/>
-          </a:xfrm>
-          <a:prstGeom prst="line">
-            <a:avLst/>
-          </a:prstGeom>
-          <a:noFill/>
-          <a:ln w="25400">
-            <a:solidFill>
-              <a:srgbClr val="C2772B"/>
-            </a:solidFill>
-            <a:prstDash val="solid"/>
-          </a:ln>
-        </p:spPr>
-      </p:sp>
-      <p:sp>
-        <p:nvSpPr>
-          <p:cNvPr id="50" name="Shape 47"/>
-          <p:cNvSpPr/>
-          <p:nvPr/>
-        </p:nvSpPr>
-        <p:spPr>
-          <a:xfrm>
-            <a:off x="8712926" y="4125995"/>
-            <a:ext cx="146957" cy="-234153"/>
-          </a:xfrm>
-          <a:prstGeom prst="line">
-            <a:avLst/>
-          </a:prstGeom>
-          <a:noFill/>
-          <a:ln w="25400">
-            <a:solidFill>
-              <a:srgbClr val="C2772B"/>
-            </a:solidFill>
-            <a:prstDash val="solid"/>
-          </a:ln>
-        </p:spPr>
-      </p:sp>
-      <p:sp>
-        <p:nvSpPr>
-          <p:cNvPr id="51" name="Shape 48"/>
-          <p:cNvSpPr/>
-          <p:nvPr/>
-        </p:nvSpPr>
-        <p:spPr>
-          <a:xfrm>
-            <a:off x="8859883" y="3891842"/>
-            <a:ext cx="146957" cy="-255926"/>
-          </a:xfrm>
-          <a:prstGeom prst="line">
-            <a:avLst/>
-          </a:prstGeom>
-          <a:noFill/>
-          <a:ln w="25400">
-            <a:solidFill>
-              <a:srgbClr val="C2772B"/>
-            </a:solidFill>
-            <a:prstDash val="solid"/>
-          </a:ln>
-        </p:spPr>
-      </p:sp>
-      <p:sp>
-        <p:nvSpPr>
-          <p:cNvPr id="52" name="Shape 49"/>
-          <p:cNvSpPr/>
-          <p:nvPr/>
-        </p:nvSpPr>
-        <p:spPr>
-          <a:xfrm>
-            <a:off x="9006840" y="3635916"/>
-            <a:ext cx="146957" cy="-255451"/>
-          </a:xfrm>
-          <a:prstGeom prst="line">
-            <a:avLst/>
-          </a:prstGeom>
-          <a:noFill/>
-          <a:ln w="25400">
-            <a:solidFill>
-              <a:srgbClr val="C2772B"/>
-            </a:solidFill>
-            <a:prstDash val="solid"/>
-          </a:ln>
-        </p:spPr>
-      </p:sp>
-      <p:sp>
-        <p:nvSpPr>
-          <p:cNvPr id="53" name="Shape 50"/>
-          <p:cNvSpPr/>
-          <p:nvPr/>
-        </p:nvSpPr>
-        <p:spPr>
-          <a:xfrm>
-            <a:off x="9153797" y="3380465"/>
-            <a:ext cx="146957" cy="-227316"/>
-          </a:xfrm>
-          <a:prstGeom prst="line">
-            <a:avLst/>
-          </a:prstGeom>
-          <a:noFill/>
-          <a:ln w="25400">
-            <a:solidFill>
-              <a:srgbClr val="C2772B"/>
-            </a:solidFill>
-            <a:prstDash val="solid"/>
-          </a:ln>
-        </p:spPr>
-      </p:sp>
-      <p:sp>
-        <p:nvSpPr>
-          <p:cNvPr id="54" name="Shape 51"/>
-          <p:cNvSpPr/>
-          <p:nvPr/>
-        </p:nvSpPr>
-        <p:spPr>
-          <a:xfrm>
-            <a:off x="9300754" y="3153149"/>
-            <a:ext cx="146957" cy="-170813"/>
-          </a:xfrm>
-          <a:prstGeom prst="line">
-            <a:avLst/>
-          </a:prstGeom>
-          <a:noFill/>
-          <a:ln w="25400">
-            <a:solidFill>
-              <a:srgbClr val="C2772B"/>
-            </a:solidFill>
-            <a:prstDash val="solid"/>
-          </a:ln>
-        </p:spPr>
-      </p:sp>
-      <p:sp>
-        <p:nvSpPr>
-          <p:cNvPr id="55" name="Shape 52"/>
-          <p:cNvSpPr/>
-          <p:nvPr/>
-        </p:nvSpPr>
-        <p:spPr>
-          <a:xfrm>
-            <a:off x="9447711" y="2982336"/>
-            <a:ext cx="146957" cy="-90986"/>
-          </a:xfrm>
-          <a:prstGeom prst="line">
-            <a:avLst/>
-          </a:prstGeom>
-          <a:noFill/>
-          <a:ln w="25400">
-            <a:solidFill>
-              <a:srgbClr val="C2772B"/>
-            </a:solidFill>
-            <a:prstDash val="solid"/>
-          </a:ln>
-        </p:spPr>
-      </p:sp>
-      <p:sp>
-        <p:nvSpPr>
-          <p:cNvPr id="56" name="Shape 53"/>
-          <p:cNvSpPr/>
-          <p:nvPr/>
-        </p:nvSpPr>
-        <p:spPr>
-          <a:xfrm>
-            <a:off x="9594669" y="2891350"/>
-            <a:ext cx="146957" cy="1902"/>
-          </a:xfrm>
-          <a:prstGeom prst="line">
-            <a:avLst/>
-          </a:prstGeom>
-          <a:noFill/>
-          <a:ln w="25400">
-            <a:solidFill>
-              <a:srgbClr val="C2772B"/>
-            </a:solidFill>
-            <a:prstDash val="solid"/>
-          </a:ln>
-        </p:spPr>
-      </p:sp>
-      <p:sp>
-        <p:nvSpPr>
-          <p:cNvPr id="57" name="Shape 54"/>
-          <p:cNvSpPr/>
-          <p:nvPr/>
-        </p:nvSpPr>
-        <p:spPr>
-          <a:xfrm>
-            <a:off x="9741626" y="2893252"/>
-            <a:ext cx="146957" cy="94512"/>
-          </a:xfrm>
-          <a:prstGeom prst="line">
-            <a:avLst/>
-          </a:prstGeom>
-          <a:noFill/>
-          <a:ln w="25400">
-            <a:solidFill>
-              <a:srgbClr val="C2772B"/>
-            </a:solidFill>
-            <a:prstDash val="solid"/>
-          </a:ln>
-        </p:spPr>
-      </p:sp>
-      <p:sp>
-        <p:nvSpPr>
-          <p:cNvPr id="58" name="Shape 55"/>
-          <p:cNvSpPr/>
-          <p:nvPr/>
-        </p:nvSpPr>
-        <p:spPr>
-          <a:xfrm>
-            <a:off x="9888583" y="2987763"/>
-            <a:ext cx="146957" cy="173573"/>
-          </a:xfrm>
-          <a:prstGeom prst="line">
-            <a:avLst/>
-          </a:prstGeom>
-          <a:noFill/>
-          <a:ln w="25400">
-            <a:solidFill>
-              <a:srgbClr val="C2772B"/>
-            </a:solidFill>
-            <a:prstDash val="solid"/>
-          </a:ln>
-        </p:spPr>
-      </p:sp>
-      <p:sp>
-        <p:nvSpPr>
-          <p:cNvPr id="59" name="Shape 56"/>
-          <p:cNvSpPr/>
-          <p:nvPr/>
-        </p:nvSpPr>
-        <p:spPr>
-          <a:xfrm>
-            <a:off x="10035540" y="3161337"/>
-            <a:ext cx="146957" cy="229000"/>
-          </a:xfrm>
-          <a:prstGeom prst="line">
-            <a:avLst/>
-          </a:prstGeom>
-          <a:noFill/>
-          <a:ln w="25400">
-            <a:solidFill>
-              <a:srgbClr val="C2772B"/>
-            </a:solidFill>
-            <a:prstDash val="solid"/>
-          </a:ln>
-        </p:spPr>
-      </p:sp>
-      <p:sp>
-        <p:nvSpPr>
-          <p:cNvPr id="60" name="Shape 57"/>
-          <p:cNvSpPr/>
-          <p:nvPr/>
-        </p:nvSpPr>
-        <p:spPr>
-          <a:xfrm>
-            <a:off x="10182497" y="3390336"/>
-            <a:ext cx="146957" cy="255978"/>
-          </a:xfrm>
-          <a:prstGeom prst="line">
-            <a:avLst/>
-          </a:prstGeom>
-          <a:noFill/>
-          <a:ln w="25400">
-            <a:solidFill>
-              <a:srgbClr val="C2772B"/>
-            </a:solidFill>
-            <a:prstDash val="solid"/>
-          </a:ln>
-        </p:spPr>
-      </p:sp>
-      <p:sp>
-        <p:nvSpPr>
-          <p:cNvPr id="61" name="Shape 58"/>
-          <p:cNvSpPr/>
-          <p:nvPr/>
-        </p:nvSpPr>
-        <p:spPr>
-          <a:xfrm>
-            <a:off x="10329454" y="3646314"/>
-            <a:ext cx="146957" cy="255435"/>
-          </a:xfrm>
-          <a:prstGeom prst="line">
-            <a:avLst/>
-          </a:prstGeom>
-          <a:noFill/>
-          <a:ln w="25400">
-            <a:solidFill>
-              <a:srgbClr val="C2772B"/>
-            </a:solidFill>
-            <a:prstDash val="solid"/>
-          </a:ln>
-        </p:spPr>
-      </p:sp>
-      <p:sp>
-        <p:nvSpPr>
-          <p:cNvPr id="62" name="Shape 59"/>
-          <p:cNvSpPr/>
-          <p:nvPr/>
-        </p:nvSpPr>
-        <p:spPr>
-          <a:xfrm>
-            <a:off x="10476411" y="3901749"/>
-            <a:ext cx="146957" cy="232929"/>
-          </a:xfrm>
-          <a:prstGeom prst="line">
-            <a:avLst/>
-          </a:prstGeom>
-          <a:noFill/>
-          <a:ln w="25400">
-            <a:solidFill>
-              <a:srgbClr val="C2772B"/>
-            </a:solidFill>
-            <a:prstDash val="solid"/>
-          </a:ln>
-        </p:spPr>
-      </p:sp>
-      <p:sp>
-        <p:nvSpPr>
-          <p:cNvPr id="63" name="Shape 60"/>
-          <p:cNvSpPr/>
-          <p:nvPr/>
-        </p:nvSpPr>
-        <p:spPr>
-          <a:xfrm>
-            <a:off x="10623369" y="4134678"/>
-            <a:ext cx="146957" cy="196546"/>
-          </a:xfrm>
-          <a:prstGeom prst="line">
-            <a:avLst/>
-          </a:prstGeom>
-          <a:noFill/>
-          <a:ln w="25400">
-            <a:solidFill>
-              <a:srgbClr val="C2772B"/>
-            </a:solidFill>
-            <a:prstDash val="solid"/>
-          </a:ln>
-        </p:spPr>
-      </p:sp>
-      <p:sp>
-        <p:nvSpPr>
-          <p:cNvPr id="64" name="Shape 61"/>
-          <p:cNvSpPr/>
-          <p:nvPr/>
-        </p:nvSpPr>
-        <p:spPr>
-          <a:xfrm>
-            <a:off x="10770326" y="4331224"/>
-            <a:ext cx="146957" cy="154616"/>
-          </a:xfrm>
-          <a:prstGeom prst="line">
-            <a:avLst/>
-          </a:prstGeom>
-          <a:noFill/>
-          <a:ln w="25400">
-            <a:solidFill>
-              <a:srgbClr val="C2772B"/>
-            </a:solidFill>
-            <a:prstDash val="solid"/>
-          </a:ln>
-        </p:spPr>
-      </p:sp>
-      <p:sp>
-        <p:nvSpPr>
-          <p:cNvPr id="65" name="Shape 62"/>
-          <p:cNvSpPr/>
-          <p:nvPr/>
-        </p:nvSpPr>
-        <p:spPr>
-          <a:xfrm>
-            <a:off x="10917283" y="4485840"/>
-            <a:ext cx="146957" cy="113943"/>
-          </a:xfrm>
-          <a:prstGeom prst="line">
-            <a:avLst/>
-          </a:prstGeom>
-          <a:noFill/>
-          <a:ln w="25400">
-            <a:solidFill>
-              <a:srgbClr val="C2772B"/>
-            </a:solidFill>
-            <a:prstDash val="solid"/>
-          </a:ln>
-        </p:spPr>
+        <p:txBody>
+          <a:bodyPr/>
+          <a:lstStyle/>
+          <a:p>
+            <a:endParaRPr lang="en-US"/>
+          </a:p>
+        </p:txBody>
+      </p:sp>
+      <p:sp>
+        <p:nvSpPr>
+          <p:cNvPr id="37" name="Text 34"/>
+          <p:cNvSpPr/>
+          <p:nvPr/>
+        </p:nvSpPr>
+        <p:spPr>
+          <a:xfrm>
+            <a:off x="7525512" y="2344600"/>
+            <a:ext cx="1645920" cy="274320"/>
+          </a:xfrm>
+          <a:prstGeom prst="rect">
+            <a:avLst/>
+          </a:prstGeom>
+          <a:noFill/>
+          <a:ln/>
+        </p:spPr>
+        <p:txBody>
+          <a:bodyPr wrap="square" lIns="0" tIns="0" rIns="0" bIns="0" rtlCol="0" anchor="ctr"/>
+          <a:lstStyle/>
+          <a:p>
+            <a:pPr marL="0" indent="0" algn="ctr">
+              <a:buNone/>
+            </a:pPr>
+            <a:r>
+              <a:rPr lang="en-US" sz="1000" dirty="0">
+                <a:solidFill>
+                  <a:srgbClr val="0E7C86"/>
+                </a:solidFill>
+                <a:latin typeface="Calibri" pitchFamily="34" charset="0"/>
+                <a:ea typeface="Calibri" pitchFamily="34" charset="-122"/>
+                <a:cs typeface="Calibri" pitchFamily="34" charset="-120"/>
+              </a:rPr>
+              <a:t>development</a:t>
+            </a:r>
+            <a:endParaRPr lang="en-US" sz="1000" dirty="0"/>
+          </a:p>
+        </p:txBody>
       </p:sp>
       <p:sp>
         <p:nvSpPr>
@@ -23862,7 +22735,7 @@
         </p:nvSpPr>
         <p:spPr>
           <a:xfrm>
-            <a:off x="8842248" y="2514600"/>
+            <a:off x="8842248" y="2344600"/>
             <a:ext cx="1645920" cy="274320"/>
           </a:xfrm>
           <a:prstGeom prst="rect">
@@ -23875,7 +22748,7 @@
           <a:bodyPr wrap="square" lIns="0" tIns="0" rIns="0" bIns="0" rtlCol="0" anchor="ctr"/>
           <a:lstStyle/>
           <a:p>
-            <a:pPr algn="ctr" indent="0" marL="0">
+            <a:pPr marL="0" indent="0" algn="ctr">
               <a:buNone/>
             </a:pPr>
             <a:r>
@@ -23914,7 +22787,7 @@
           <a:bodyPr wrap="square" lIns="0" tIns="0" rIns="0" bIns="0" rtlCol="0" anchor="ctr"/>
           <a:lstStyle/>
           <a:p>
-            <a:pPr algn="ctr" indent="0" marL="0">
+            <a:pPr marL="0" indent="0" algn="ctr">
               <a:buNone/>
             </a:pPr>
             <a:r>
@@ -24233,4 +23106,299 @@
     </a:ext>
   </a:extLst>
 </a:theme>
+</file>
+
+<file path=ppt/theme/theme2.xml><?xml version="1.0" encoding="utf-8"?>
+<a:theme xmlns:a="http://schemas.openxmlformats.org/drawingml/2006/main" name="Office Theme">
+  <a:themeElements>
+    <a:clrScheme name="Office">
+      <a:dk1>
+        <a:sysClr val="windowText" lastClr="000000"/>
+      </a:dk1>
+      <a:lt1>
+        <a:sysClr val="window" lastClr="FFFFFF"/>
+      </a:lt1>
+      <a:dk2>
+        <a:srgbClr val="44546A"/>
+      </a:dk2>
+      <a:lt2>
+        <a:srgbClr val="E7E6E6"/>
+      </a:lt2>
+      <a:accent1>
+        <a:srgbClr val="4472C4"/>
+      </a:accent1>
+      <a:accent2>
+        <a:srgbClr val="ED7D31"/>
+      </a:accent2>
+      <a:accent3>
+        <a:srgbClr val="A5A5A5"/>
+      </a:accent3>
+      <a:accent4>
+        <a:srgbClr val="FFC000"/>
+      </a:accent4>
+      <a:accent5>
+        <a:srgbClr val="5B9BD5"/>
+      </a:accent5>
+      <a:accent6>
+        <a:srgbClr val="70AD47"/>
+      </a:accent6>
+      <a:hlink>
+        <a:srgbClr val="0563C1"/>
+      </a:hlink>
+      <a:folHlink>
+        <a:srgbClr val="954F72"/>
+      </a:folHlink>
+    </a:clrScheme>
+    <a:fontScheme name="Office">
+      <a:majorFont>
+        <a:latin typeface="Calibri Light" panose="020F0302020204030204"/>
+        <a:ea typeface=""/>
+        <a:cs typeface=""/>
+        <a:font script="Jpan" typeface="游ゴシック Light"/>
+        <a:font script="Hang" typeface="맑은 고딕"/>
+        <a:font script="Hans" typeface="等线 Light"/>
+        <a:font script="Hant" typeface="新細明體"/>
+        <a:font script="Arab" typeface="Times New Roman"/>
+        <a:font script="Hebr" typeface="Times New Roman"/>
+        <a:font script="Thai" typeface="Angsana New"/>
+        <a:font script="Ethi" typeface="Nyala"/>
+        <a:font script="Beng" typeface="Vrinda"/>
+        <a:font script="Gujr" typeface="Shruti"/>
+        <a:font script="Khmr" typeface="MoolBoran"/>
+        <a:font script="Knda" typeface="Tunga"/>
+        <a:font script="Guru" typeface="Raavi"/>
+        <a:font script="Cans" typeface="Euphemia"/>
+        <a:font script="Cher" typeface="Plantagenet Cherokee"/>
+        <a:font script="Yiii" typeface="Microsoft Yi Baiti"/>
+        <a:font script="Tibt" typeface="Microsoft Himalaya"/>
+        <a:font script="Thaa" typeface="MV Boli"/>
+        <a:font script="Deva" typeface="Mangal"/>
+        <a:font script="Telu" typeface="Gautami"/>
+        <a:font script="Taml" typeface="Latha"/>
+        <a:font script="Syrc" typeface="Estrangelo Edessa"/>
+        <a:font script="Orya" typeface="Kalinga"/>
+        <a:font script="Mlym" typeface="Kartika"/>
+        <a:font script="Laoo" typeface="DokChampa"/>
+        <a:font script="Sinh" typeface="Iskoola Pota"/>
+        <a:font script="Mong" typeface="Mongolian Baiti"/>
+        <a:font script="Viet" typeface="Times New Roman"/>
+        <a:font script="Uigh" typeface="Microsoft Uighur"/>
+        <a:font script="Geor" typeface="Sylfaen"/>
+        <a:font script="Armn" typeface="Arial"/>
+        <a:font script="Bugi" typeface="Leelawadee UI"/>
+        <a:font script="Bopo" typeface="Microsoft JhengHei"/>
+        <a:font script="Java" typeface="Javanese Text"/>
+        <a:font script="Lisu" typeface="Segoe UI"/>
+        <a:font script="Mymr" typeface="Myanmar Text"/>
+        <a:font script="Nkoo" typeface="Ebrima"/>
+        <a:font script="Olck" typeface="Nirmala UI"/>
+        <a:font script="Osma" typeface="Ebrima"/>
+        <a:font script="Phag" typeface="Phagspa"/>
+        <a:font script="Syrn" typeface="Estrangelo Edessa"/>
+        <a:font script="Syrj" typeface="Estrangelo Edessa"/>
+        <a:font script="Syre" typeface="Estrangelo Edessa"/>
+        <a:font script="Sora" typeface="Nirmala UI"/>
+        <a:font script="Tale" typeface="Microsoft Tai Le"/>
+        <a:font script="Talu" typeface="Microsoft New Tai Lue"/>
+        <a:font script="Tfng" typeface="Ebrima"/>
+      </a:majorFont>
+      <a:minorFont>
+        <a:latin typeface="Calibri" panose="020F0502020204030204"/>
+        <a:ea typeface=""/>
+        <a:cs typeface=""/>
+        <a:font script="Jpan" typeface="游ゴシック"/>
+        <a:font script="Hang" typeface="맑은 고딕"/>
+        <a:font script="Hans" typeface="等线"/>
+        <a:font script="Hant" typeface="新細明體"/>
+        <a:font script="Arab" typeface="Arial"/>
+        <a:font script="Hebr" typeface="Arial"/>
+        <a:font script="Thai" typeface="Cordia New"/>
+        <a:font script="Ethi" typeface="Nyala"/>
+        <a:font script="Beng" typeface="Vrinda"/>
+        <a:font script="Gujr" typeface="Shruti"/>
+        <a:font script="Khmr" typeface="DaunPenh"/>
+        <a:font script="Knda" typeface="Tunga"/>
+        <a:font script="Guru" typeface="Raavi"/>
+        <a:font script="Cans" typeface="Euphemia"/>
+        <a:font script="Cher" typeface="Plantagenet Cherokee"/>
+        <a:font script="Yiii" typeface="Microsoft Yi Baiti"/>
+        <a:font script="Tibt" typeface="Microsoft Himalaya"/>
+        <a:font script="Thaa" typeface="MV Boli"/>
+        <a:font script="Deva" typeface="Mangal"/>
+        <a:font script="Telu" typeface="Gautami"/>
+        <a:font script="Taml" typeface="Latha"/>
+        <a:font script="Syrc" typeface="Estrangelo Edessa"/>
+        <a:font script="Orya" typeface="Kalinga"/>
+        <a:font script="Mlym" typeface="Kartika"/>
+        <a:font script="Laoo" typeface="DokChampa"/>
+        <a:font script="Sinh" typeface="Iskoola Pota"/>
+        <a:font script="Mong" typeface="Mongolian Baiti"/>
+        <a:font script="Viet" typeface="Arial"/>
+        <a:font script="Uigh" typeface="Microsoft Uighur"/>
+        <a:font script="Geor" typeface="Sylfaen"/>
+        <a:font script="Armn" typeface="Arial"/>
+        <a:font script="Bugi" typeface="Leelawadee UI"/>
+        <a:font script="Bopo" typeface="Microsoft JhengHei"/>
+        <a:font script="Java" typeface="Javanese Text"/>
+        <a:font script="Lisu" typeface="Segoe UI"/>
+        <a:font script="Mymr" typeface="Myanmar Text"/>
+        <a:font script="Nkoo" typeface="Ebrima"/>
+        <a:font script="Olck" typeface="Nirmala UI"/>
+        <a:font script="Osma" typeface="Ebrima"/>
+        <a:font script="Phag" typeface="Phagspa"/>
+        <a:font script="Syrn" typeface="Estrangelo Edessa"/>
+        <a:font script="Syrj" typeface="Estrangelo Edessa"/>
+        <a:font script="Syre" typeface="Estrangelo Edessa"/>
+        <a:font script="Sora" typeface="Nirmala UI"/>
+        <a:font script="Tale" typeface="Microsoft Tai Le"/>
+        <a:font script="Talu" typeface="Microsoft New Tai Lue"/>
+        <a:font script="Tfng" typeface="Ebrima"/>
+      </a:minorFont>
+    </a:fontScheme>
+    <a:fmtScheme name="Office">
+      <a:fillStyleLst>
+        <a:solidFill>
+          <a:schemeClr val="phClr"/>
+        </a:solidFill>
+        <a:gradFill rotWithShape="1">
+          <a:gsLst>
+            <a:gs pos="0">
+              <a:schemeClr val="phClr">
+                <a:lumMod val="110000"/>
+                <a:satMod val="105000"/>
+                <a:tint val="67000"/>
+              </a:schemeClr>
+            </a:gs>
+            <a:gs pos="50000">
+              <a:schemeClr val="phClr">
+                <a:lumMod val="105000"/>
+                <a:satMod val="103000"/>
+                <a:tint val="73000"/>
+              </a:schemeClr>
+            </a:gs>
+            <a:gs pos="100000">
+              <a:schemeClr val="phClr">
+                <a:lumMod val="105000"/>
+                <a:satMod val="109000"/>
+                <a:tint val="81000"/>
+              </a:schemeClr>
+            </a:gs>
+          </a:gsLst>
+          <a:lin ang="5400000" scaled="0"/>
+        </a:gradFill>
+        <a:gradFill rotWithShape="1">
+          <a:gsLst>
+            <a:gs pos="0">
+              <a:schemeClr val="phClr">
+                <a:satMod val="103000"/>
+                <a:lumMod val="102000"/>
+                <a:tint val="94000"/>
+              </a:schemeClr>
+            </a:gs>
+            <a:gs pos="50000">
+              <a:schemeClr val="phClr">
+                <a:satMod val="110000"/>
+                <a:lumMod val="100000"/>
+                <a:shade val="100000"/>
+              </a:schemeClr>
+            </a:gs>
+            <a:gs pos="100000">
+              <a:schemeClr val="phClr">
+                <a:lumMod val="99000"/>
+                <a:satMod val="120000"/>
+                <a:shade val="78000"/>
+              </a:schemeClr>
+            </a:gs>
+          </a:gsLst>
+          <a:lin ang="5400000" scaled="0"/>
+        </a:gradFill>
+      </a:fillStyleLst>
+      <a:lnStyleLst>
+        <a:ln w="6350" cap="flat" cmpd="sng" algn="ctr">
+          <a:solidFill>
+            <a:schemeClr val="phClr"/>
+          </a:solidFill>
+          <a:prstDash val="solid"/>
+          <a:miter lim="800000"/>
+        </a:ln>
+        <a:ln w="12700" cap="flat" cmpd="sng" algn="ctr">
+          <a:solidFill>
+            <a:schemeClr val="phClr"/>
+          </a:solidFill>
+          <a:prstDash val="solid"/>
+          <a:miter lim="800000"/>
+        </a:ln>
+        <a:ln w="19050" cap="flat" cmpd="sng" algn="ctr">
+          <a:solidFill>
+            <a:schemeClr val="phClr"/>
+          </a:solidFill>
+          <a:prstDash val="solid"/>
+          <a:miter lim="800000"/>
+        </a:ln>
+      </a:lnStyleLst>
+      <a:effectStyleLst>
+        <a:effectStyle>
+          <a:effectLst/>
+        </a:effectStyle>
+        <a:effectStyle>
+          <a:effectLst/>
+        </a:effectStyle>
+        <a:effectStyle>
+          <a:effectLst>
+            <a:outerShdw blurRad="57150" dist="19050" dir="5400000" algn="ctr" rotWithShape="0">
+              <a:srgbClr val="000000">
+                <a:alpha val="63000"/>
+              </a:srgbClr>
+            </a:outerShdw>
+          </a:effectLst>
+        </a:effectStyle>
+      </a:effectStyleLst>
+      <a:bgFillStyleLst>
+        <a:solidFill>
+          <a:schemeClr val="phClr"/>
+        </a:solidFill>
+        <a:solidFill>
+          <a:schemeClr val="phClr">
+            <a:tint val="95000"/>
+            <a:satMod val="170000"/>
+          </a:schemeClr>
+        </a:solidFill>
+        <a:gradFill rotWithShape="1">
+          <a:gsLst>
+            <a:gs pos="0">
+              <a:schemeClr val="phClr">
+                <a:tint val="93000"/>
+                <a:satMod val="150000"/>
+                <a:shade val="98000"/>
+                <a:lumMod val="102000"/>
+              </a:schemeClr>
+            </a:gs>
+            <a:gs pos="50000">
+              <a:schemeClr val="phClr">
+                <a:tint val="98000"/>
+                <a:satMod val="130000"/>
+                <a:shade val="90000"/>
+                <a:lumMod val="103000"/>
+              </a:schemeClr>
+            </a:gs>
+            <a:gs pos="100000">
+              <a:schemeClr val="phClr">
+                <a:shade val="63000"/>
+                <a:satMod val="120000"/>
+              </a:schemeClr>
+            </a:gs>
+          </a:gsLst>
+          <a:lin ang="5400000" scaled="0"/>
+        </a:gradFill>
+      </a:bgFillStyleLst>
+    </a:fmtScheme>
+  </a:themeElements>
+  <a:objectDefaults/>
+  <a:extraClrSchemeLst/>
+  <a:extLst>
+    <a:ext uri="{05A4C25C-085E-4340-85A3-A5531E510DB2}">
+      <thm15:themeFamily xmlns:thm15="http://schemas.microsoft.com/office/thememl/2012/main" name="Office Theme" id="{62F939B6-93AF-4DB8-9C6B-D6C7DFDC589F}" vid="{4A3C46E8-61CC-4603-A589-7422A47A8E4A}"/>
+    </a:ext>
+  </a:extLst>
+</a:theme>
 </file>
--- a/lessons/lesson05_research_grade_ml/theory/slides/Lecture5 - Research-Grade Machine Learning.pptx
+++ b/lessons/lesson05_research_grade_ml/theory/slides/Lecture5 - Research-Grade Machine Learning.pptx
@@ -507,7 +507,7 @@
           <a:p>
             <a:r>
               <a:rPr lang="en-US" dirty="0"/>
-              <a:t>1 min. The shift in perspective: for four lectures you were the builder; today you become the judge. The skill that separates a publishable biomarker from the thousands that fail is demonstrating trust, not a cleverer algorithm.</a:t>
+              <a:t>Today -&gt; judging model -&gt; make sure it survives the after publication validation </a:t>
             </a:r>
           </a:p>
         </p:txBody>
@@ -594,7 +594,7 @@
           <a:p>
             <a:r>
               <a:rPr lang="en-US" dirty="0"/>
-              <a:t>5 min. Covariate: feature distributions differ (new platform, younger cohort). Label: outcome frequency differs (screening cohort, fewer recurrences). Concept: the feature-&gt;outcome relationship itself changes (new standard of care) -- can invalidate the biomarker entirely.</a:t>
+              <a:t>Describe thoroughly 1 -&gt; 2 -&gt; 3</a:t>
             </a:r>
           </a:p>
         </p:txBody>
@@ -681,7 +681,7 @@
           <a:p>
             <a:r>
               <a:rPr lang="en-US" dirty="0"/>
-              <a:t>5 min. All course long we simplified time-to-event recurrence into a binary label -- a deliberate teaching choice. Real outcomes are time-to-event with censoring. Survival models (Cox, conceptually) use the time axis. The validation discipline still applies; the outcome is just richer and more honest.</a:t>
+              <a:t>Just a quick note -&gt; 1 -&gt; 2 -&gt; comment figure KM -&gt; 3 -&gt; 4 </a:t>
             </a:r>
           </a:p>
         </p:txBody>
@@ -768,7 +768,7 @@
           <a:p>
             <a:r>
               <a:rPr lang="en-US" dirty="0"/>
-              <a:t>4 min. Computational: can someone rerun your analysis and get your numbers? Scientific (replication): can someone reproduce your finding in new data? Different bars -- passing the first does not guarantee the second. Most published work falls short of even the first.</a:t>
+              <a:t>1 -&gt; 2 -&gt; 3 -&gt; 4</a:t>
             </a:r>
           </a:p>
         </p:txBody>
@@ -855,7 +855,7 @@
           <a:p>
             <a:r>
               <a:rPr lang="en-US" dirty="0"/>
-              <a:t>4 min. Seeds; encapsulated pipelines (refit inside CV); version &amp; environment capture; documentation; open science (code, data where possible, model/spec). Callback (L4): reproducibility is self-defense -- it catches your own leakage before a reviewer.</a:t>
+              <a:t>Recall</a:t>
             </a:r>
           </a:p>
         </p:txBody>
@@ -942,7 +942,7 @@
           <a:p>
             <a:r>
               <a:rPr lang="en-US" dirty="0"/>
-              <a:t>5 min. A biomarker can be highly significant and clinically useless. Significance: 'an association exists.' Utility: 'does it change a decision and help a patient?' A tiny HR with a vanishing p-value (large n) may move no decision. Ask: actionability, effect size, added value.</a:t>
+              <a:t>Most important part. 1 -&gt; very often significance is enough for paper. But for clinics not. -&gt; 2 -&gt; 3 -&gt; example in 4</a:t>
             </a:r>
           </a:p>
         </p:txBody>
@@ -1029,7 +1029,7 @@
           <a:p>
             <a:r>
               <a:rPr lang="en-US" dirty="0"/>
-              <a:t>4 min. Actionability (changes management). Incremental value (beats grade/stage/nodal/Ki-67). Net benefit at a usable threshold. A biomarker that doesn't beat tumour grade and isn't actionable won't -- and shouldn't -- be adopted.</a:t>
+              <a:t>How do we define more rigorously actionability?</a:t>
             </a:r>
           </a:p>
         </p:txBody>
@@ -1114,10 +1114,7 @@
           <a:bodyPr/>
           <a:lstStyle/>
           <a:p>
-            <a:r>
-              <a:rPr lang="en-US" dirty="0"/>
-              <a:t>5 min. Each is an EVIDENCE failure, not an algorithm failure -- the course thesis again. Criticism -&gt; why it matters -&gt; how to avoid.</a:t>
-            </a:r>
+            <a:endParaRPr lang="en-US" dirty="0"/>
           </a:p>
         </p:txBody>
       </p:sp>
@@ -1203,7 +1200,7 @@
           <a:p>
             <a:r>
               <a:rPr lang="en-US" dirty="0"/>
-              <a:t>4 min. Run this on any transcriptomic ML paper. Task &amp; n? Validation appropriate (external?)? Leakage avoided (order of operations)? Reproducible (code/data/seeds)? Conclusions justified? Full version is the reviewer checklist handout.</a:t>
+              <a:t>Questions to ask yourself</a:t>
             </a:r>
           </a:p>
         </p:txBody>
@@ -1288,10 +1285,7 @@
           <a:bodyPr/>
           <a:lstStyle/>
           <a:p>
-            <a:r>
-              <a:rPr lang="en-US" dirty="0"/>
-              <a:t>4 min. Brief, non-technical. Deep learning (powerful with big data; in pn shares/amplifies pitfalls). Foundation models (validation rules unchanged). Multi-omics integration. Spatial omics. Precision oncology. Banner: the validation rules don't change.</a:t>
-            </a:r>
+            <a:endParaRPr lang="en-US" dirty="0"/>
           </a:p>
         </p:txBody>
       </p:sp>
@@ -1375,10 +1369,7 @@
           <a:bodyPr/>
           <a:lstStyle/>
           <a:p>
-            <a:r>
-              <a:rPr lang="en-US" dirty="0"/>
-              <a:t>4 min. Question -&gt; Data -&gt; Baseline -&gt; Features -&gt; Model selection -&gt; Validation -&gt; Interpretation -&gt; Publication. Each stage had a lecture and a failure mode. Trustworthiness is built in at every stage, not bolted on. This pipeline IS the course.</a:t>
-            </a:r>
+            <a:endParaRPr lang="en-US" dirty="0"/>
           </a:p>
         </p:txBody>
       </p:sp>
@@ -1464,7 +1455,7 @@
           <a:p>
             <a:r>
               <a:rPr lang="en-US" dirty="0"/>
-              <a:t>2 min. Trustworthy problem (L1), model (L2), features (L3), improvement &amp; honest validation (L4). You can build and evaluate a model. The hardest thing left: judging whether it is trustworthy and publication-ready. Today: everything that can go wrong, and how to catch it. You move to the reviewer's chair.</a:t>
+              <a:t>Recap 1 -&gt; 2 -&gt; 3 -&gt; 4 (we touched here and there in the 4 lectures but today we go through it)</a:t>
             </a:r>
           </a:p>
         </p:txBody>
@@ -1549,10 +1540,7 @@
           <a:bodyPr/>
           <a:lstStyle/>
           <a:p>
-            <a:r>
-              <a:rPr lang="en-US" dirty="0"/>
-              <a:t>2 min. Deliver the thesis with full weight. Corollaries: failures occur after development; validation &gt; optimization; reproducibility is essential; skepticism is healthy. The empowering close: you can now build, evaluate, AND review.</a:t>
-            </a:r>
+            <a:endParaRPr lang="en-US" dirty="0"/>
           </a:p>
         </p:txBody>
       </p:sp>
@@ -1636,10 +1624,7 @@
           <a:bodyPr/>
           <a:lstStyle/>
           <a:p>
-            <a:r>
-              <a:rPr lang="en-US" dirty="0"/>
-              <a:t>3 min. Tick objectives. Capstone: receive a FLAWED biomarker analysis, diagnose its flaws (leakage, no external validation, bad preprocessing, overfitting, unsupported interpretation), build a corrected workflow, compare honestly, and WRITE A REVIEWER REPORT with a publish/revise/reject recommendation. You leave able to build, evaluate, review, and design.</a:t>
-            </a:r>
+            <a:endParaRPr lang="en-US" dirty="0"/>
           </a:p>
         </p:txBody>
       </p:sp>
@@ -1723,10 +1708,7 @@
           <a:bodyPr/>
           <a:lstStyle/>
           <a:p>
-            <a:r>
-              <a:rPr lang="en-US" dirty="0"/>
-              <a:t>2 min. Close the course. Name the through-line; leave the durable charge. The judgment built here outlasts any algorithm. Thank them.</a:t>
-            </a:r>
+            <a:endParaRPr lang="en-US" dirty="0"/>
           </a:p>
         </p:txBody>
       </p:sp>
@@ -1812,7 +1794,7 @@
           <a:p>
             <a:r>
               <a:rPr lang="en-US" dirty="0"/>
-              <a:t>2 min. Flag the lecture-defining ones: external validation &amp; generalization, exploratory vs confirmatory, and significance vs clinical utility. The deliverable: by the end you can sit in the reviewer's chair.</a:t>
+              <a:t>Most important are generalization and in our field statistical significance and its difference with clinical utility</a:t>
             </a:r>
           </a:p>
         </p:txBody>
@@ -1899,7 +1881,7 @@
           <a:p>
             <a:r>
               <a:rPr lang="en-US" dirty="0"/>
-              <a:t>4 min. Provocative open: thousands of signatures published, a tiny fraction used clinically. Why? Usually not bad biology -- the EVIDENCE was never trustworthy. The failures are predictable, and almost all happen AFTER model development.</a:t>
+              <a:t>1 -&gt; figure on the right (it’s a bottle neck of filters) -&gt; one could say biology is wrong -&gt; 2  (in breast cancer only handful managed to get clinics) -&gt; 3</a:t>
             </a:r>
           </a:p>
         </p:txBody>
@@ -1986,7 +1968,24 @@
           <a:p>
             <a:r>
               <a:rPr lang="en-US" dirty="0"/>
-              <a:t>4 min. Each is a callback and a forward-link. None is about a bad algorithm -- they are evidence failures. Overfitting (L2), small cohorts/pn (L1), dataset bias/batch (L4), no external validation (today), publication bias (the field, not the paper).</a:t>
+              <a:t>The 5 recurring reason of failures: 1 (describe, improve with regularization or simpler model or more data) -&gt; 2 (we should validate with more data) -&gt; 3 (assuming correct normalization, but not -&gt; better implement it in the pipeline) -&gt; 4 (only on hold out same cohort test) -&gt; 5 -&gt; question (answer 5).</a:t>
+            </a:r>
+          </a:p>
+          <a:p>
+            <a:endParaRPr lang="en-US" dirty="0"/>
+          </a:p>
+          <a:p>
+            <a:r>
+              <a:rPr lang="en-US" dirty="0"/>
+              <a:t>Let’s start with validation and why </a:t>
+            </a:r>
+            <a:r>
+              <a:rPr lang="en-US" dirty="0" err="1"/>
+              <a:t>ext</a:t>
+            </a:r>
+            <a:r>
+              <a:rPr lang="en-US" dirty="0"/>
+              <a:t> is so important</a:t>
             </a:r>
           </a:p>
         </p:txBody>
@@ -2073,7 +2072,15 @@
           <a:p>
             <a:r>
               <a:rPr lang="en-US" dirty="0"/>
-              <a:t>4 min. Re-anchor the ladder: split -&gt; CV -&gt; nested CV. Each answers 'how well does this pipeline do on data LIKE THIS?' Done right it controls overfitting and tuning optimism. But every rung stays inside the original cohort.</a:t>
+              <a:t>Before </a:t>
+            </a:r>
+            <a:r>
+              <a:rPr lang="en-US" dirty="0" err="1"/>
+              <a:t>ext</a:t>
+            </a:r>
+            <a:r>
+              <a:rPr lang="en-US" dirty="0"/>
+              <a:t> validation -&gt; title -&gt; 1 -&gt; 2 -&gt; 3 -&gt; 4 (unless you used the external as test)</a:t>
             </a:r>
           </a:p>
         </p:txBody>
@@ -2160,7 +2167,15 @@
           <a:p>
             <a:r>
               <a:rPr lang="en-US" dirty="0"/>
-              <a:t>5 min. Validate on a DIFFERENT cohort -- hospital, study, population, platform. Closest thing to truth before a trial; tests generalization, not memorization. METABRIC (Illumina) -&gt; GSE6532 (Affymetrix). A model that holds across cohorts has earned a claim.</a:t>
+              <a:t>External validation -&gt; 1 (definition) -&gt; 2 ( since trials are expensive, we </a:t>
+            </a:r>
+            <a:r>
+              <a:rPr lang="en-US" dirty="0" err="1"/>
+              <a:t>wanna</a:t>
+            </a:r>
+            <a:r>
+              <a:rPr lang="en-US" dirty="0"/>
+              <a:t> make sure beforehand) -&gt; 3 (our system) -&gt; 4 -&gt; 5</a:t>
             </a:r>
           </a:p>
         </p:txBody>
@@ -2247,7 +2262,7 @@
           <a:p>
             <a:r>
               <a:rPr lang="en-US" dirty="0"/>
-              <a:t>4 min. It exposes what internal hides: batch, cohort quirks, leakage that survived CV. Performance almost always drops -- report how much. 'Validated' should mean externally validated. Beware re-tuning until a signature 'passes' -- that's a second training set.</a:t>
+              <a:t>Title -&gt; 1 (batch effects because single cohort in CV, survived CV for instance patient longitudinal data leakage) -&gt; 2 -&gt; 3 -&gt; 4 -&gt; figure</a:t>
             </a:r>
           </a:p>
         </p:txBody>
@@ -2334,7 +2349,7 @@
           <a:p>
             <a:r>
               <a:rPr lang="en-US" dirty="0"/>
-              <a:t>5 min. Models assume the deployment world looks like the training world -- often it doesn't. Distribution shift: the data distribution changes between development and deployment. Sources: population, treatment, platform, lab. The external drop isn't bad luck -- it's a real change in the data.</a:t>
+              <a:t>Title -&gt;Dataset shift -&gt; happens more often. -&gt; 1 -&gt; 2 -&gt; 3 -&gt; 4 (MORE INFO IN THE NEXT SLIDE)</a:t>
             </a:r>
           </a:p>
         </p:txBody>
@@ -16670,7 +16685,7 @@
                 <a:ea typeface="Calibri" pitchFamily="34" charset="-122"/>
                 <a:cs typeface="Calibri" pitchFamily="34" charset="-120"/>
               </a:rPr>
-              <a:t>The failures are predictable, and almost all happen after model development.</a:t>
+              <a:t>The failures are predictable, and almost all happen outside the model.</a:t>
             </a:r>
             <a:endParaRPr lang="en-US" sz="1550" dirty="0"/>
           </a:p>
